--- a/AttackIQ-XDR-KQL-CTF-Training.pptx
+++ b/AttackIQ-XDR-KQL-CTF-Training.pptx
@@ -239,7 +239,7 @@
             </a:lvl1pPr>
           </a:lstStyle>
           <a:p>
-            <a:fld id="{133AF500-C550-4C33-9275-8766B268F3DF}" type="datetimeFigureOut">
+            <a:fld id="{BDD71DDA-A39D-4E2C-B6FB-0B5C66D65AAF}" type="datetimeFigureOut">
               <a:rPr lang="en-US" smtClean="0"/>
               <a:t>5/4/2026</a:t>
             </a:fld>
@@ -397,7 +397,7 @@
             </a:lvl1pPr>
           </a:lstStyle>
           <a:p>
-            <a:fld id="{8D9037BC-3A46-4DD7-9FFD-A89B6E8D52C4}" type="slidenum">
+            <a:fld id="{968D47A0-3A76-4FEC-912D-1D1566D7CA4D}" type="slidenum">
               <a:rPr lang="en-US" smtClean="0"/>
               <a:t>‹#›</a:t>
             </a:fld>
@@ -408,7 +408,7 @@
     </p:spTree>
     <p:extLst>
       <p:ext uri="{BB962C8B-B14F-4D97-AF65-F5344CB8AC3E}">
-        <p14:creationId xmlns:p14="http://schemas.microsoft.com/office/powerpoint/2010/main" val="3270618304"/>
+        <p14:creationId xmlns:p14="http://schemas.microsoft.com/office/powerpoint/2010/main" val="3026560198"/>
       </p:ext>
     </p:extLst>
   </p:cSld>
@@ -574,7 +574,7 @@
           <a:bodyPr/>
           <a:lstStyle/>
           <a:p>
-            <a:fld id="{8D9037BC-3A46-4DD7-9FFD-A89B6E8D52C4}" type="slidenum">
+            <a:fld id="{968D47A0-3A76-4FEC-912D-1D1566D7CA4D}" type="slidenum">
               <a:rPr lang="en-US" smtClean="0"/>
               <a:t>2</a:t>
             </a:fld>
@@ -585,7 +585,7 @@
     </p:spTree>
     <p:extLst>
       <p:ext uri="{BB962C8B-B14F-4D97-AF65-F5344CB8AC3E}">
-        <p14:creationId xmlns:p14="http://schemas.microsoft.com/office/powerpoint/2010/main" val="1315735392"/>
+        <p14:creationId xmlns:p14="http://schemas.microsoft.com/office/powerpoint/2010/main" val="2521804618"/>
       </p:ext>
     </p:extLst>
   </p:cSld>
@@ -617,7 +617,7 @@
           <p:cNvPr id="2" name="Title 1">
             <a:extLst>
               <a:ext uri="{FF2B5EF4-FFF2-40B4-BE49-F238E27FC236}">
-                <a16:creationId xmlns:a16="http://schemas.microsoft.com/office/drawing/2014/main" id="{BC227FDA-8725-B704-3E0A-8512B52E4999}"/>
+                <a16:creationId xmlns:a16="http://schemas.microsoft.com/office/drawing/2014/main" id="{A3A1AD5B-8730-79D4-6963-177956FD02F4}"/>
               </a:ext>
             </a:extLst>
           </p:cNvPr>
@@ -654,7 +654,7 @@
           <p:cNvPr id="3" name="Subtitle 2">
             <a:extLst>
               <a:ext uri="{FF2B5EF4-FFF2-40B4-BE49-F238E27FC236}">
-                <a16:creationId xmlns:a16="http://schemas.microsoft.com/office/drawing/2014/main" id="{B8386B42-5526-F6BA-CE51-F00E041F3ADF}"/>
+                <a16:creationId xmlns:a16="http://schemas.microsoft.com/office/drawing/2014/main" id="{8F58C377-8189-D227-0213-2C9FB84D85FE}"/>
               </a:ext>
             </a:extLst>
           </p:cNvPr>
@@ -724,7 +724,7 @@
           <p:cNvPr id="4" name="Date Placeholder 3">
             <a:extLst>
               <a:ext uri="{FF2B5EF4-FFF2-40B4-BE49-F238E27FC236}">
-                <a16:creationId xmlns:a16="http://schemas.microsoft.com/office/drawing/2014/main" id="{7CCF67DC-77D4-7CB5-D4C4-4D3D585CE302}"/>
+                <a16:creationId xmlns:a16="http://schemas.microsoft.com/office/drawing/2014/main" id="{FD693EA3-B654-68D6-8BA5-6D52D99264FC}"/>
               </a:ext>
             </a:extLst>
           </p:cNvPr>
@@ -740,7 +740,7 @@
           <a:bodyPr/>
           <a:lstStyle/>
           <a:p>
-            <a:fld id="{0F9D323F-703E-4E21-B214-E8116E050035}" type="datetimeFigureOut">
+            <a:fld id="{327952E1-5DDA-48DC-A74E-9FEA9991C1D6}" type="datetimeFigureOut">
               <a:rPr lang="en-US" smtClean="0"/>
               <a:t>5/4/2026</a:t>
             </a:fld>
@@ -753,7 +753,7 @@
           <p:cNvPr id="5" name="Footer Placeholder 4">
             <a:extLst>
               <a:ext uri="{FF2B5EF4-FFF2-40B4-BE49-F238E27FC236}">
-                <a16:creationId xmlns:a16="http://schemas.microsoft.com/office/drawing/2014/main" id="{3D7DBDCF-2DFC-FA52-DD56-5D113D98D9C1}"/>
+                <a16:creationId xmlns:a16="http://schemas.microsoft.com/office/drawing/2014/main" id="{727DE626-2FC0-9E3F-2C16-E184C362FC3E}"/>
               </a:ext>
             </a:extLst>
           </p:cNvPr>
@@ -778,7 +778,7 @@
           <p:cNvPr id="6" name="Slide Number Placeholder 5">
             <a:extLst>
               <a:ext uri="{FF2B5EF4-FFF2-40B4-BE49-F238E27FC236}">
-                <a16:creationId xmlns:a16="http://schemas.microsoft.com/office/drawing/2014/main" id="{732F2665-ABF3-5946-45F2-2B4781FED7A4}"/>
+                <a16:creationId xmlns:a16="http://schemas.microsoft.com/office/drawing/2014/main" id="{42445175-44D0-80CD-0043-7022A8278E11}"/>
               </a:ext>
             </a:extLst>
           </p:cNvPr>
@@ -794,7 +794,7 @@
           <a:bodyPr/>
           <a:lstStyle/>
           <a:p>
-            <a:fld id="{C505737C-23A9-40BE-8E11-FE111A409DB2}" type="slidenum">
+            <a:fld id="{91EB9E74-D7AA-41A6-AFA1-F9621B1893F5}" type="slidenum">
               <a:rPr lang="en-US" smtClean="0"/>
               <a:t>‹#›</a:t>
             </a:fld>
@@ -805,7 +805,7 @@
     </p:spTree>
     <p:extLst>
       <p:ext uri="{BB962C8B-B14F-4D97-AF65-F5344CB8AC3E}">
-        <p14:creationId xmlns:p14="http://schemas.microsoft.com/office/powerpoint/2010/main" val="4055653111"/>
+        <p14:creationId xmlns:p14="http://schemas.microsoft.com/office/powerpoint/2010/main" val="240110293"/>
       </p:ext>
     </p:extLst>
   </p:cSld>
@@ -837,7 +837,7 @@
           <p:cNvPr id="2" name="Title 1">
             <a:extLst>
               <a:ext uri="{FF2B5EF4-FFF2-40B4-BE49-F238E27FC236}">
-                <a16:creationId xmlns:a16="http://schemas.microsoft.com/office/drawing/2014/main" id="{1C02921D-CF22-5CC2-FB81-E05EA702155F}"/>
+                <a16:creationId xmlns:a16="http://schemas.microsoft.com/office/drawing/2014/main" id="{B6A7B4F6-B766-50FB-1EFC-795BB89CB02B}"/>
               </a:ext>
             </a:extLst>
           </p:cNvPr>
@@ -865,7 +865,7 @@
           <p:cNvPr id="3" name="Vertical Text Placeholder 2">
             <a:extLst>
               <a:ext uri="{FF2B5EF4-FFF2-40B4-BE49-F238E27FC236}">
-                <a16:creationId xmlns:a16="http://schemas.microsoft.com/office/drawing/2014/main" id="{1B774C83-8FBE-EC64-EF2C-748CA4760745}"/>
+                <a16:creationId xmlns:a16="http://schemas.microsoft.com/office/drawing/2014/main" id="{AA459D89-243A-1A1B-CE93-FF8549B316EB}"/>
               </a:ext>
             </a:extLst>
           </p:cNvPr>
@@ -922,7 +922,7 @@
           <p:cNvPr id="4" name="Date Placeholder 3">
             <a:extLst>
               <a:ext uri="{FF2B5EF4-FFF2-40B4-BE49-F238E27FC236}">
-                <a16:creationId xmlns:a16="http://schemas.microsoft.com/office/drawing/2014/main" id="{1C622A91-8230-0E57-3050-605478019EAA}"/>
+                <a16:creationId xmlns:a16="http://schemas.microsoft.com/office/drawing/2014/main" id="{73766189-C825-743A-9EC4-691FB14B7F26}"/>
               </a:ext>
             </a:extLst>
           </p:cNvPr>
@@ -938,7 +938,7 @@
           <a:bodyPr/>
           <a:lstStyle/>
           <a:p>
-            <a:fld id="{0F9D323F-703E-4E21-B214-E8116E050035}" type="datetimeFigureOut">
+            <a:fld id="{327952E1-5DDA-48DC-A74E-9FEA9991C1D6}" type="datetimeFigureOut">
               <a:rPr lang="en-US" smtClean="0"/>
               <a:t>5/4/2026</a:t>
             </a:fld>
@@ -951,7 +951,7 @@
           <p:cNvPr id="5" name="Footer Placeholder 4">
             <a:extLst>
               <a:ext uri="{FF2B5EF4-FFF2-40B4-BE49-F238E27FC236}">
-                <a16:creationId xmlns:a16="http://schemas.microsoft.com/office/drawing/2014/main" id="{CD8177D0-AC34-60AA-5BC3-94FA4D741516}"/>
+                <a16:creationId xmlns:a16="http://schemas.microsoft.com/office/drawing/2014/main" id="{C68C5418-7664-E14E-8321-7C3DFE746D30}"/>
               </a:ext>
             </a:extLst>
           </p:cNvPr>
@@ -976,7 +976,7 @@
           <p:cNvPr id="6" name="Slide Number Placeholder 5">
             <a:extLst>
               <a:ext uri="{FF2B5EF4-FFF2-40B4-BE49-F238E27FC236}">
-                <a16:creationId xmlns:a16="http://schemas.microsoft.com/office/drawing/2014/main" id="{855C46A0-E5E8-C9BB-2CF0-0D2F7C15B292}"/>
+                <a16:creationId xmlns:a16="http://schemas.microsoft.com/office/drawing/2014/main" id="{7EE6CA21-5538-AB5B-9690-B6680162CFF7}"/>
               </a:ext>
             </a:extLst>
           </p:cNvPr>
@@ -992,7 +992,7 @@
           <a:bodyPr/>
           <a:lstStyle/>
           <a:p>
-            <a:fld id="{C505737C-23A9-40BE-8E11-FE111A409DB2}" type="slidenum">
+            <a:fld id="{91EB9E74-D7AA-41A6-AFA1-F9621B1893F5}" type="slidenum">
               <a:rPr lang="en-US" smtClean="0"/>
               <a:t>‹#›</a:t>
             </a:fld>
@@ -1003,7 +1003,7 @@
     </p:spTree>
     <p:extLst>
       <p:ext uri="{BB962C8B-B14F-4D97-AF65-F5344CB8AC3E}">
-        <p14:creationId xmlns:p14="http://schemas.microsoft.com/office/powerpoint/2010/main" val="805601273"/>
+        <p14:creationId xmlns:p14="http://schemas.microsoft.com/office/powerpoint/2010/main" val="1137515856"/>
       </p:ext>
     </p:extLst>
   </p:cSld>
@@ -1035,7 +1035,7 @@
           <p:cNvPr id="2" name="Vertical Title 1">
             <a:extLst>
               <a:ext uri="{FF2B5EF4-FFF2-40B4-BE49-F238E27FC236}">
-                <a16:creationId xmlns:a16="http://schemas.microsoft.com/office/drawing/2014/main" id="{95274CC3-0848-B344-3033-1CD87068BAF3}"/>
+                <a16:creationId xmlns:a16="http://schemas.microsoft.com/office/drawing/2014/main" id="{6F148087-7D0A-7898-0B99-99D0A10A683E}"/>
               </a:ext>
             </a:extLst>
           </p:cNvPr>
@@ -1068,7 +1068,7 @@
           <p:cNvPr id="3" name="Vertical Text Placeholder 2">
             <a:extLst>
               <a:ext uri="{FF2B5EF4-FFF2-40B4-BE49-F238E27FC236}">
-                <a16:creationId xmlns:a16="http://schemas.microsoft.com/office/drawing/2014/main" id="{626F4F00-83AE-8DCE-8A8B-9B8A5EB0D53A}"/>
+                <a16:creationId xmlns:a16="http://schemas.microsoft.com/office/drawing/2014/main" id="{021360BB-B0F0-ECBE-17CD-E09B5A0FC8F9}"/>
               </a:ext>
             </a:extLst>
           </p:cNvPr>
@@ -1130,7 +1130,7 @@
           <p:cNvPr id="4" name="Date Placeholder 3">
             <a:extLst>
               <a:ext uri="{FF2B5EF4-FFF2-40B4-BE49-F238E27FC236}">
-                <a16:creationId xmlns:a16="http://schemas.microsoft.com/office/drawing/2014/main" id="{91C79C4B-7149-874A-BBB8-AABE9ABD517A}"/>
+                <a16:creationId xmlns:a16="http://schemas.microsoft.com/office/drawing/2014/main" id="{CE63E5F4-63B0-0931-D7DF-B709B0AA8011}"/>
               </a:ext>
             </a:extLst>
           </p:cNvPr>
@@ -1146,7 +1146,7 @@
           <a:bodyPr/>
           <a:lstStyle/>
           <a:p>
-            <a:fld id="{0F9D323F-703E-4E21-B214-E8116E050035}" type="datetimeFigureOut">
+            <a:fld id="{327952E1-5DDA-48DC-A74E-9FEA9991C1D6}" type="datetimeFigureOut">
               <a:rPr lang="en-US" smtClean="0"/>
               <a:t>5/4/2026</a:t>
             </a:fld>
@@ -1159,7 +1159,7 @@
           <p:cNvPr id="5" name="Footer Placeholder 4">
             <a:extLst>
               <a:ext uri="{FF2B5EF4-FFF2-40B4-BE49-F238E27FC236}">
-                <a16:creationId xmlns:a16="http://schemas.microsoft.com/office/drawing/2014/main" id="{BB0C5B9B-6535-D07E-8296-CDECDB87D203}"/>
+                <a16:creationId xmlns:a16="http://schemas.microsoft.com/office/drawing/2014/main" id="{A44E0B9E-90DD-CB6B-828A-37058C881A6A}"/>
               </a:ext>
             </a:extLst>
           </p:cNvPr>
@@ -1184,7 +1184,7 @@
           <p:cNvPr id="6" name="Slide Number Placeholder 5">
             <a:extLst>
               <a:ext uri="{FF2B5EF4-FFF2-40B4-BE49-F238E27FC236}">
-                <a16:creationId xmlns:a16="http://schemas.microsoft.com/office/drawing/2014/main" id="{4BAE1C17-52EA-858D-E403-6EFB371DACE5}"/>
+                <a16:creationId xmlns:a16="http://schemas.microsoft.com/office/drawing/2014/main" id="{AEE80B6E-B690-0572-B1D8-48BF37813439}"/>
               </a:ext>
             </a:extLst>
           </p:cNvPr>
@@ -1200,7 +1200,7 @@
           <a:bodyPr/>
           <a:lstStyle/>
           <a:p>
-            <a:fld id="{C505737C-23A9-40BE-8E11-FE111A409DB2}" type="slidenum">
+            <a:fld id="{91EB9E74-D7AA-41A6-AFA1-F9621B1893F5}" type="slidenum">
               <a:rPr lang="en-US" smtClean="0"/>
               <a:t>‹#›</a:t>
             </a:fld>
@@ -1211,7 +1211,7 @@
     </p:spTree>
     <p:extLst>
       <p:ext uri="{BB962C8B-B14F-4D97-AF65-F5344CB8AC3E}">
-        <p14:creationId xmlns:p14="http://schemas.microsoft.com/office/powerpoint/2010/main" val="258373056"/>
+        <p14:creationId xmlns:p14="http://schemas.microsoft.com/office/powerpoint/2010/main" val="3290105098"/>
       </p:ext>
     </p:extLst>
   </p:cSld>
@@ -1243,7 +1243,7 @@
           <p:cNvPr id="2" name="Title 1">
             <a:extLst>
               <a:ext uri="{FF2B5EF4-FFF2-40B4-BE49-F238E27FC236}">
-                <a16:creationId xmlns:a16="http://schemas.microsoft.com/office/drawing/2014/main" id="{CD3D3D00-55F8-7E66-6585-BB3C13276F4B}"/>
+                <a16:creationId xmlns:a16="http://schemas.microsoft.com/office/drawing/2014/main" id="{E59BD21E-858A-5D51-E34F-86EC7E71982E}"/>
               </a:ext>
             </a:extLst>
           </p:cNvPr>
@@ -1271,7 +1271,7 @@
           <p:cNvPr id="3" name="Content Placeholder 2">
             <a:extLst>
               <a:ext uri="{FF2B5EF4-FFF2-40B4-BE49-F238E27FC236}">
-                <a16:creationId xmlns:a16="http://schemas.microsoft.com/office/drawing/2014/main" id="{D7D05DB8-D833-C2F5-DC0B-90D2EE2B276A}"/>
+                <a16:creationId xmlns:a16="http://schemas.microsoft.com/office/drawing/2014/main" id="{3371A6FD-ED29-74A2-4274-C9585617C5DB}"/>
               </a:ext>
             </a:extLst>
           </p:cNvPr>
@@ -1328,7 +1328,7 @@
           <p:cNvPr id="4" name="Date Placeholder 3">
             <a:extLst>
               <a:ext uri="{FF2B5EF4-FFF2-40B4-BE49-F238E27FC236}">
-                <a16:creationId xmlns:a16="http://schemas.microsoft.com/office/drawing/2014/main" id="{AC501521-2B85-9D88-5C1F-E49EB94EB607}"/>
+                <a16:creationId xmlns:a16="http://schemas.microsoft.com/office/drawing/2014/main" id="{0A55F127-3FAD-986C-C859-4C42D65EC753}"/>
               </a:ext>
             </a:extLst>
           </p:cNvPr>
@@ -1344,7 +1344,7 @@
           <a:bodyPr/>
           <a:lstStyle/>
           <a:p>
-            <a:fld id="{0F9D323F-703E-4E21-B214-E8116E050035}" type="datetimeFigureOut">
+            <a:fld id="{327952E1-5DDA-48DC-A74E-9FEA9991C1D6}" type="datetimeFigureOut">
               <a:rPr lang="en-US" smtClean="0"/>
               <a:t>5/4/2026</a:t>
             </a:fld>
@@ -1357,7 +1357,7 @@
           <p:cNvPr id="5" name="Footer Placeholder 4">
             <a:extLst>
               <a:ext uri="{FF2B5EF4-FFF2-40B4-BE49-F238E27FC236}">
-                <a16:creationId xmlns:a16="http://schemas.microsoft.com/office/drawing/2014/main" id="{154452D1-F8D9-69AD-A932-F8352F5D8DB0}"/>
+                <a16:creationId xmlns:a16="http://schemas.microsoft.com/office/drawing/2014/main" id="{BE1D4996-11D2-B1BA-F4D1-E166362675FB}"/>
               </a:ext>
             </a:extLst>
           </p:cNvPr>
@@ -1382,7 +1382,7 @@
           <p:cNvPr id="6" name="Slide Number Placeholder 5">
             <a:extLst>
               <a:ext uri="{FF2B5EF4-FFF2-40B4-BE49-F238E27FC236}">
-                <a16:creationId xmlns:a16="http://schemas.microsoft.com/office/drawing/2014/main" id="{52EACFF4-779C-DA4D-9187-2A7413ABD7A8}"/>
+                <a16:creationId xmlns:a16="http://schemas.microsoft.com/office/drawing/2014/main" id="{BAE7C47F-151B-B5E9-16CB-1E32CA43D9BA}"/>
               </a:ext>
             </a:extLst>
           </p:cNvPr>
@@ -1398,7 +1398,7 @@
           <a:bodyPr/>
           <a:lstStyle/>
           <a:p>
-            <a:fld id="{C505737C-23A9-40BE-8E11-FE111A409DB2}" type="slidenum">
+            <a:fld id="{91EB9E74-D7AA-41A6-AFA1-F9621B1893F5}" type="slidenum">
               <a:rPr lang="en-US" smtClean="0"/>
               <a:t>‹#›</a:t>
             </a:fld>
@@ -1409,7 +1409,7 @@
     </p:spTree>
     <p:extLst>
       <p:ext uri="{BB962C8B-B14F-4D97-AF65-F5344CB8AC3E}">
-        <p14:creationId xmlns:p14="http://schemas.microsoft.com/office/powerpoint/2010/main" val="1582066409"/>
+        <p14:creationId xmlns:p14="http://schemas.microsoft.com/office/powerpoint/2010/main" val="351492286"/>
       </p:ext>
     </p:extLst>
   </p:cSld>
@@ -1441,7 +1441,7 @@
           <p:cNvPr id="2" name="Title 1">
             <a:extLst>
               <a:ext uri="{FF2B5EF4-FFF2-40B4-BE49-F238E27FC236}">
-                <a16:creationId xmlns:a16="http://schemas.microsoft.com/office/drawing/2014/main" id="{EB031B01-32E2-4499-1C12-2219E62BA41E}"/>
+                <a16:creationId xmlns:a16="http://schemas.microsoft.com/office/drawing/2014/main" id="{8CA4D677-4C04-C50B-128E-DC746D765127}"/>
               </a:ext>
             </a:extLst>
           </p:cNvPr>
@@ -1478,7 +1478,7 @@
           <p:cNvPr id="3" name="Text Placeholder 2">
             <a:extLst>
               <a:ext uri="{FF2B5EF4-FFF2-40B4-BE49-F238E27FC236}">
-                <a16:creationId xmlns:a16="http://schemas.microsoft.com/office/drawing/2014/main" id="{506AADBD-417C-7C69-C5B2-AC4506D770F6}"/>
+                <a16:creationId xmlns:a16="http://schemas.microsoft.com/office/drawing/2014/main" id="{9B2529EE-362D-0B4D-359B-1FCDAF93D67D}"/>
               </a:ext>
             </a:extLst>
           </p:cNvPr>
@@ -1603,7 +1603,7 @@
           <p:cNvPr id="4" name="Date Placeholder 3">
             <a:extLst>
               <a:ext uri="{FF2B5EF4-FFF2-40B4-BE49-F238E27FC236}">
-                <a16:creationId xmlns:a16="http://schemas.microsoft.com/office/drawing/2014/main" id="{36289BFB-4417-5E36-2BC7-B433C5FDCDD1}"/>
+                <a16:creationId xmlns:a16="http://schemas.microsoft.com/office/drawing/2014/main" id="{CF22FE84-28FE-99B5-6B17-A2F845B68A08}"/>
               </a:ext>
             </a:extLst>
           </p:cNvPr>
@@ -1619,7 +1619,7 @@
           <a:bodyPr/>
           <a:lstStyle/>
           <a:p>
-            <a:fld id="{0F9D323F-703E-4E21-B214-E8116E050035}" type="datetimeFigureOut">
+            <a:fld id="{327952E1-5DDA-48DC-A74E-9FEA9991C1D6}" type="datetimeFigureOut">
               <a:rPr lang="en-US" smtClean="0"/>
               <a:t>5/4/2026</a:t>
             </a:fld>
@@ -1632,7 +1632,7 @@
           <p:cNvPr id="5" name="Footer Placeholder 4">
             <a:extLst>
               <a:ext uri="{FF2B5EF4-FFF2-40B4-BE49-F238E27FC236}">
-                <a16:creationId xmlns:a16="http://schemas.microsoft.com/office/drawing/2014/main" id="{1C19F9E5-9376-8B84-AA5A-E9ACDA22601D}"/>
+                <a16:creationId xmlns:a16="http://schemas.microsoft.com/office/drawing/2014/main" id="{B6321A30-37C7-D574-3DD8-3318525AA7D4}"/>
               </a:ext>
             </a:extLst>
           </p:cNvPr>
@@ -1657,7 +1657,7 @@
           <p:cNvPr id="6" name="Slide Number Placeholder 5">
             <a:extLst>
               <a:ext uri="{FF2B5EF4-FFF2-40B4-BE49-F238E27FC236}">
-                <a16:creationId xmlns:a16="http://schemas.microsoft.com/office/drawing/2014/main" id="{775D304F-8317-B37A-E1A0-FDDF65688E9B}"/>
+                <a16:creationId xmlns:a16="http://schemas.microsoft.com/office/drawing/2014/main" id="{C8A7CAEA-2C16-FCC5-FA02-1EA24F9F8704}"/>
               </a:ext>
             </a:extLst>
           </p:cNvPr>
@@ -1673,7 +1673,7 @@
           <a:bodyPr/>
           <a:lstStyle/>
           <a:p>
-            <a:fld id="{C505737C-23A9-40BE-8E11-FE111A409DB2}" type="slidenum">
+            <a:fld id="{91EB9E74-D7AA-41A6-AFA1-F9621B1893F5}" type="slidenum">
               <a:rPr lang="en-US" smtClean="0"/>
               <a:t>‹#›</a:t>
             </a:fld>
@@ -1684,7 +1684,7 @@
     </p:spTree>
     <p:extLst>
       <p:ext uri="{BB962C8B-B14F-4D97-AF65-F5344CB8AC3E}">
-        <p14:creationId xmlns:p14="http://schemas.microsoft.com/office/powerpoint/2010/main" val="2759666310"/>
+        <p14:creationId xmlns:p14="http://schemas.microsoft.com/office/powerpoint/2010/main" val="1746138627"/>
       </p:ext>
     </p:extLst>
   </p:cSld>
@@ -1716,7 +1716,7 @@
           <p:cNvPr id="2" name="Title 1">
             <a:extLst>
               <a:ext uri="{FF2B5EF4-FFF2-40B4-BE49-F238E27FC236}">
-                <a16:creationId xmlns:a16="http://schemas.microsoft.com/office/drawing/2014/main" id="{520126D6-D578-4409-E314-CC64107A6FA5}"/>
+                <a16:creationId xmlns:a16="http://schemas.microsoft.com/office/drawing/2014/main" id="{2C96F0B0-B977-A86E-4EC4-665015D242B7}"/>
               </a:ext>
             </a:extLst>
           </p:cNvPr>
@@ -1744,7 +1744,7 @@
           <p:cNvPr id="3" name="Content Placeholder 2">
             <a:extLst>
               <a:ext uri="{FF2B5EF4-FFF2-40B4-BE49-F238E27FC236}">
-                <a16:creationId xmlns:a16="http://schemas.microsoft.com/office/drawing/2014/main" id="{1CC9BC64-67DC-97EC-9D4D-6322DF921CAF}"/>
+                <a16:creationId xmlns:a16="http://schemas.microsoft.com/office/drawing/2014/main" id="{442E9967-EA7D-2EA7-D23C-FD090A168F0A}"/>
               </a:ext>
             </a:extLst>
           </p:cNvPr>
@@ -1806,7 +1806,7 @@
           <p:cNvPr id="4" name="Content Placeholder 3">
             <a:extLst>
               <a:ext uri="{FF2B5EF4-FFF2-40B4-BE49-F238E27FC236}">
-                <a16:creationId xmlns:a16="http://schemas.microsoft.com/office/drawing/2014/main" id="{E38FBB8F-6906-4C58-51E5-EF2CB4A60137}"/>
+                <a16:creationId xmlns:a16="http://schemas.microsoft.com/office/drawing/2014/main" id="{668C6330-3FAA-540F-6B1B-B2BBA6624CE4}"/>
               </a:ext>
             </a:extLst>
           </p:cNvPr>
@@ -1868,7 +1868,7 @@
           <p:cNvPr id="5" name="Date Placeholder 4">
             <a:extLst>
               <a:ext uri="{FF2B5EF4-FFF2-40B4-BE49-F238E27FC236}">
-                <a16:creationId xmlns:a16="http://schemas.microsoft.com/office/drawing/2014/main" id="{259A3A75-8039-93F7-7D8E-BFC88E19BA7F}"/>
+                <a16:creationId xmlns:a16="http://schemas.microsoft.com/office/drawing/2014/main" id="{265B3226-71FA-8FDD-8D14-2BDC6D2DD39F}"/>
               </a:ext>
             </a:extLst>
           </p:cNvPr>
@@ -1884,7 +1884,7 @@
           <a:bodyPr/>
           <a:lstStyle/>
           <a:p>
-            <a:fld id="{0F9D323F-703E-4E21-B214-E8116E050035}" type="datetimeFigureOut">
+            <a:fld id="{327952E1-5DDA-48DC-A74E-9FEA9991C1D6}" type="datetimeFigureOut">
               <a:rPr lang="en-US" smtClean="0"/>
               <a:t>5/4/2026</a:t>
             </a:fld>
@@ -1897,7 +1897,7 @@
           <p:cNvPr id="6" name="Footer Placeholder 5">
             <a:extLst>
               <a:ext uri="{FF2B5EF4-FFF2-40B4-BE49-F238E27FC236}">
-                <a16:creationId xmlns:a16="http://schemas.microsoft.com/office/drawing/2014/main" id="{D8B7004F-1E73-A221-F841-E878C20867DA}"/>
+                <a16:creationId xmlns:a16="http://schemas.microsoft.com/office/drawing/2014/main" id="{FF433B37-69D9-855D-EE39-9DB09CA19C8F}"/>
               </a:ext>
             </a:extLst>
           </p:cNvPr>
@@ -1922,7 +1922,7 @@
           <p:cNvPr id="7" name="Slide Number Placeholder 6">
             <a:extLst>
               <a:ext uri="{FF2B5EF4-FFF2-40B4-BE49-F238E27FC236}">
-                <a16:creationId xmlns:a16="http://schemas.microsoft.com/office/drawing/2014/main" id="{45E6CE0F-8697-B8D7-4FB1-C75A0BDD5A15}"/>
+                <a16:creationId xmlns:a16="http://schemas.microsoft.com/office/drawing/2014/main" id="{3069B813-F00E-13F3-BCD3-9F2EC0703365}"/>
               </a:ext>
             </a:extLst>
           </p:cNvPr>
@@ -1938,7 +1938,7 @@
           <a:bodyPr/>
           <a:lstStyle/>
           <a:p>
-            <a:fld id="{C505737C-23A9-40BE-8E11-FE111A409DB2}" type="slidenum">
+            <a:fld id="{91EB9E74-D7AA-41A6-AFA1-F9621B1893F5}" type="slidenum">
               <a:rPr lang="en-US" smtClean="0"/>
               <a:t>‹#›</a:t>
             </a:fld>
@@ -1949,7 +1949,7 @@
     </p:spTree>
     <p:extLst>
       <p:ext uri="{BB962C8B-B14F-4D97-AF65-F5344CB8AC3E}">
-        <p14:creationId xmlns:p14="http://schemas.microsoft.com/office/powerpoint/2010/main" val="21888259"/>
+        <p14:creationId xmlns:p14="http://schemas.microsoft.com/office/powerpoint/2010/main" val="1491381435"/>
       </p:ext>
     </p:extLst>
   </p:cSld>
@@ -1981,7 +1981,7 @@
           <p:cNvPr id="2" name="Title 1">
             <a:extLst>
               <a:ext uri="{FF2B5EF4-FFF2-40B4-BE49-F238E27FC236}">
-                <a16:creationId xmlns:a16="http://schemas.microsoft.com/office/drawing/2014/main" id="{13745098-D759-8C05-67D9-6E8843BF814D}"/>
+                <a16:creationId xmlns:a16="http://schemas.microsoft.com/office/drawing/2014/main" id="{3C54E33F-2D8F-D2C5-8E6F-B25B2FF9A74E}"/>
               </a:ext>
             </a:extLst>
           </p:cNvPr>
@@ -2014,7 +2014,7 @@
           <p:cNvPr id="3" name="Text Placeholder 2">
             <a:extLst>
               <a:ext uri="{FF2B5EF4-FFF2-40B4-BE49-F238E27FC236}">
-                <a16:creationId xmlns:a16="http://schemas.microsoft.com/office/drawing/2014/main" id="{62C95278-E91B-A878-49EE-500701B67CB7}"/>
+                <a16:creationId xmlns:a16="http://schemas.microsoft.com/office/drawing/2014/main" id="{71A6E720-3529-F475-5E4C-4D1FEFD640DD}"/>
               </a:ext>
             </a:extLst>
           </p:cNvPr>
@@ -2085,7 +2085,7 @@
           <p:cNvPr id="4" name="Content Placeholder 3">
             <a:extLst>
               <a:ext uri="{FF2B5EF4-FFF2-40B4-BE49-F238E27FC236}">
-                <a16:creationId xmlns:a16="http://schemas.microsoft.com/office/drawing/2014/main" id="{82BE0CD7-AB76-2918-5031-5B42945ADDD2}"/>
+                <a16:creationId xmlns:a16="http://schemas.microsoft.com/office/drawing/2014/main" id="{93F46322-20B4-4492-CF13-1A133C6FBEDF}"/>
               </a:ext>
             </a:extLst>
           </p:cNvPr>
@@ -2147,7 +2147,7 @@
           <p:cNvPr id="5" name="Text Placeholder 4">
             <a:extLst>
               <a:ext uri="{FF2B5EF4-FFF2-40B4-BE49-F238E27FC236}">
-                <a16:creationId xmlns:a16="http://schemas.microsoft.com/office/drawing/2014/main" id="{10B0C986-F4B8-74FC-6F42-0A42A295244A}"/>
+                <a16:creationId xmlns:a16="http://schemas.microsoft.com/office/drawing/2014/main" id="{D474B785-6101-3DAD-4667-2E4358AB8DBD}"/>
               </a:ext>
             </a:extLst>
           </p:cNvPr>
@@ -2218,7 +2218,7 @@
           <p:cNvPr id="6" name="Content Placeholder 5">
             <a:extLst>
               <a:ext uri="{FF2B5EF4-FFF2-40B4-BE49-F238E27FC236}">
-                <a16:creationId xmlns:a16="http://schemas.microsoft.com/office/drawing/2014/main" id="{D5FC2E74-6C39-1D36-242C-05CCC2F8B306}"/>
+                <a16:creationId xmlns:a16="http://schemas.microsoft.com/office/drawing/2014/main" id="{39610958-A8D2-6EB1-9FAF-D51B9FE0C34B}"/>
               </a:ext>
             </a:extLst>
           </p:cNvPr>
@@ -2280,7 +2280,7 @@
           <p:cNvPr id="7" name="Date Placeholder 6">
             <a:extLst>
               <a:ext uri="{FF2B5EF4-FFF2-40B4-BE49-F238E27FC236}">
-                <a16:creationId xmlns:a16="http://schemas.microsoft.com/office/drawing/2014/main" id="{D3FE13B6-40A7-9979-0334-B1F729B721CD}"/>
+                <a16:creationId xmlns:a16="http://schemas.microsoft.com/office/drawing/2014/main" id="{672EFCC7-F59A-45FB-1A27-0B063BD063C2}"/>
               </a:ext>
             </a:extLst>
           </p:cNvPr>
@@ -2296,7 +2296,7 @@
           <a:bodyPr/>
           <a:lstStyle/>
           <a:p>
-            <a:fld id="{0F9D323F-703E-4E21-B214-E8116E050035}" type="datetimeFigureOut">
+            <a:fld id="{327952E1-5DDA-48DC-A74E-9FEA9991C1D6}" type="datetimeFigureOut">
               <a:rPr lang="en-US" smtClean="0"/>
               <a:t>5/4/2026</a:t>
             </a:fld>
@@ -2309,7 +2309,7 @@
           <p:cNvPr id="8" name="Footer Placeholder 7">
             <a:extLst>
               <a:ext uri="{FF2B5EF4-FFF2-40B4-BE49-F238E27FC236}">
-                <a16:creationId xmlns:a16="http://schemas.microsoft.com/office/drawing/2014/main" id="{4895472E-B0AE-28CA-EC24-B6E5325B2A45}"/>
+                <a16:creationId xmlns:a16="http://schemas.microsoft.com/office/drawing/2014/main" id="{B5FC60DC-9F10-0B2E-CB99-4603173EC933}"/>
               </a:ext>
             </a:extLst>
           </p:cNvPr>
@@ -2334,7 +2334,7 @@
           <p:cNvPr id="9" name="Slide Number Placeholder 8">
             <a:extLst>
               <a:ext uri="{FF2B5EF4-FFF2-40B4-BE49-F238E27FC236}">
-                <a16:creationId xmlns:a16="http://schemas.microsoft.com/office/drawing/2014/main" id="{E35B9D7E-882E-3776-AD31-9FC789B34A23}"/>
+                <a16:creationId xmlns:a16="http://schemas.microsoft.com/office/drawing/2014/main" id="{C56DE7D7-76D5-E23F-A2EF-B683C6721861}"/>
               </a:ext>
             </a:extLst>
           </p:cNvPr>
@@ -2350,7 +2350,7 @@
           <a:bodyPr/>
           <a:lstStyle/>
           <a:p>
-            <a:fld id="{C505737C-23A9-40BE-8E11-FE111A409DB2}" type="slidenum">
+            <a:fld id="{91EB9E74-D7AA-41A6-AFA1-F9621B1893F5}" type="slidenum">
               <a:rPr lang="en-US" smtClean="0"/>
               <a:t>‹#›</a:t>
             </a:fld>
@@ -2361,7 +2361,7 @@
     </p:spTree>
     <p:extLst>
       <p:ext uri="{BB962C8B-B14F-4D97-AF65-F5344CB8AC3E}">
-        <p14:creationId xmlns:p14="http://schemas.microsoft.com/office/powerpoint/2010/main" val="2026633975"/>
+        <p14:creationId xmlns:p14="http://schemas.microsoft.com/office/powerpoint/2010/main" val="2834164586"/>
       </p:ext>
     </p:extLst>
   </p:cSld>
@@ -2393,7 +2393,7 @@
           <p:cNvPr id="2" name="Title 1">
             <a:extLst>
               <a:ext uri="{FF2B5EF4-FFF2-40B4-BE49-F238E27FC236}">
-                <a16:creationId xmlns:a16="http://schemas.microsoft.com/office/drawing/2014/main" id="{38280D66-3CD8-C717-2D2E-7F6DBB248B11}"/>
+                <a16:creationId xmlns:a16="http://schemas.microsoft.com/office/drawing/2014/main" id="{F4157A4C-94E9-D1B2-AAAE-5245AB2979DE}"/>
               </a:ext>
             </a:extLst>
           </p:cNvPr>
@@ -2421,7 +2421,7 @@
           <p:cNvPr id="3" name="Date Placeholder 2">
             <a:extLst>
               <a:ext uri="{FF2B5EF4-FFF2-40B4-BE49-F238E27FC236}">
-                <a16:creationId xmlns:a16="http://schemas.microsoft.com/office/drawing/2014/main" id="{EC9EFBF3-0196-919C-A25E-925D4EEC1CD9}"/>
+                <a16:creationId xmlns:a16="http://schemas.microsoft.com/office/drawing/2014/main" id="{941CB51E-2877-C9B4-85A6-B4211958D59A}"/>
               </a:ext>
             </a:extLst>
           </p:cNvPr>
@@ -2437,7 +2437,7 @@
           <a:bodyPr/>
           <a:lstStyle/>
           <a:p>
-            <a:fld id="{0F9D323F-703E-4E21-B214-E8116E050035}" type="datetimeFigureOut">
+            <a:fld id="{327952E1-5DDA-48DC-A74E-9FEA9991C1D6}" type="datetimeFigureOut">
               <a:rPr lang="en-US" smtClean="0"/>
               <a:t>5/4/2026</a:t>
             </a:fld>
@@ -2450,7 +2450,7 @@
           <p:cNvPr id="4" name="Footer Placeholder 3">
             <a:extLst>
               <a:ext uri="{FF2B5EF4-FFF2-40B4-BE49-F238E27FC236}">
-                <a16:creationId xmlns:a16="http://schemas.microsoft.com/office/drawing/2014/main" id="{EEDD1298-302B-0C51-A326-2368FBBCBCD7}"/>
+                <a16:creationId xmlns:a16="http://schemas.microsoft.com/office/drawing/2014/main" id="{4AE9FFB8-8667-FC0A-3355-D68DB57B40AA}"/>
               </a:ext>
             </a:extLst>
           </p:cNvPr>
@@ -2475,7 +2475,7 @@
           <p:cNvPr id="5" name="Slide Number Placeholder 4">
             <a:extLst>
               <a:ext uri="{FF2B5EF4-FFF2-40B4-BE49-F238E27FC236}">
-                <a16:creationId xmlns:a16="http://schemas.microsoft.com/office/drawing/2014/main" id="{174D715C-C921-AABA-12D4-763226D30666}"/>
+                <a16:creationId xmlns:a16="http://schemas.microsoft.com/office/drawing/2014/main" id="{BC9FEF33-40FF-F453-768B-200237DD4566}"/>
               </a:ext>
             </a:extLst>
           </p:cNvPr>
@@ -2491,7 +2491,7 @@
           <a:bodyPr/>
           <a:lstStyle/>
           <a:p>
-            <a:fld id="{C505737C-23A9-40BE-8E11-FE111A409DB2}" type="slidenum">
+            <a:fld id="{91EB9E74-D7AA-41A6-AFA1-F9621B1893F5}" type="slidenum">
               <a:rPr lang="en-US" smtClean="0"/>
               <a:t>‹#›</a:t>
             </a:fld>
@@ -2502,7 +2502,7 @@
     </p:spTree>
     <p:extLst>
       <p:ext uri="{BB962C8B-B14F-4D97-AF65-F5344CB8AC3E}">
-        <p14:creationId xmlns:p14="http://schemas.microsoft.com/office/powerpoint/2010/main" val="2322003547"/>
+        <p14:creationId xmlns:p14="http://schemas.microsoft.com/office/powerpoint/2010/main" val="3606807677"/>
       </p:ext>
     </p:extLst>
   </p:cSld>
@@ -2534,7 +2534,7 @@
           <p:cNvPr id="2" name="Date Placeholder 1">
             <a:extLst>
               <a:ext uri="{FF2B5EF4-FFF2-40B4-BE49-F238E27FC236}">
-                <a16:creationId xmlns:a16="http://schemas.microsoft.com/office/drawing/2014/main" id="{29382A08-9E6A-582F-C3CB-96E23E2D9435}"/>
+                <a16:creationId xmlns:a16="http://schemas.microsoft.com/office/drawing/2014/main" id="{1EBB1441-87B8-535C-B192-AAD5D6C28F89}"/>
               </a:ext>
             </a:extLst>
           </p:cNvPr>
@@ -2550,7 +2550,7 @@
           <a:bodyPr/>
           <a:lstStyle/>
           <a:p>
-            <a:fld id="{0F9D323F-703E-4E21-B214-E8116E050035}" type="datetimeFigureOut">
+            <a:fld id="{327952E1-5DDA-48DC-A74E-9FEA9991C1D6}" type="datetimeFigureOut">
               <a:rPr lang="en-US" smtClean="0"/>
               <a:t>5/4/2026</a:t>
             </a:fld>
@@ -2563,7 +2563,7 @@
           <p:cNvPr id="3" name="Footer Placeholder 2">
             <a:extLst>
               <a:ext uri="{FF2B5EF4-FFF2-40B4-BE49-F238E27FC236}">
-                <a16:creationId xmlns:a16="http://schemas.microsoft.com/office/drawing/2014/main" id="{F9D7506B-3182-8126-9281-40672A55FDF3}"/>
+                <a16:creationId xmlns:a16="http://schemas.microsoft.com/office/drawing/2014/main" id="{D122B234-D270-70E3-D6DD-7764BFD99435}"/>
               </a:ext>
             </a:extLst>
           </p:cNvPr>
@@ -2588,7 +2588,7 @@
           <p:cNvPr id="4" name="Slide Number Placeholder 3">
             <a:extLst>
               <a:ext uri="{FF2B5EF4-FFF2-40B4-BE49-F238E27FC236}">
-                <a16:creationId xmlns:a16="http://schemas.microsoft.com/office/drawing/2014/main" id="{7FCA6C12-4FF3-BA22-5370-A74706CA1DE2}"/>
+                <a16:creationId xmlns:a16="http://schemas.microsoft.com/office/drawing/2014/main" id="{D4F10CA5-9FEC-6892-5157-A17BB30FEE31}"/>
               </a:ext>
             </a:extLst>
           </p:cNvPr>
@@ -2604,7 +2604,7 @@
           <a:bodyPr/>
           <a:lstStyle/>
           <a:p>
-            <a:fld id="{C505737C-23A9-40BE-8E11-FE111A409DB2}" type="slidenum">
+            <a:fld id="{91EB9E74-D7AA-41A6-AFA1-F9621B1893F5}" type="slidenum">
               <a:rPr lang="en-US" smtClean="0"/>
               <a:t>‹#›</a:t>
             </a:fld>
@@ -2615,7 +2615,7 @@
     </p:spTree>
     <p:extLst>
       <p:ext uri="{BB962C8B-B14F-4D97-AF65-F5344CB8AC3E}">
-        <p14:creationId xmlns:p14="http://schemas.microsoft.com/office/powerpoint/2010/main" val="1638025741"/>
+        <p14:creationId xmlns:p14="http://schemas.microsoft.com/office/powerpoint/2010/main" val="2085215744"/>
       </p:ext>
     </p:extLst>
   </p:cSld>
@@ -2647,7 +2647,7 @@
           <p:cNvPr id="2" name="Title 1">
             <a:extLst>
               <a:ext uri="{FF2B5EF4-FFF2-40B4-BE49-F238E27FC236}">
-                <a16:creationId xmlns:a16="http://schemas.microsoft.com/office/drawing/2014/main" id="{0B86A312-9718-138F-C8D6-E2E57FF40548}"/>
+                <a16:creationId xmlns:a16="http://schemas.microsoft.com/office/drawing/2014/main" id="{3FEE068A-F5D3-2EB5-9808-9F87613353AE}"/>
               </a:ext>
             </a:extLst>
           </p:cNvPr>
@@ -2684,7 +2684,7 @@
           <p:cNvPr id="3" name="Content Placeholder 2">
             <a:extLst>
               <a:ext uri="{FF2B5EF4-FFF2-40B4-BE49-F238E27FC236}">
-                <a16:creationId xmlns:a16="http://schemas.microsoft.com/office/drawing/2014/main" id="{3C7E544A-9850-2246-A9E0-AFABDAC1C264}"/>
+                <a16:creationId xmlns:a16="http://schemas.microsoft.com/office/drawing/2014/main" id="{F6AC9526-4DE0-3D3C-E200-EAB05A0105C4}"/>
               </a:ext>
             </a:extLst>
           </p:cNvPr>
@@ -2774,7 +2774,7 @@
           <p:cNvPr id="4" name="Text Placeholder 3">
             <a:extLst>
               <a:ext uri="{FF2B5EF4-FFF2-40B4-BE49-F238E27FC236}">
-                <a16:creationId xmlns:a16="http://schemas.microsoft.com/office/drawing/2014/main" id="{DFDB6AD2-54FE-4E8E-C575-4CCE913A2359}"/>
+                <a16:creationId xmlns:a16="http://schemas.microsoft.com/office/drawing/2014/main" id="{D628FFDD-972F-C29B-0D1D-2E418560FFFE}"/>
               </a:ext>
             </a:extLst>
           </p:cNvPr>
@@ -2845,7 +2845,7 @@
           <p:cNvPr id="5" name="Date Placeholder 4">
             <a:extLst>
               <a:ext uri="{FF2B5EF4-FFF2-40B4-BE49-F238E27FC236}">
-                <a16:creationId xmlns:a16="http://schemas.microsoft.com/office/drawing/2014/main" id="{7EBACD97-7423-7D0B-70A1-8DE9AEC8B73F}"/>
+                <a16:creationId xmlns:a16="http://schemas.microsoft.com/office/drawing/2014/main" id="{F2EA73A7-71B5-E845-62AE-F24D09FA6B61}"/>
               </a:ext>
             </a:extLst>
           </p:cNvPr>
@@ -2861,7 +2861,7 @@
           <a:bodyPr/>
           <a:lstStyle/>
           <a:p>
-            <a:fld id="{0F9D323F-703E-4E21-B214-E8116E050035}" type="datetimeFigureOut">
+            <a:fld id="{327952E1-5DDA-48DC-A74E-9FEA9991C1D6}" type="datetimeFigureOut">
               <a:rPr lang="en-US" smtClean="0"/>
               <a:t>5/4/2026</a:t>
             </a:fld>
@@ -2874,7 +2874,7 @@
           <p:cNvPr id="6" name="Footer Placeholder 5">
             <a:extLst>
               <a:ext uri="{FF2B5EF4-FFF2-40B4-BE49-F238E27FC236}">
-                <a16:creationId xmlns:a16="http://schemas.microsoft.com/office/drawing/2014/main" id="{1C98F061-B429-2510-0152-1E3999DBCBAF}"/>
+                <a16:creationId xmlns:a16="http://schemas.microsoft.com/office/drawing/2014/main" id="{1A952A5E-AF7D-F8A5-6B80-24B8AF3CCB03}"/>
               </a:ext>
             </a:extLst>
           </p:cNvPr>
@@ -2899,7 +2899,7 @@
           <p:cNvPr id="7" name="Slide Number Placeholder 6">
             <a:extLst>
               <a:ext uri="{FF2B5EF4-FFF2-40B4-BE49-F238E27FC236}">
-                <a16:creationId xmlns:a16="http://schemas.microsoft.com/office/drawing/2014/main" id="{BDD88323-C222-BC59-D5A1-3E072E17F828}"/>
+                <a16:creationId xmlns:a16="http://schemas.microsoft.com/office/drawing/2014/main" id="{87F3C0BE-5BE5-977F-684B-97921D7C8730}"/>
               </a:ext>
             </a:extLst>
           </p:cNvPr>
@@ -2915,7 +2915,7 @@
           <a:bodyPr/>
           <a:lstStyle/>
           <a:p>
-            <a:fld id="{C505737C-23A9-40BE-8E11-FE111A409DB2}" type="slidenum">
+            <a:fld id="{91EB9E74-D7AA-41A6-AFA1-F9621B1893F5}" type="slidenum">
               <a:rPr lang="en-US" smtClean="0"/>
               <a:t>‹#›</a:t>
             </a:fld>
@@ -2926,7 +2926,7 @@
     </p:spTree>
     <p:extLst>
       <p:ext uri="{BB962C8B-B14F-4D97-AF65-F5344CB8AC3E}">
-        <p14:creationId xmlns:p14="http://schemas.microsoft.com/office/powerpoint/2010/main" val="1814845095"/>
+        <p14:creationId xmlns:p14="http://schemas.microsoft.com/office/powerpoint/2010/main" val="92830406"/>
       </p:ext>
     </p:extLst>
   </p:cSld>
@@ -2958,7 +2958,7 @@
           <p:cNvPr id="2" name="Title 1">
             <a:extLst>
               <a:ext uri="{FF2B5EF4-FFF2-40B4-BE49-F238E27FC236}">
-                <a16:creationId xmlns:a16="http://schemas.microsoft.com/office/drawing/2014/main" id="{C59A7D0F-66C7-4EB2-6D39-65E78EFE556A}"/>
+                <a16:creationId xmlns:a16="http://schemas.microsoft.com/office/drawing/2014/main" id="{805C1F81-5F90-5223-2834-2000FEBFCF45}"/>
               </a:ext>
             </a:extLst>
           </p:cNvPr>
@@ -2995,7 +2995,7 @@
           <p:cNvPr id="3" name="Picture Placeholder 2">
             <a:extLst>
               <a:ext uri="{FF2B5EF4-FFF2-40B4-BE49-F238E27FC236}">
-                <a16:creationId xmlns:a16="http://schemas.microsoft.com/office/drawing/2014/main" id="{34205CEB-BA8E-79AC-EE9E-D0533CABCC7B}"/>
+                <a16:creationId xmlns:a16="http://schemas.microsoft.com/office/drawing/2014/main" id="{0D5257D5-29C0-80AF-918C-D4A9E12A65DC}"/>
               </a:ext>
             </a:extLst>
           </p:cNvPr>
@@ -3062,7 +3062,7 @@
           <p:cNvPr id="4" name="Text Placeholder 3">
             <a:extLst>
               <a:ext uri="{FF2B5EF4-FFF2-40B4-BE49-F238E27FC236}">
-                <a16:creationId xmlns:a16="http://schemas.microsoft.com/office/drawing/2014/main" id="{4B018689-D864-671F-B453-6AB2FECD76F7}"/>
+                <a16:creationId xmlns:a16="http://schemas.microsoft.com/office/drawing/2014/main" id="{EC69CE5E-8B5B-E1D4-D0EC-F2AE919D60F5}"/>
               </a:ext>
             </a:extLst>
           </p:cNvPr>
@@ -3133,7 +3133,7 @@
           <p:cNvPr id="5" name="Date Placeholder 4">
             <a:extLst>
               <a:ext uri="{FF2B5EF4-FFF2-40B4-BE49-F238E27FC236}">
-                <a16:creationId xmlns:a16="http://schemas.microsoft.com/office/drawing/2014/main" id="{5698B6E2-C4A4-8D48-22F0-2E5A79C133F9}"/>
+                <a16:creationId xmlns:a16="http://schemas.microsoft.com/office/drawing/2014/main" id="{894379B5-A425-6C66-298B-AAE9CA393CFC}"/>
               </a:ext>
             </a:extLst>
           </p:cNvPr>
@@ -3149,7 +3149,7 @@
           <a:bodyPr/>
           <a:lstStyle/>
           <a:p>
-            <a:fld id="{0F9D323F-703E-4E21-B214-E8116E050035}" type="datetimeFigureOut">
+            <a:fld id="{327952E1-5DDA-48DC-A74E-9FEA9991C1D6}" type="datetimeFigureOut">
               <a:rPr lang="en-US" smtClean="0"/>
               <a:t>5/4/2026</a:t>
             </a:fld>
@@ -3162,7 +3162,7 @@
           <p:cNvPr id="6" name="Footer Placeholder 5">
             <a:extLst>
               <a:ext uri="{FF2B5EF4-FFF2-40B4-BE49-F238E27FC236}">
-                <a16:creationId xmlns:a16="http://schemas.microsoft.com/office/drawing/2014/main" id="{D34E25BA-F7C5-C2AD-7238-1057CD195582}"/>
+                <a16:creationId xmlns:a16="http://schemas.microsoft.com/office/drawing/2014/main" id="{511C4737-6506-E2B5-8C63-57702D9A0736}"/>
               </a:ext>
             </a:extLst>
           </p:cNvPr>
@@ -3187,7 +3187,7 @@
           <p:cNvPr id="7" name="Slide Number Placeholder 6">
             <a:extLst>
               <a:ext uri="{FF2B5EF4-FFF2-40B4-BE49-F238E27FC236}">
-                <a16:creationId xmlns:a16="http://schemas.microsoft.com/office/drawing/2014/main" id="{45192B61-DF48-D31B-1AD4-CC948537B51B}"/>
+                <a16:creationId xmlns:a16="http://schemas.microsoft.com/office/drawing/2014/main" id="{95551DC4-3F0E-DD71-A4E1-3E3C087551D9}"/>
               </a:ext>
             </a:extLst>
           </p:cNvPr>
@@ -3203,7 +3203,7 @@
           <a:bodyPr/>
           <a:lstStyle/>
           <a:p>
-            <a:fld id="{C505737C-23A9-40BE-8E11-FE111A409DB2}" type="slidenum">
+            <a:fld id="{91EB9E74-D7AA-41A6-AFA1-F9621B1893F5}" type="slidenum">
               <a:rPr lang="en-US" smtClean="0"/>
               <a:t>‹#›</a:t>
             </a:fld>
@@ -3214,7 +3214,7 @@
     </p:spTree>
     <p:extLst>
       <p:ext uri="{BB962C8B-B14F-4D97-AF65-F5344CB8AC3E}">
-        <p14:creationId xmlns:p14="http://schemas.microsoft.com/office/powerpoint/2010/main" val="3585261080"/>
+        <p14:creationId xmlns:p14="http://schemas.microsoft.com/office/powerpoint/2010/main" val="4116480674"/>
       </p:ext>
     </p:extLst>
   </p:cSld>
@@ -3251,7 +3251,7 @@
           <p:cNvPr id="2" name="Title Placeholder 1">
             <a:extLst>
               <a:ext uri="{FF2B5EF4-FFF2-40B4-BE49-F238E27FC236}">
-                <a16:creationId xmlns:a16="http://schemas.microsoft.com/office/drawing/2014/main" id="{D932BE65-7B60-810C-1C3A-30D2C686A541}"/>
+                <a16:creationId xmlns:a16="http://schemas.microsoft.com/office/drawing/2014/main" id="{8BE07AA3-51FB-E925-67BE-140E39AF1003}"/>
               </a:ext>
             </a:extLst>
           </p:cNvPr>
@@ -3289,7 +3289,7 @@
           <p:cNvPr id="3" name="Text Placeholder 2">
             <a:extLst>
               <a:ext uri="{FF2B5EF4-FFF2-40B4-BE49-F238E27FC236}">
-                <a16:creationId xmlns:a16="http://schemas.microsoft.com/office/drawing/2014/main" id="{00F0EDC7-E3F0-473A-8749-41344843CC6A}"/>
+                <a16:creationId xmlns:a16="http://schemas.microsoft.com/office/drawing/2014/main" id="{F66E4806-8633-72EE-A565-644D13463D78}"/>
               </a:ext>
             </a:extLst>
           </p:cNvPr>
@@ -3356,7 +3356,7 @@
           <p:cNvPr id="4" name="Date Placeholder 3">
             <a:extLst>
               <a:ext uri="{FF2B5EF4-FFF2-40B4-BE49-F238E27FC236}">
-                <a16:creationId xmlns:a16="http://schemas.microsoft.com/office/drawing/2014/main" id="{FA5328A3-BEBF-1708-0A02-E852E9984066}"/>
+                <a16:creationId xmlns:a16="http://schemas.microsoft.com/office/drawing/2014/main" id="{8F326263-E391-4EA4-A0B3-728861210136}"/>
               </a:ext>
             </a:extLst>
           </p:cNvPr>
@@ -3390,7 +3390,7 @@
             </a:lvl1pPr>
           </a:lstStyle>
           <a:p>
-            <a:fld id="{0F9D323F-703E-4E21-B214-E8116E050035}" type="datetimeFigureOut">
+            <a:fld id="{327952E1-5DDA-48DC-A74E-9FEA9991C1D6}" type="datetimeFigureOut">
               <a:rPr lang="en-US" smtClean="0"/>
               <a:t>5/4/2026</a:t>
             </a:fld>
@@ -3403,7 +3403,7 @@
           <p:cNvPr id="5" name="Footer Placeholder 4">
             <a:extLst>
               <a:ext uri="{FF2B5EF4-FFF2-40B4-BE49-F238E27FC236}">
-                <a16:creationId xmlns:a16="http://schemas.microsoft.com/office/drawing/2014/main" id="{6BD66427-DE43-0214-297D-EA1E7875BE61}"/>
+                <a16:creationId xmlns:a16="http://schemas.microsoft.com/office/drawing/2014/main" id="{25607DFC-62E7-E59C-9525-59BD57D19F50}"/>
               </a:ext>
             </a:extLst>
           </p:cNvPr>
@@ -3446,7 +3446,7 @@
           <p:cNvPr id="6" name="Slide Number Placeholder 5">
             <a:extLst>
               <a:ext uri="{FF2B5EF4-FFF2-40B4-BE49-F238E27FC236}">
-                <a16:creationId xmlns:a16="http://schemas.microsoft.com/office/drawing/2014/main" id="{92F724FC-42FA-4D75-2525-9421C1C1BF36}"/>
+                <a16:creationId xmlns:a16="http://schemas.microsoft.com/office/drawing/2014/main" id="{DA1D40AE-4458-B81B-FFD2-6B01BB03257D}"/>
               </a:ext>
             </a:extLst>
           </p:cNvPr>
@@ -3480,7 +3480,7 @@
             </a:lvl1pPr>
           </a:lstStyle>
           <a:p>
-            <a:fld id="{C505737C-23A9-40BE-8E11-FE111A409DB2}" type="slidenum">
+            <a:fld id="{91EB9E74-D7AA-41A6-AFA1-F9621B1893F5}" type="slidenum">
               <a:rPr lang="en-US" smtClean="0"/>
               <a:t>‹#›</a:t>
             </a:fld>
@@ -3491,7 +3491,7 @@
     </p:spTree>
     <p:extLst>
       <p:ext uri="{BB962C8B-B14F-4D97-AF65-F5344CB8AC3E}">
-        <p14:creationId xmlns:p14="http://schemas.microsoft.com/office/powerpoint/2010/main" val="65147126"/>
+        <p14:creationId xmlns:p14="http://schemas.microsoft.com/office/powerpoint/2010/main" val="1414405152"/>
       </p:ext>
     </p:extLst>
   </p:cSld>
@@ -3814,7 +3814,7 @@
           <p:cNvPr id="2" name="Rectangle 1">
             <a:extLst>
               <a:ext uri="{FF2B5EF4-FFF2-40B4-BE49-F238E27FC236}">
-                <a16:creationId xmlns:a16="http://schemas.microsoft.com/office/drawing/2014/main" id="{1C8A7FC3-E6BF-F653-7B7B-FFC43C431DA6}"/>
+                <a16:creationId xmlns:a16="http://schemas.microsoft.com/office/drawing/2014/main" id="{8AAD8491-F9A2-7B50-773C-C8462F0EC792}"/>
               </a:ext>
             </a:extLst>
           </p:cNvPr>
@@ -3882,7 +3882,7 @@
           <p:cNvPr id="3" name="Rectangle 2">
             <a:extLst>
               <a:ext uri="{FF2B5EF4-FFF2-40B4-BE49-F238E27FC236}">
-                <a16:creationId xmlns:a16="http://schemas.microsoft.com/office/drawing/2014/main" id="{36DF0DB5-B24A-9A87-26E9-05DCE399680C}"/>
+                <a16:creationId xmlns:a16="http://schemas.microsoft.com/office/drawing/2014/main" id="{976CEF8A-DD97-734C-5A1D-6B57E055368F}"/>
               </a:ext>
             </a:extLst>
           </p:cNvPr>
@@ -3950,7 +3950,7 @@
           <p:cNvPr id="4" name="TextBox 3">
             <a:extLst>
               <a:ext uri="{FF2B5EF4-FFF2-40B4-BE49-F238E27FC236}">
-                <a16:creationId xmlns:a16="http://schemas.microsoft.com/office/drawing/2014/main" id="{DDF84149-F46F-6DDA-493D-B2D45EC6B858}"/>
+                <a16:creationId xmlns:a16="http://schemas.microsoft.com/office/drawing/2014/main" id="{33124D40-E554-D12A-C5A5-5DB785D12F63}"/>
               </a:ext>
             </a:extLst>
           </p:cNvPr>
@@ -3990,7 +3990,7 @@
           <p:cNvPr id="5" name="TextBox 4">
             <a:extLst>
               <a:ext uri="{FF2B5EF4-FFF2-40B4-BE49-F238E27FC236}">
-                <a16:creationId xmlns:a16="http://schemas.microsoft.com/office/drawing/2014/main" id="{9A57A6C1-D503-041E-10EB-60E07FEC7632}"/>
+                <a16:creationId xmlns:a16="http://schemas.microsoft.com/office/drawing/2014/main" id="{8A2D7CF6-1C6C-A0D1-1086-D9FED77AACC3}"/>
               </a:ext>
             </a:extLst>
           </p:cNvPr>
@@ -4030,7 +4030,7 @@
           <p:cNvPr id="6" name="TextBox 5">
             <a:extLst>
               <a:ext uri="{FF2B5EF4-FFF2-40B4-BE49-F238E27FC236}">
-                <a16:creationId xmlns:a16="http://schemas.microsoft.com/office/drawing/2014/main" id="{A510D65E-1F88-C6F4-46FA-5AEBFE7983E2}"/>
+                <a16:creationId xmlns:a16="http://schemas.microsoft.com/office/drawing/2014/main" id="{8C5645FB-ACC4-177A-BC0D-08BD5B4EA653}"/>
               </a:ext>
             </a:extLst>
           </p:cNvPr>
@@ -4070,7 +4070,7 @@
           <p:cNvPr id="7" name="Rectangle 6">
             <a:extLst>
               <a:ext uri="{FF2B5EF4-FFF2-40B4-BE49-F238E27FC236}">
-                <a16:creationId xmlns:a16="http://schemas.microsoft.com/office/drawing/2014/main" id="{0ED74937-2F04-F938-C78E-B6A58C1BEF52}"/>
+                <a16:creationId xmlns:a16="http://schemas.microsoft.com/office/drawing/2014/main" id="{58ACF2AB-D37D-7FE7-BEE7-737FFD224463}"/>
               </a:ext>
             </a:extLst>
           </p:cNvPr>
@@ -4124,7 +4124,7 @@
           <p:cNvPr id="8" name="TextBox 7">
             <a:extLst>
               <a:ext uri="{FF2B5EF4-FFF2-40B4-BE49-F238E27FC236}">
-                <a16:creationId xmlns:a16="http://schemas.microsoft.com/office/drawing/2014/main" id="{61890983-CC14-6404-5330-02CE545F1BCF}"/>
+                <a16:creationId xmlns:a16="http://schemas.microsoft.com/office/drawing/2014/main" id="{75513BBC-1DE4-7509-9671-BCFE4C4642ED}"/>
               </a:ext>
             </a:extLst>
           </p:cNvPr>
@@ -4166,7 +4166,7 @@
           <p:cNvPr id="9" name="Rectangle 8">
             <a:extLst>
               <a:ext uri="{FF2B5EF4-FFF2-40B4-BE49-F238E27FC236}">
-                <a16:creationId xmlns:a16="http://schemas.microsoft.com/office/drawing/2014/main" id="{890BF287-7481-C6CE-6667-313E146785D4}"/>
+                <a16:creationId xmlns:a16="http://schemas.microsoft.com/office/drawing/2014/main" id="{F5F78C27-6A29-AB39-4A33-A133A3B39AFF}"/>
               </a:ext>
             </a:extLst>
           </p:cNvPr>
@@ -4220,7 +4220,7 @@
           <p:cNvPr id="10" name="TextBox 9">
             <a:extLst>
               <a:ext uri="{FF2B5EF4-FFF2-40B4-BE49-F238E27FC236}">
-                <a16:creationId xmlns:a16="http://schemas.microsoft.com/office/drawing/2014/main" id="{0AD57C7A-E5F0-56A1-09E2-C7BFC10B7544}"/>
+                <a16:creationId xmlns:a16="http://schemas.microsoft.com/office/drawing/2014/main" id="{836A50B7-208D-6DC5-240D-D8886B6CECCC}"/>
               </a:ext>
             </a:extLst>
           </p:cNvPr>
@@ -4262,7 +4262,7 @@
           <p:cNvPr id="11" name="TextBox 10">
             <a:extLst>
               <a:ext uri="{FF2B5EF4-FFF2-40B4-BE49-F238E27FC236}">
-                <a16:creationId xmlns:a16="http://schemas.microsoft.com/office/drawing/2014/main" id="{9D066DA7-DB3F-4E73-5357-87C93AF7A7B7}"/>
+                <a16:creationId xmlns:a16="http://schemas.microsoft.com/office/drawing/2014/main" id="{B2177674-A63B-07B6-E635-83634CA4BAAD}"/>
               </a:ext>
             </a:extLst>
           </p:cNvPr>
@@ -4300,7 +4300,7 @@
     </p:spTree>
     <p:extLst>
       <p:ext uri="{BB962C8B-B14F-4D97-AF65-F5344CB8AC3E}">
-        <p14:creationId xmlns:p14="http://schemas.microsoft.com/office/powerpoint/2010/main" val="8484057"/>
+        <p14:creationId xmlns:p14="http://schemas.microsoft.com/office/powerpoint/2010/main" val="2505744832"/>
       </p:ext>
     </p:extLst>
   </p:cSld>
@@ -4332,7 +4332,7 @@
           <p:cNvPr id="2" name="Rectangle 1">
             <a:extLst>
               <a:ext uri="{FF2B5EF4-FFF2-40B4-BE49-F238E27FC236}">
-                <a16:creationId xmlns:a16="http://schemas.microsoft.com/office/drawing/2014/main" id="{8120C0C5-29B6-0F23-4B48-18A8A14D8164}"/>
+                <a16:creationId xmlns:a16="http://schemas.microsoft.com/office/drawing/2014/main" id="{490A0E2C-57AD-C664-004B-330D3906BDCC}"/>
               </a:ext>
             </a:extLst>
           </p:cNvPr>
@@ -4400,7 +4400,7 @@
           <p:cNvPr id="3" name="Rectangle 2">
             <a:extLst>
               <a:ext uri="{FF2B5EF4-FFF2-40B4-BE49-F238E27FC236}">
-                <a16:creationId xmlns:a16="http://schemas.microsoft.com/office/drawing/2014/main" id="{6F2A5AB4-E4C3-9F07-8ECF-302FA9FFDF61}"/>
+                <a16:creationId xmlns:a16="http://schemas.microsoft.com/office/drawing/2014/main" id="{AF5A67EB-9BED-F668-F708-EF0F7E5B9C54}"/>
               </a:ext>
             </a:extLst>
           </p:cNvPr>
@@ -4468,7 +4468,7 @@
           <p:cNvPr id="4" name="TextBox 3">
             <a:extLst>
               <a:ext uri="{FF2B5EF4-FFF2-40B4-BE49-F238E27FC236}">
-                <a16:creationId xmlns:a16="http://schemas.microsoft.com/office/drawing/2014/main" id="{8CB44CEC-FD20-B80F-4896-7686AF91FEAD}"/>
+                <a16:creationId xmlns:a16="http://schemas.microsoft.com/office/drawing/2014/main" id="{BB537E00-C238-69D6-38DA-0DF09D6889A0}"/>
               </a:ext>
             </a:extLst>
           </p:cNvPr>
@@ -4508,7 +4508,7 @@
           <p:cNvPr id="5" name="TextBox 4">
             <a:extLst>
               <a:ext uri="{FF2B5EF4-FFF2-40B4-BE49-F238E27FC236}">
-                <a16:creationId xmlns:a16="http://schemas.microsoft.com/office/drawing/2014/main" id="{5E2BABDF-CB86-0615-40A1-3EC650A9ADC3}"/>
+                <a16:creationId xmlns:a16="http://schemas.microsoft.com/office/drawing/2014/main" id="{505AA5F0-8958-5A49-09B1-4FAACF7EDAA3}"/>
               </a:ext>
             </a:extLst>
           </p:cNvPr>
@@ -4548,7 +4548,7 @@
           <p:cNvPr id="6" name="TextBox 5">
             <a:extLst>
               <a:ext uri="{FF2B5EF4-FFF2-40B4-BE49-F238E27FC236}">
-                <a16:creationId xmlns:a16="http://schemas.microsoft.com/office/drawing/2014/main" id="{EFF24B58-6359-7A16-DC51-C88458B70AD7}"/>
+                <a16:creationId xmlns:a16="http://schemas.microsoft.com/office/drawing/2014/main" id="{F58850EE-0FA1-C649-17C0-508056C13199}"/>
               </a:ext>
             </a:extLst>
           </p:cNvPr>
@@ -4657,7 +4657,7 @@
           <p:cNvPr id="7" name="Rectangle 6">
             <a:extLst>
               <a:ext uri="{FF2B5EF4-FFF2-40B4-BE49-F238E27FC236}">
-                <a16:creationId xmlns:a16="http://schemas.microsoft.com/office/drawing/2014/main" id="{775ADC0B-B010-21CA-F5B3-E03C997C6456}"/>
+                <a16:creationId xmlns:a16="http://schemas.microsoft.com/office/drawing/2014/main" id="{A1123BEE-68F6-4BCF-E05C-7DF822123C34}"/>
               </a:ext>
             </a:extLst>
           </p:cNvPr>
@@ -4711,7 +4711,7 @@
           <p:cNvPr id="8" name="TextBox 7">
             <a:extLst>
               <a:ext uri="{FF2B5EF4-FFF2-40B4-BE49-F238E27FC236}">
-                <a16:creationId xmlns:a16="http://schemas.microsoft.com/office/drawing/2014/main" id="{C749332B-077E-1D59-74BE-9B390CBCFF1B}"/>
+                <a16:creationId xmlns:a16="http://schemas.microsoft.com/office/drawing/2014/main" id="{0433ACFD-4E2A-32B8-D3C5-98D11411253F}"/>
               </a:ext>
             </a:extLst>
           </p:cNvPr>
@@ -4721,7 +4721,7 @@
         <p:spPr>
           <a:xfrm>
             <a:off x="6172200" y="1371600"/>
-            <a:ext cx="4902200" cy="1949252"/>
+            <a:ext cx="4902200" cy="2318583"/>
           </a:xfrm>
           <a:prstGeom prst="rect">
             <a:avLst/>
@@ -4733,6 +4733,17 @@
             <a:spAutoFit/>
           </a:bodyPr>
           <a:lstStyle/>
+          <a:p>
+            <a:r>
+              <a:rPr lang="en-US" sz="1200">
+                <a:solidFill>
+                  <a:srgbClr val="0B1F3A"/>
+                </a:solidFill>
+                <a:latin typeface="Cascadia Mono" panose="020B0609020000020004" pitchFamily="49" charset="0"/>
+              </a:rPr>
+              <a:t>let TargetDevice = "usm262346";</a:t>
+            </a:r>
+          </a:p>
           <a:p>
             <a:r>
               <a:rPr lang="en-US" sz="1200">
@@ -4826,7 +4837,7 @@
                 </a:solidFill>
                 <a:latin typeface="Cascadia Mono" panose="020B0609020000020004" pitchFamily="49" charset="0"/>
               </a:rPr>
-              <a:t>| where FileName has "rubeus" or SHA256 == "&lt;hash&gt;"</a:t>
+              <a:t>| where DeviceName == TargetDevice or FileName has "rubeus" or SHA256 == "&lt;hash&gt;"</a:t>
             </a:r>
           </a:p>
           <a:p>
@@ -4847,7 +4858,7 @@
           <p:cNvPr id="9" name="Rectangle 8">
             <a:extLst>
               <a:ext uri="{FF2B5EF4-FFF2-40B4-BE49-F238E27FC236}">
-                <a16:creationId xmlns:a16="http://schemas.microsoft.com/office/drawing/2014/main" id="{EDF0F04C-120C-6A48-B232-9B229E2054E8}"/>
+                <a16:creationId xmlns:a16="http://schemas.microsoft.com/office/drawing/2014/main" id="{D6E40CFB-BC98-300A-76AF-AADF29CE77DE}"/>
               </a:ext>
             </a:extLst>
           </p:cNvPr>
@@ -4901,7 +4912,7 @@
           <p:cNvPr id="10" name="TextBox 9">
             <a:extLst>
               <a:ext uri="{FF2B5EF4-FFF2-40B4-BE49-F238E27FC236}">
-                <a16:creationId xmlns:a16="http://schemas.microsoft.com/office/drawing/2014/main" id="{BE39294C-9B11-6334-9EEB-66DE4EF02DEC}"/>
+                <a16:creationId xmlns:a16="http://schemas.microsoft.com/office/drawing/2014/main" id="{A4F9662D-91A9-E317-2932-6312502542D6}"/>
               </a:ext>
             </a:extLst>
           </p:cNvPr>
@@ -4939,7 +4950,7 @@
     </p:spTree>
     <p:extLst>
       <p:ext uri="{BB962C8B-B14F-4D97-AF65-F5344CB8AC3E}">
-        <p14:creationId xmlns:p14="http://schemas.microsoft.com/office/powerpoint/2010/main" val="3612982135"/>
+        <p14:creationId xmlns:p14="http://schemas.microsoft.com/office/powerpoint/2010/main" val="3420655871"/>
       </p:ext>
     </p:extLst>
   </p:cSld>
@@ -4971,7 +4982,7 @@
           <p:cNvPr id="2" name="Rectangle 1">
             <a:extLst>
               <a:ext uri="{FF2B5EF4-FFF2-40B4-BE49-F238E27FC236}">
-                <a16:creationId xmlns:a16="http://schemas.microsoft.com/office/drawing/2014/main" id="{6964C3DD-D255-D52F-2617-555016B1346F}"/>
+                <a16:creationId xmlns:a16="http://schemas.microsoft.com/office/drawing/2014/main" id="{F4FDED85-0EF1-AEAB-5183-AB813F4C2FC5}"/>
               </a:ext>
             </a:extLst>
           </p:cNvPr>
@@ -5039,7 +5050,7 @@
           <p:cNvPr id="3" name="Rectangle 2">
             <a:extLst>
               <a:ext uri="{FF2B5EF4-FFF2-40B4-BE49-F238E27FC236}">
-                <a16:creationId xmlns:a16="http://schemas.microsoft.com/office/drawing/2014/main" id="{FE0AB18F-D6D2-DB32-B8BD-DF19EFBAFF64}"/>
+                <a16:creationId xmlns:a16="http://schemas.microsoft.com/office/drawing/2014/main" id="{74B19AA8-48D2-A28C-9C3E-FE134B9F2D6C}"/>
               </a:ext>
             </a:extLst>
           </p:cNvPr>
@@ -5107,7 +5118,7 @@
           <p:cNvPr id="4" name="TextBox 3">
             <a:extLst>
               <a:ext uri="{FF2B5EF4-FFF2-40B4-BE49-F238E27FC236}">
-                <a16:creationId xmlns:a16="http://schemas.microsoft.com/office/drawing/2014/main" id="{98984085-5649-F985-670E-8098E0C0279E}"/>
+                <a16:creationId xmlns:a16="http://schemas.microsoft.com/office/drawing/2014/main" id="{1866682D-D331-1604-0C78-E73D42C2655A}"/>
               </a:ext>
             </a:extLst>
           </p:cNvPr>
@@ -5147,7 +5158,7 @@
           <p:cNvPr id="5" name="TextBox 4">
             <a:extLst>
               <a:ext uri="{FF2B5EF4-FFF2-40B4-BE49-F238E27FC236}">
-                <a16:creationId xmlns:a16="http://schemas.microsoft.com/office/drawing/2014/main" id="{47CCB861-7829-FD14-2437-0F396F316C3E}"/>
+                <a16:creationId xmlns:a16="http://schemas.microsoft.com/office/drawing/2014/main" id="{BC4A8138-9051-0329-FCF0-514C06AD394B}"/>
               </a:ext>
             </a:extLst>
           </p:cNvPr>
@@ -5187,7 +5198,7 @@
           <p:cNvPr id="6" name="TextBox 5">
             <a:extLst>
               <a:ext uri="{FF2B5EF4-FFF2-40B4-BE49-F238E27FC236}">
-                <a16:creationId xmlns:a16="http://schemas.microsoft.com/office/drawing/2014/main" id="{1D61BCF7-28AB-3C2A-9411-CFC49B037733}"/>
+                <a16:creationId xmlns:a16="http://schemas.microsoft.com/office/drawing/2014/main" id="{6F412B99-E4F9-8548-C1D7-737DC065071F}"/>
               </a:ext>
             </a:extLst>
           </p:cNvPr>
@@ -5280,7 +5291,7 @@
           <p:cNvPr id="7" name="Rectangle 6">
             <a:extLst>
               <a:ext uri="{FF2B5EF4-FFF2-40B4-BE49-F238E27FC236}">
-                <a16:creationId xmlns:a16="http://schemas.microsoft.com/office/drawing/2014/main" id="{1C23FFF0-302E-00FD-64FC-1E144F9A2379}"/>
+                <a16:creationId xmlns:a16="http://schemas.microsoft.com/office/drawing/2014/main" id="{81D73FD7-D796-6677-7C63-78C9DCB757CB}"/>
               </a:ext>
             </a:extLst>
           </p:cNvPr>
@@ -5334,7 +5345,7 @@
           <p:cNvPr id="8" name="TextBox 7">
             <a:extLst>
               <a:ext uri="{FF2B5EF4-FFF2-40B4-BE49-F238E27FC236}">
-                <a16:creationId xmlns:a16="http://schemas.microsoft.com/office/drawing/2014/main" id="{73A1671C-94F0-FC82-EBB8-186606438AE4}"/>
+                <a16:creationId xmlns:a16="http://schemas.microsoft.com/office/drawing/2014/main" id="{1A05AB98-D550-85F9-8490-1883E6EC30D5}"/>
               </a:ext>
             </a:extLst>
           </p:cNvPr>
@@ -5344,7 +5355,7 @@
         <p:spPr>
           <a:xfrm>
             <a:off x="5930900" y="1371600"/>
-            <a:ext cx="5410200" cy="2811026"/>
+            <a:ext cx="5410200" cy="2980303"/>
           </a:xfrm>
           <a:prstGeom prst="rect">
             <a:avLst/>
@@ -5364,6 +5375,17 @@
                 </a:solidFill>
                 <a:latin typeface="Cascadia Mono" panose="020B0609020000020004" pitchFamily="49" charset="0"/>
               </a:rPr>
+              <a:t>let TargetDevice = "usm262346";</a:t>
+            </a:r>
+          </a:p>
+          <a:p>
+            <a:r>
+              <a:rPr lang="en-US" sz="1100">
+                <a:solidFill>
+                  <a:srgbClr val="0B1F3A"/>
+                </a:solidFill>
+                <a:latin typeface="Cascadia Mono" panose="020B0609020000020004" pitchFamily="49" charset="0"/>
+              </a:rPr>
               <a:t>union isfuzzy=true</a:t>
             </a:r>
           </a:p>
@@ -5515,7 +5537,7 @@
     </p:spTree>
     <p:extLst>
       <p:ext uri="{BB962C8B-B14F-4D97-AF65-F5344CB8AC3E}">
-        <p14:creationId xmlns:p14="http://schemas.microsoft.com/office/powerpoint/2010/main" val="60374386"/>
+        <p14:creationId xmlns:p14="http://schemas.microsoft.com/office/powerpoint/2010/main" val="861940525"/>
       </p:ext>
     </p:extLst>
   </p:cSld>
@@ -5547,7 +5569,7 @@
           <p:cNvPr id="2" name="Rectangle 1">
             <a:extLst>
               <a:ext uri="{FF2B5EF4-FFF2-40B4-BE49-F238E27FC236}">
-                <a16:creationId xmlns:a16="http://schemas.microsoft.com/office/drawing/2014/main" id="{0A75B1AF-C9B2-81B0-A11F-0DD192232709}"/>
+                <a16:creationId xmlns:a16="http://schemas.microsoft.com/office/drawing/2014/main" id="{CEE5A4C1-B5FD-D53D-B838-D1E31DEAE6CC}"/>
               </a:ext>
             </a:extLst>
           </p:cNvPr>
@@ -5615,7 +5637,7 @@
           <p:cNvPr id="3" name="Rectangle 2">
             <a:extLst>
               <a:ext uri="{FF2B5EF4-FFF2-40B4-BE49-F238E27FC236}">
-                <a16:creationId xmlns:a16="http://schemas.microsoft.com/office/drawing/2014/main" id="{14B1B0F9-8886-EF56-3ECC-2D40CBE5D0B9}"/>
+                <a16:creationId xmlns:a16="http://schemas.microsoft.com/office/drawing/2014/main" id="{C6AD9854-9F7A-5EBB-5818-7291C5C92C1C}"/>
               </a:ext>
             </a:extLst>
           </p:cNvPr>
@@ -5683,7 +5705,7 @@
           <p:cNvPr id="4" name="TextBox 3">
             <a:extLst>
               <a:ext uri="{FF2B5EF4-FFF2-40B4-BE49-F238E27FC236}">
-                <a16:creationId xmlns:a16="http://schemas.microsoft.com/office/drawing/2014/main" id="{A3C7D5CA-6DE4-11FE-E5FC-EA9D0DE128A0}"/>
+                <a16:creationId xmlns:a16="http://schemas.microsoft.com/office/drawing/2014/main" id="{5E6F4578-8826-997F-1937-E8AE27A1FAE1}"/>
               </a:ext>
             </a:extLst>
           </p:cNvPr>
@@ -5723,7 +5745,7 @@
           <p:cNvPr id="5" name="TextBox 4">
             <a:extLst>
               <a:ext uri="{FF2B5EF4-FFF2-40B4-BE49-F238E27FC236}">
-                <a16:creationId xmlns:a16="http://schemas.microsoft.com/office/drawing/2014/main" id="{D48F0094-DA24-0AFF-74AD-3611C384ED15}"/>
+                <a16:creationId xmlns:a16="http://schemas.microsoft.com/office/drawing/2014/main" id="{E673CDB4-AFA9-17C2-7607-19FA82E7087D}"/>
               </a:ext>
             </a:extLst>
           </p:cNvPr>
@@ -5763,7 +5785,7 @@
           <p:cNvPr id="6" name="TextBox 5">
             <a:extLst>
               <a:ext uri="{FF2B5EF4-FFF2-40B4-BE49-F238E27FC236}">
-                <a16:creationId xmlns:a16="http://schemas.microsoft.com/office/drawing/2014/main" id="{D8CCD776-A340-1B64-B1AE-1025B6F1AAC4}"/>
+                <a16:creationId xmlns:a16="http://schemas.microsoft.com/office/drawing/2014/main" id="{8E8E5F94-4B2A-F631-141B-3054256B20F2}"/>
               </a:ext>
             </a:extLst>
           </p:cNvPr>
@@ -5856,7 +5878,7 @@
           <p:cNvPr id="7" name="Rectangle 6">
             <a:extLst>
               <a:ext uri="{FF2B5EF4-FFF2-40B4-BE49-F238E27FC236}">
-                <a16:creationId xmlns:a16="http://schemas.microsoft.com/office/drawing/2014/main" id="{CF0A317F-A2F1-1D1F-9897-F3ADFCAB10C1}"/>
+                <a16:creationId xmlns:a16="http://schemas.microsoft.com/office/drawing/2014/main" id="{E1832307-E90C-BC46-86E6-06925839CBBF}"/>
               </a:ext>
             </a:extLst>
           </p:cNvPr>
@@ -5910,7 +5932,7 @@
           <p:cNvPr id="8" name="TextBox 7">
             <a:extLst>
               <a:ext uri="{FF2B5EF4-FFF2-40B4-BE49-F238E27FC236}">
-                <a16:creationId xmlns:a16="http://schemas.microsoft.com/office/drawing/2014/main" id="{50AAF87A-1ABA-5CBA-D3F7-D72148442DD3}"/>
+                <a16:creationId xmlns:a16="http://schemas.microsoft.com/office/drawing/2014/main" id="{250C4B5D-9D73-1D6E-43E0-6F0083EF49F5}"/>
               </a:ext>
             </a:extLst>
           </p:cNvPr>
@@ -5948,7 +5970,7 @@
     </p:spTree>
     <p:extLst>
       <p:ext uri="{BB962C8B-B14F-4D97-AF65-F5344CB8AC3E}">
-        <p14:creationId xmlns:p14="http://schemas.microsoft.com/office/powerpoint/2010/main" val="3725088523"/>
+        <p14:creationId xmlns:p14="http://schemas.microsoft.com/office/powerpoint/2010/main" val="2950693745"/>
       </p:ext>
     </p:extLst>
   </p:cSld>
@@ -5980,7 +6002,7 @@
           <p:cNvPr id="2" name="Rectangle 1">
             <a:extLst>
               <a:ext uri="{FF2B5EF4-FFF2-40B4-BE49-F238E27FC236}">
-                <a16:creationId xmlns:a16="http://schemas.microsoft.com/office/drawing/2014/main" id="{EADFF8E8-9630-7899-D086-3987378D1C16}"/>
+                <a16:creationId xmlns:a16="http://schemas.microsoft.com/office/drawing/2014/main" id="{6C854C64-DD02-53B8-6310-C3565B9E520C}"/>
               </a:ext>
             </a:extLst>
           </p:cNvPr>
@@ -6048,7 +6070,7 @@
           <p:cNvPr id="3" name="Rectangle 2">
             <a:extLst>
               <a:ext uri="{FF2B5EF4-FFF2-40B4-BE49-F238E27FC236}">
-                <a16:creationId xmlns:a16="http://schemas.microsoft.com/office/drawing/2014/main" id="{3AE228C9-75F2-F328-1E85-C4307CC65DDD}"/>
+                <a16:creationId xmlns:a16="http://schemas.microsoft.com/office/drawing/2014/main" id="{95B8991F-2EC3-E134-1BBD-B6F85D17BACD}"/>
               </a:ext>
             </a:extLst>
           </p:cNvPr>
@@ -6116,7 +6138,7 @@
           <p:cNvPr id="4" name="TextBox 3">
             <a:extLst>
               <a:ext uri="{FF2B5EF4-FFF2-40B4-BE49-F238E27FC236}">
-                <a16:creationId xmlns:a16="http://schemas.microsoft.com/office/drawing/2014/main" id="{1B610A67-D218-37B6-8E39-397A2D3E2027}"/>
+                <a16:creationId xmlns:a16="http://schemas.microsoft.com/office/drawing/2014/main" id="{D94B9D31-DA2A-0319-AA9B-06C85AD5450C}"/>
               </a:ext>
             </a:extLst>
           </p:cNvPr>
@@ -6156,7 +6178,7 @@
           <p:cNvPr id="5" name="TextBox 4">
             <a:extLst>
               <a:ext uri="{FF2B5EF4-FFF2-40B4-BE49-F238E27FC236}">
-                <a16:creationId xmlns:a16="http://schemas.microsoft.com/office/drawing/2014/main" id="{166E341C-B12C-A034-A6E6-6527074E2ADB}"/>
+                <a16:creationId xmlns:a16="http://schemas.microsoft.com/office/drawing/2014/main" id="{A3590EAE-C565-F505-40FA-72B158B9FEDA}"/>
               </a:ext>
             </a:extLst>
           </p:cNvPr>
@@ -6196,7 +6218,7 @@
           <p:cNvPr id="6" name="TextBox 5">
             <a:extLst>
               <a:ext uri="{FF2B5EF4-FFF2-40B4-BE49-F238E27FC236}">
-                <a16:creationId xmlns:a16="http://schemas.microsoft.com/office/drawing/2014/main" id="{B7EA320C-F7D6-1B1F-D016-FB71B661995E}"/>
+                <a16:creationId xmlns:a16="http://schemas.microsoft.com/office/drawing/2014/main" id="{2DE478BD-9201-0F5B-1EE0-2F97D150A5BA}"/>
               </a:ext>
             </a:extLst>
           </p:cNvPr>
@@ -6289,7 +6311,7 @@
           <p:cNvPr id="7" name="Rectangle 6">
             <a:extLst>
               <a:ext uri="{FF2B5EF4-FFF2-40B4-BE49-F238E27FC236}">
-                <a16:creationId xmlns:a16="http://schemas.microsoft.com/office/drawing/2014/main" id="{20561C1E-339B-9282-21BD-D15FC9D3F365}"/>
+                <a16:creationId xmlns:a16="http://schemas.microsoft.com/office/drawing/2014/main" id="{937071D7-8417-CC08-14F3-81B6F1BAECA3}"/>
               </a:ext>
             </a:extLst>
           </p:cNvPr>
@@ -6343,7 +6365,7 @@
           <p:cNvPr id="8" name="TextBox 7">
             <a:extLst>
               <a:ext uri="{FF2B5EF4-FFF2-40B4-BE49-F238E27FC236}">
-                <a16:creationId xmlns:a16="http://schemas.microsoft.com/office/drawing/2014/main" id="{092010F1-ED1F-89AE-9354-E8EC327FA87E}"/>
+                <a16:creationId xmlns:a16="http://schemas.microsoft.com/office/drawing/2014/main" id="{1B684C01-BBEE-1BA8-262B-EE51ABD0DCA6}"/>
               </a:ext>
             </a:extLst>
           </p:cNvPr>
@@ -6603,7 +6625,7 @@
           <p:cNvPr id="9" name="Rectangle 8">
             <a:extLst>
               <a:ext uri="{FF2B5EF4-FFF2-40B4-BE49-F238E27FC236}">
-                <a16:creationId xmlns:a16="http://schemas.microsoft.com/office/drawing/2014/main" id="{24081E7C-8E47-60E9-EE62-B0D52FE9AD10}"/>
+                <a16:creationId xmlns:a16="http://schemas.microsoft.com/office/drawing/2014/main" id="{335EE1ED-C6D4-8012-8A4C-79514FE3CC4B}"/>
               </a:ext>
             </a:extLst>
           </p:cNvPr>
@@ -6657,7 +6679,7 @@
           <p:cNvPr id="10" name="TextBox 9">
             <a:extLst>
               <a:ext uri="{FF2B5EF4-FFF2-40B4-BE49-F238E27FC236}">
-                <a16:creationId xmlns:a16="http://schemas.microsoft.com/office/drawing/2014/main" id="{8C4C4752-4A40-9F11-4E80-E9405858ECC5}"/>
+                <a16:creationId xmlns:a16="http://schemas.microsoft.com/office/drawing/2014/main" id="{E1920E51-7700-DA3D-F5A0-91A4DC5E414C}"/>
               </a:ext>
             </a:extLst>
           </p:cNvPr>
@@ -6695,7 +6717,7 @@
     </p:spTree>
     <p:extLst>
       <p:ext uri="{BB962C8B-B14F-4D97-AF65-F5344CB8AC3E}">
-        <p14:creationId xmlns:p14="http://schemas.microsoft.com/office/powerpoint/2010/main" val="1775152401"/>
+        <p14:creationId xmlns:p14="http://schemas.microsoft.com/office/powerpoint/2010/main" val="4008653288"/>
       </p:ext>
     </p:extLst>
   </p:cSld>
@@ -6727,7 +6749,7 @@
           <p:cNvPr id="2" name="Rectangle 1">
             <a:extLst>
               <a:ext uri="{FF2B5EF4-FFF2-40B4-BE49-F238E27FC236}">
-                <a16:creationId xmlns:a16="http://schemas.microsoft.com/office/drawing/2014/main" id="{F4A60407-93FA-0CD6-B81A-8C3FB1C9D812}"/>
+                <a16:creationId xmlns:a16="http://schemas.microsoft.com/office/drawing/2014/main" id="{4178232F-BB44-2E01-531C-4C4EEC22593F}"/>
               </a:ext>
             </a:extLst>
           </p:cNvPr>
@@ -6795,7 +6817,7 @@
           <p:cNvPr id="3" name="Rectangle 2">
             <a:extLst>
               <a:ext uri="{FF2B5EF4-FFF2-40B4-BE49-F238E27FC236}">
-                <a16:creationId xmlns:a16="http://schemas.microsoft.com/office/drawing/2014/main" id="{A7DA390C-BBB0-27CD-66E2-C6EB8C1C6C95}"/>
+                <a16:creationId xmlns:a16="http://schemas.microsoft.com/office/drawing/2014/main" id="{1E21F5ED-01FF-2EF8-7BB3-641A6EE7F6A2}"/>
               </a:ext>
             </a:extLst>
           </p:cNvPr>
@@ -6863,7 +6885,7 @@
           <p:cNvPr id="4" name="TextBox 3">
             <a:extLst>
               <a:ext uri="{FF2B5EF4-FFF2-40B4-BE49-F238E27FC236}">
-                <a16:creationId xmlns:a16="http://schemas.microsoft.com/office/drawing/2014/main" id="{B0D28AD1-817C-2260-3024-2769E66EC707}"/>
+                <a16:creationId xmlns:a16="http://schemas.microsoft.com/office/drawing/2014/main" id="{20CDAF21-F036-087A-5840-C32E610EC409}"/>
               </a:ext>
             </a:extLst>
           </p:cNvPr>
@@ -6903,7 +6925,7 @@
           <p:cNvPr id="5" name="TextBox 4">
             <a:extLst>
               <a:ext uri="{FF2B5EF4-FFF2-40B4-BE49-F238E27FC236}">
-                <a16:creationId xmlns:a16="http://schemas.microsoft.com/office/drawing/2014/main" id="{A4587A82-BD5E-F34C-6817-C836A166945B}"/>
+                <a16:creationId xmlns:a16="http://schemas.microsoft.com/office/drawing/2014/main" id="{2518123A-96EC-C4E1-0383-7158008E4440}"/>
               </a:ext>
             </a:extLst>
           </p:cNvPr>
@@ -6943,7 +6965,7 @@
           <p:cNvPr id="6" name="TextBox 5">
             <a:extLst>
               <a:ext uri="{FF2B5EF4-FFF2-40B4-BE49-F238E27FC236}">
-                <a16:creationId xmlns:a16="http://schemas.microsoft.com/office/drawing/2014/main" id="{28A7C733-0D4C-E27F-767E-5D11F867D8C7}"/>
+                <a16:creationId xmlns:a16="http://schemas.microsoft.com/office/drawing/2014/main" id="{FA9991D3-38CE-C68B-E105-8FFC67296A40}"/>
               </a:ext>
             </a:extLst>
           </p:cNvPr>
@@ -6983,7 +7005,7 @@
           <p:cNvPr id="7" name="Rectangle 6">
             <a:extLst>
               <a:ext uri="{FF2B5EF4-FFF2-40B4-BE49-F238E27FC236}">
-                <a16:creationId xmlns:a16="http://schemas.microsoft.com/office/drawing/2014/main" id="{F054A465-8CAF-ED91-4F6B-B88F36D8EA53}"/>
+                <a16:creationId xmlns:a16="http://schemas.microsoft.com/office/drawing/2014/main" id="{0EE2A7E7-5887-8AB4-4D31-75D766FE9559}"/>
               </a:ext>
             </a:extLst>
           </p:cNvPr>
@@ -7037,7 +7059,7 @@
           <p:cNvPr id="8" name="TextBox 7">
             <a:extLst>
               <a:ext uri="{FF2B5EF4-FFF2-40B4-BE49-F238E27FC236}">
-                <a16:creationId xmlns:a16="http://schemas.microsoft.com/office/drawing/2014/main" id="{B5008572-7F8A-AFF0-2CE2-B0F45ECDEEE7}"/>
+                <a16:creationId xmlns:a16="http://schemas.microsoft.com/office/drawing/2014/main" id="{B2F4E228-EE6D-5A4D-97D1-6E8AC4FC3FF8}"/>
               </a:ext>
             </a:extLst>
           </p:cNvPr>
@@ -7077,7 +7099,7 @@
           <p:cNvPr id="9" name="TextBox 8">
             <a:extLst>
               <a:ext uri="{FF2B5EF4-FFF2-40B4-BE49-F238E27FC236}">
-                <a16:creationId xmlns:a16="http://schemas.microsoft.com/office/drawing/2014/main" id="{99C00590-B48E-0D72-4988-0694D6B0AF1E}"/>
+                <a16:creationId xmlns:a16="http://schemas.microsoft.com/office/drawing/2014/main" id="{1D722EC7-D5C5-22C3-9935-46B5235D39F3}"/>
               </a:ext>
             </a:extLst>
           </p:cNvPr>
@@ -7168,7 +7190,7 @@
     </p:spTree>
     <p:extLst>
       <p:ext uri="{BB962C8B-B14F-4D97-AF65-F5344CB8AC3E}">
-        <p14:creationId xmlns:p14="http://schemas.microsoft.com/office/powerpoint/2010/main" val="2181349292"/>
+        <p14:creationId xmlns:p14="http://schemas.microsoft.com/office/powerpoint/2010/main" val="1770263877"/>
       </p:ext>
     </p:extLst>
   </p:cSld>
@@ -7200,7 +7222,7 @@
           <p:cNvPr id="2" name="Rectangle 1">
             <a:extLst>
               <a:ext uri="{FF2B5EF4-FFF2-40B4-BE49-F238E27FC236}">
-                <a16:creationId xmlns:a16="http://schemas.microsoft.com/office/drawing/2014/main" id="{90A4059E-3025-861E-080C-D032C4EBB8A9}"/>
+                <a16:creationId xmlns:a16="http://schemas.microsoft.com/office/drawing/2014/main" id="{BB0B2182-E27C-D712-49C8-276FEFEA3A6D}"/>
               </a:ext>
             </a:extLst>
           </p:cNvPr>
@@ -7268,7 +7290,7 @@
           <p:cNvPr id="3" name="Rectangle 2">
             <a:extLst>
               <a:ext uri="{FF2B5EF4-FFF2-40B4-BE49-F238E27FC236}">
-                <a16:creationId xmlns:a16="http://schemas.microsoft.com/office/drawing/2014/main" id="{3AB23965-942B-5E56-47DA-79C3FE0EDEAE}"/>
+                <a16:creationId xmlns:a16="http://schemas.microsoft.com/office/drawing/2014/main" id="{5EA8136D-CB81-70F9-FA0F-CC6247C6A27F}"/>
               </a:ext>
             </a:extLst>
           </p:cNvPr>
@@ -7336,7 +7358,7 @@
           <p:cNvPr id="4" name="TextBox 3">
             <a:extLst>
               <a:ext uri="{FF2B5EF4-FFF2-40B4-BE49-F238E27FC236}">
-                <a16:creationId xmlns:a16="http://schemas.microsoft.com/office/drawing/2014/main" id="{83A2FB54-7139-D6E1-77CF-8355DD32B826}"/>
+                <a16:creationId xmlns:a16="http://schemas.microsoft.com/office/drawing/2014/main" id="{3A0C316A-81AA-49E8-8549-AA14D0886004}"/>
               </a:ext>
             </a:extLst>
           </p:cNvPr>
@@ -7376,7 +7398,7 @@
           <p:cNvPr id="5" name="TextBox 4">
             <a:extLst>
               <a:ext uri="{FF2B5EF4-FFF2-40B4-BE49-F238E27FC236}">
-                <a16:creationId xmlns:a16="http://schemas.microsoft.com/office/drawing/2014/main" id="{3BF8E5C5-BB1F-D9F8-341C-54909F0DCDD1}"/>
+                <a16:creationId xmlns:a16="http://schemas.microsoft.com/office/drawing/2014/main" id="{D24E51A2-C396-6D7F-9A7B-E29B7F7F9145}"/>
               </a:ext>
             </a:extLst>
           </p:cNvPr>
@@ -7416,7 +7438,7 @@
           <p:cNvPr id="6" name="TextBox 5">
             <a:extLst>
               <a:ext uri="{FF2B5EF4-FFF2-40B4-BE49-F238E27FC236}">
-                <a16:creationId xmlns:a16="http://schemas.microsoft.com/office/drawing/2014/main" id="{993B23FF-A56F-8974-A3F0-2F5C87356D50}"/>
+                <a16:creationId xmlns:a16="http://schemas.microsoft.com/office/drawing/2014/main" id="{EEAA3904-A91A-DF4E-96F3-7AC30DECE638}"/>
               </a:ext>
             </a:extLst>
           </p:cNvPr>
@@ -7509,7 +7531,7 @@
           <p:cNvPr id="7" name="Rectangle 6">
             <a:extLst>
               <a:ext uri="{FF2B5EF4-FFF2-40B4-BE49-F238E27FC236}">
-                <a16:creationId xmlns:a16="http://schemas.microsoft.com/office/drawing/2014/main" id="{9DADFA2D-5745-1F06-BCB9-19C3E81237AB}"/>
+                <a16:creationId xmlns:a16="http://schemas.microsoft.com/office/drawing/2014/main" id="{6AB38DE5-1644-4E3A-0975-AEBF4E09686A}"/>
               </a:ext>
             </a:extLst>
           </p:cNvPr>
@@ -7563,7 +7585,7 @@
           <p:cNvPr id="8" name="TextBox 7">
             <a:extLst>
               <a:ext uri="{FF2B5EF4-FFF2-40B4-BE49-F238E27FC236}">
-                <a16:creationId xmlns:a16="http://schemas.microsoft.com/office/drawing/2014/main" id="{0D3D9372-FE62-0DFA-C699-15CCEBD27709}"/>
+                <a16:creationId xmlns:a16="http://schemas.microsoft.com/office/drawing/2014/main" id="{95784566-DBEF-3EC4-0469-99223E261832}"/>
               </a:ext>
             </a:extLst>
           </p:cNvPr>
@@ -7601,7 +7623,7 @@
     </p:spTree>
     <p:extLst>
       <p:ext uri="{BB962C8B-B14F-4D97-AF65-F5344CB8AC3E}">
-        <p14:creationId xmlns:p14="http://schemas.microsoft.com/office/powerpoint/2010/main" val="2339246520"/>
+        <p14:creationId xmlns:p14="http://schemas.microsoft.com/office/powerpoint/2010/main" val="2928609283"/>
       </p:ext>
     </p:extLst>
   </p:cSld>
@@ -7633,7 +7655,7 @@
           <p:cNvPr id="2" name="Rectangle 1">
             <a:extLst>
               <a:ext uri="{FF2B5EF4-FFF2-40B4-BE49-F238E27FC236}">
-                <a16:creationId xmlns:a16="http://schemas.microsoft.com/office/drawing/2014/main" id="{FE30037F-333B-4155-D7C0-0F2A3FDA1D61}"/>
+                <a16:creationId xmlns:a16="http://schemas.microsoft.com/office/drawing/2014/main" id="{0FBB8C06-B8F2-0B30-635F-82B7594991BE}"/>
               </a:ext>
             </a:extLst>
           </p:cNvPr>
@@ -7701,7 +7723,7 @@
           <p:cNvPr id="3" name="Rectangle 2">
             <a:extLst>
               <a:ext uri="{FF2B5EF4-FFF2-40B4-BE49-F238E27FC236}">
-                <a16:creationId xmlns:a16="http://schemas.microsoft.com/office/drawing/2014/main" id="{896FA7B2-0256-18A7-D725-C5775FDEDFD4}"/>
+                <a16:creationId xmlns:a16="http://schemas.microsoft.com/office/drawing/2014/main" id="{FC6F0E6E-3557-FA99-D40E-61DB8852665D}"/>
               </a:ext>
             </a:extLst>
           </p:cNvPr>
@@ -7769,7 +7791,7 @@
           <p:cNvPr id="4" name="TextBox 3">
             <a:extLst>
               <a:ext uri="{FF2B5EF4-FFF2-40B4-BE49-F238E27FC236}">
-                <a16:creationId xmlns:a16="http://schemas.microsoft.com/office/drawing/2014/main" id="{70DBEE6C-29B2-1877-31DE-94F56C28E017}"/>
+                <a16:creationId xmlns:a16="http://schemas.microsoft.com/office/drawing/2014/main" id="{0D2AC787-E6C5-281A-BF91-A3C321450A17}"/>
               </a:ext>
             </a:extLst>
           </p:cNvPr>
@@ -7809,7 +7831,7 @@
           <p:cNvPr id="5" name="TextBox 4">
             <a:extLst>
               <a:ext uri="{FF2B5EF4-FFF2-40B4-BE49-F238E27FC236}">
-                <a16:creationId xmlns:a16="http://schemas.microsoft.com/office/drawing/2014/main" id="{DE8789FD-55D2-6399-BA07-0C753C4984F9}"/>
+                <a16:creationId xmlns:a16="http://schemas.microsoft.com/office/drawing/2014/main" id="{7DA59EE5-50B1-95A6-4FA6-7F33A6AF2A99}"/>
               </a:ext>
             </a:extLst>
           </p:cNvPr>
@@ -7849,7 +7871,7 @@
           <p:cNvPr id="6" name="TextBox 5">
             <a:extLst>
               <a:ext uri="{FF2B5EF4-FFF2-40B4-BE49-F238E27FC236}">
-                <a16:creationId xmlns:a16="http://schemas.microsoft.com/office/drawing/2014/main" id="{6C0984E8-598D-8F93-9FE5-98EF157768BB}"/>
+                <a16:creationId xmlns:a16="http://schemas.microsoft.com/office/drawing/2014/main" id="{0F530D0E-3C82-A738-40F0-EAD5F49033BD}"/>
               </a:ext>
             </a:extLst>
           </p:cNvPr>
@@ -7942,7 +7964,7 @@
           <p:cNvPr id="7" name="Rectangle 6">
             <a:extLst>
               <a:ext uri="{FF2B5EF4-FFF2-40B4-BE49-F238E27FC236}">
-                <a16:creationId xmlns:a16="http://schemas.microsoft.com/office/drawing/2014/main" id="{0CDD42FE-F067-2E04-6846-0DBC8BC0829D}"/>
+                <a16:creationId xmlns:a16="http://schemas.microsoft.com/office/drawing/2014/main" id="{C30649FB-7254-E3E4-7D8F-B030B2D9E434}"/>
               </a:ext>
             </a:extLst>
           </p:cNvPr>
@@ -7996,7 +8018,7 @@
           <p:cNvPr id="8" name="TextBox 7">
             <a:extLst>
               <a:ext uri="{FF2B5EF4-FFF2-40B4-BE49-F238E27FC236}">
-                <a16:creationId xmlns:a16="http://schemas.microsoft.com/office/drawing/2014/main" id="{38537DFC-9344-CA6A-72FF-C156B932BC0A}"/>
+                <a16:creationId xmlns:a16="http://schemas.microsoft.com/office/drawing/2014/main" id="{585435CD-CD7D-136B-4901-ECD84B5991CD}"/>
               </a:ext>
             </a:extLst>
           </p:cNvPr>
@@ -8091,7 +8113,7 @@
           <p:cNvPr id="9" name="Rectangle 8">
             <a:extLst>
               <a:ext uri="{FF2B5EF4-FFF2-40B4-BE49-F238E27FC236}">
-                <a16:creationId xmlns:a16="http://schemas.microsoft.com/office/drawing/2014/main" id="{D706F368-3466-DE43-3DA0-7228DD473E8E}"/>
+                <a16:creationId xmlns:a16="http://schemas.microsoft.com/office/drawing/2014/main" id="{2A5B694E-AB10-68C8-BB50-B80AD979F1E0}"/>
               </a:ext>
             </a:extLst>
           </p:cNvPr>
@@ -8145,7 +8167,7 @@
           <p:cNvPr id="10" name="TextBox 9">
             <a:extLst>
               <a:ext uri="{FF2B5EF4-FFF2-40B4-BE49-F238E27FC236}">
-                <a16:creationId xmlns:a16="http://schemas.microsoft.com/office/drawing/2014/main" id="{8B59A471-355C-CC93-76F1-DB2D6BC0F127}"/>
+                <a16:creationId xmlns:a16="http://schemas.microsoft.com/office/drawing/2014/main" id="{003191D0-0870-60E6-95E8-B59B274F15FA}"/>
               </a:ext>
             </a:extLst>
           </p:cNvPr>
@@ -8183,7 +8205,7 @@
     </p:spTree>
     <p:extLst>
       <p:ext uri="{BB962C8B-B14F-4D97-AF65-F5344CB8AC3E}">
-        <p14:creationId xmlns:p14="http://schemas.microsoft.com/office/powerpoint/2010/main" val="3580403689"/>
+        <p14:creationId xmlns:p14="http://schemas.microsoft.com/office/powerpoint/2010/main" val="1412648460"/>
       </p:ext>
     </p:extLst>
   </p:cSld>
@@ -8215,7 +8237,7 @@
           <p:cNvPr id="2" name="Rectangle 1">
             <a:extLst>
               <a:ext uri="{FF2B5EF4-FFF2-40B4-BE49-F238E27FC236}">
-                <a16:creationId xmlns:a16="http://schemas.microsoft.com/office/drawing/2014/main" id="{DEE482FF-9C18-1A68-E949-6F4356D8C800}"/>
+                <a16:creationId xmlns:a16="http://schemas.microsoft.com/office/drawing/2014/main" id="{AC78E4EF-2B43-436B-1DF8-A748297B21CD}"/>
               </a:ext>
             </a:extLst>
           </p:cNvPr>
@@ -8283,7 +8305,7 @@
           <p:cNvPr id="3" name="Rectangle 2">
             <a:extLst>
               <a:ext uri="{FF2B5EF4-FFF2-40B4-BE49-F238E27FC236}">
-                <a16:creationId xmlns:a16="http://schemas.microsoft.com/office/drawing/2014/main" id="{73BB34AC-7496-FA10-79B0-433F31EAE4C1}"/>
+                <a16:creationId xmlns:a16="http://schemas.microsoft.com/office/drawing/2014/main" id="{467D3E80-E166-F080-9BEC-77D1E7E170CE}"/>
               </a:ext>
             </a:extLst>
           </p:cNvPr>
@@ -8351,7 +8373,7 @@
           <p:cNvPr id="4" name="TextBox 3">
             <a:extLst>
               <a:ext uri="{FF2B5EF4-FFF2-40B4-BE49-F238E27FC236}">
-                <a16:creationId xmlns:a16="http://schemas.microsoft.com/office/drawing/2014/main" id="{E91D5271-AE48-DD0B-A066-AC125D66632A}"/>
+                <a16:creationId xmlns:a16="http://schemas.microsoft.com/office/drawing/2014/main" id="{44B5E900-6FC6-E7AE-357B-D88B9E55EB5A}"/>
               </a:ext>
             </a:extLst>
           </p:cNvPr>
@@ -8391,7 +8413,7 @@
           <p:cNvPr id="5" name="TextBox 4">
             <a:extLst>
               <a:ext uri="{FF2B5EF4-FFF2-40B4-BE49-F238E27FC236}">
-                <a16:creationId xmlns:a16="http://schemas.microsoft.com/office/drawing/2014/main" id="{31430863-C791-6B45-1C4D-3B590805BCF2}"/>
+                <a16:creationId xmlns:a16="http://schemas.microsoft.com/office/drawing/2014/main" id="{726F536D-2672-421E-CF73-14B8D23B25E2}"/>
               </a:ext>
             </a:extLst>
           </p:cNvPr>
@@ -8431,7 +8453,7 @@
           <p:cNvPr id="6" name="TextBox 5">
             <a:extLst>
               <a:ext uri="{FF2B5EF4-FFF2-40B4-BE49-F238E27FC236}">
-                <a16:creationId xmlns:a16="http://schemas.microsoft.com/office/drawing/2014/main" id="{1DC4577C-814E-5CE2-E7C0-AC4BD5CFC349}"/>
+                <a16:creationId xmlns:a16="http://schemas.microsoft.com/office/drawing/2014/main" id="{FFE2D1E2-14AB-DEEB-C594-CB6E39D26A85}"/>
               </a:ext>
             </a:extLst>
           </p:cNvPr>
@@ -8471,7 +8493,7 @@
           <p:cNvPr id="7" name="Rectangle 6">
             <a:extLst>
               <a:ext uri="{FF2B5EF4-FFF2-40B4-BE49-F238E27FC236}">
-                <a16:creationId xmlns:a16="http://schemas.microsoft.com/office/drawing/2014/main" id="{85BD7964-781B-D36D-6B49-A47EEAA66163}"/>
+                <a16:creationId xmlns:a16="http://schemas.microsoft.com/office/drawing/2014/main" id="{7E598169-82BF-7647-F1A0-6AC9CB7510CA}"/>
               </a:ext>
             </a:extLst>
           </p:cNvPr>
@@ -8525,7 +8547,7 @@
           <p:cNvPr id="8" name="TextBox 7">
             <a:extLst>
               <a:ext uri="{FF2B5EF4-FFF2-40B4-BE49-F238E27FC236}">
-                <a16:creationId xmlns:a16="http://schemas.microsoft.com/office/drawing/2014/main" id="{AABD942F-E446-E689-CC43-E407BD00E644}"/>
+                <a16:creationId xmlns:a16="http://schemas.microsoft.com/office/drawing/2014/main" id="{8F1282FC-5EE5-F3B3-535C-9A03E69EEBEF}"/>
               </a:ext>
             </a:extLst>
           </p:cNvPr>
@@ -8565,7 +8587,7 @@
           <p:cNvPr id="9" name="TextBox 8">
             <a:extLst>
               <a:ext uri="{FF2B5EF4-FFF2-40B4-BE49-F238E27FC236}">
-                <a16:creationId xmlns:a16="http://schemas.microsoft.com/office/drawing/2014/main" id="{B4889CA2-76F6-6952-8180-D3842C77C67C}"/>
+                <a16:creationId xmlns:a16="http://schemas.microsoft.com/office/drawing/2014/main" id="{8B1C54EB-F900-C9F7-EA82-D61FBD3FC0A9}"/>
               </a:ext>
             </a:extLst>
           </p:cNvPr>
@@ -8656,7 +8678,7 @@
     </p:spTree>
     <p:extLst>
       <p:ext uri="{BB962C8B-B14F-4D97-AF65-F5344CB8AC3E}">
-        <p14:creationId xmlns:p14="http://schemas.microsoft.com/office/powerpoint/2010/main" val="1707052779"/>
+        <p14:creationId xmlns:p14="http://schemas.microsoft.com/office/powerpoint/2010/main" val="1442102646"/>
       </p:ext>
     </p:extLst>
   </p:cSld>
@@ -8688,7 +8710,7 @@
           <p:cNvPr id="2" name="Rectangle 1">
             <a:extLst>
               <a:ext uri="{FF2B5EF4-FFF2-40B4-BE49-F238E27FC236}">
-                <a16:creationId xmlns:a16="http://schemas.microsoft.com/office/drawing/2014/main" id="{406931D7-20E5-DF71-FBF3-40532BBC93B2}"/>
+                <a16:creationId xmlns:a16="http://schemas.microsoft.com/office/drawing/2014/main" id="{3F9611D2-79D8-358F-4797-F7DDEE61D2C4}"/>
               </a:ext>
             </a:extLst>
           </p:cNvPr>
@@ -8756,7 +8778,7 @@
           <p:cNvPr id="3" name="Rectangle 2">
             <a:extLst>
               <a:ext uri="{FF2B5EF4-FFF2-40B4-BE49-F238E27FC236}">
-                <a16:creationId xmlns:a16="http://schemas.microsoft.com/office/drawing/2014/main" id="{698B92B0-B72A-4964-E5F9-B64DA2969568}"/>
+                <a16:creationId xmlns:a16="http://schemas.microsoft.com/office/drawing/2014/main" id="{A8D843A5-F61C-5C4F-9516-61C356289686}"/>
               </a:ext>
             </a:extLst>
           </p:cNvPr>
@@ -8824,7 +8846,7 @@
           <p:cNvPr id="4" name="TextBox 3">
             <a:extLst>
               <a:ext uri="{FF2B5EF4-FFF2-40B4-BE49-F238E27FC236}">
-                <a16:creationId xmlns:a16="http://schemas.microsoft.com/office/drawing/2014/main" id="{D92F98BE-D613-C216-A8E1-24E5B148BAC3}"/>
+                <a16:creationId xmlns:a16="http://schemas.microsoft.com/office/drawing/2014/main" id="{936F65D4-DEC5-E38F-E505-2537CB749E3F}"/>
               </a:ext>
             </a:extLst>
           </p:cNvPr>
@@ -8864,7 +8886,7 @@
           <p:cNvPr id="5" name="TextBox 4">
             <a:extLst>
               <a:ext uri="{FF2B5EF4-FFF2-40B4-BE49-F238E27FC236}">
-                <a16:creationId xmlns:a16="http://schemas.microsoft.com/office/drawing/2014/main" id="{C9EDA27F-92AB-2DB8-D35D-FB2F2715A621}"/>
+                <a16:creationId xmlns:a16="http://schemas.microsoft.com/office/drawing/2014/main" id="{AABB6F44-FCDA-A8ED-0A99-2E86B287C6E0}"/>
               </a:ext>
             </a:extLst>
           </p:cNvPr>
@@ -8910,7 +8932,7 @@
           <p:cNvPr id="6" name="TextBox 5">
             <a:extLst>
               <a:ext uri="{FF2B5EF4-FFF2-40B4-BE49-F238E27FC236}">
-                <a16:creationId xmlns:a16="http://schemas.microsoft.com/office/drawing/2014/main" id="{486ED802-EA77-A182-A47A-1F599025515D}"/>
+                <a16:creationId xmlns:a16="http://schemas.microsoft.com/office/drawing/2014/main" id="{E9F32466-5571-ECC5-5409-B7325F8F7CCA}"/>
               </a:ext>
             </a:extLst>
           </p:cNvPr>
@@ -9003,7 +9025,7 @@
           <p:cNvPr id="7" name="Rectangle 6">
             <a:extLst>
               <a:ext uri="{FF2B5EF4-FFF2-40B4-BE49-F238E27FC236}">
-                <a16:creationId xmlns:a16="http://schemas.microsoft.com/office/drawing/2014/main" id="{E02066D8-E94D-2F97-1CA2-4F65A5E09DDF}"/>
+                <a16:creationId xmlns:a16="http://schemas.microsoft.com/office/drawing/2014/main" id="{2488DF0A-6234-93DC-DD8F-AEDC5E830A17}"/>
               </a:ext>
             </a:extLst>
           </p:cNvPr>
@@ -9057,7 +9079,7 @@
           <p:cNvPr id="8" name="TextBox 7">
             <a:extLst>
               <a:ext uri="{FF2B5EF4-FFF2-40B4-BE49-F238E27FC236}">
-                <a16:creationId xmlns:a16="http://schemas.microsoft.com/office/drawing/2014/main" id="{47EDCEC0-D5DE-1A98-A8E6-04C433308153}"/>
+                <a16:creationId xmlns:a16="http://schemas.microsoft.com/office/drawing/2014/main" id="{2571194E-3BB5-6AB8-077B-D9118651D566}"/>
               </a:ext>
             </a:extLst>
           </p:cNvPr>
@@ -9095,7 +9117,7 @@
     </p:spTree>
     <p:extLst>
       <p:ext uri="{BB962C8B-B14F-4D97-AF65-F5344CB8AC3E}">
-        <p14:creationId xmlns:p14="http://schemas.microsoft.com/office/powerpoint/2010/main" val="1475298615"/>
+        <p14:creationId xmlns:p14="http://schemas.microsoft.com/office/powerpoint/2010/main" val="1184923217"/>
       </p:ext>
     </p:extLst>
   </p:cSld>
@@ -9127,7 +9149,7 @@
           <p:cNvPr id="2" name="Rectangle 1">
             <a:extLst>
               <a:ext uri="{FF2B5EF4-FFF2-40B4-BE49-F238E27FC236}">
-                <a16:creationId xmlns:a16="http://schemas.microsoft.com/office/drawing/2014/main" id="{7FC5EC45-BA06-CF75-DC29-EF83473EC885}"/>
+                <a16:creationId xmlns:a16="http://schemas.microsoft.com/office/drawing/2014/main" id="{FD07A00D-50AD-0B26-A506-4771075B3E27}"/>
               </a:ext>
             </a:extLst>
           </p:cNvPr>
@@ -9195,7 +9217,7 @@
           <p:cNvPr id="3" name="Rectangle 2">
             <a:extLst>
               <a:ext uri="{FF2B5EF4-FFF2-40B4-BE49-F238E27FC236}">
-                <a16:creationId xmlns:a16="http://schemas.microsoft.com/office/drawing/2014/main" id="{98851DBD-750E-6669-F253-F6D494F9BEED}"/>
+                <a16:creationId xmlns:a16="http://schemas.microsoft.com/office/drawing/2014/main" id="{4068395F-6909-C88D-881C-C641EC89C829}"/>
               </a:ext>
             </a:extLst>
           </p:cNvPr>
@@ -9263,7 +9285,7 @@
           <p:cNvPr id="4" name="TextBox 3">
             <a:extLst>
               <a:ext uri="{FF2B5EF4-FFF2-40B4-BE49-F238E27FC236}">
-                <a16:creationId xmlns:a16="http://schemas.microsoft.com/office/drawing/2014/main" id="{A0CF7F88-A9C1-09C0-F52B-54F7A4EC17CD}"/>
+                <a16:creationId xmlns:a16="http://schemas.microsoft.com/office/drawing/2014/main" id="{BD874A9A-9F24-EE62-06F6-A1BCB85119D7}"/>
               </a:ext>
             </a:extLst>
           </p:cNvPr>
@@ -9303,7 +9325,7 @@
           <p:cNvPr id="5" name="TextBox 4">
             <a:extLst>
               <a:ext uri="{FF2B5EF4-FFF2-40B4-BE49-F238E27FC236}">
-                <a16:creationId xmlns:a16="http://schemas.microsoft.com/office/drawing/2014/main" id="{A6DD85D7-2D0D-C475-7D68-E823AEFED770}"/>
+                <a16:creationId xmlns:a16="http://schemas.microsoft.com/office/drawing/2014/main" id="{363EC9F6-10D4-E5E1-5777-B962F5F027A6}"/>
               </a:ext>
             </a:extLst>
           </p:cNvPr>
@@ -9343,7 +9365,7 @@
           <p:cNvPr id="6" name="TextBox 5">
             <a:extLst>
               <a:ext uri="{FF2B5EF4-FFF2-40B4-BE49-F238E27FC236}">
-                <a16:creationId xmlns:a16="http://schemas.microsoft.com/office/drawing/2014/main" id="{8597E5BD-AF3E-2F18-10AA-3C8EC945B13F}"/>
+                <a16:creationId xmlns:a16="http://schemas.microsoft.com/office/drawing/2014/main" id="{85A47654-4E49-F091-788B-A9FB61F5F60F}"/>
               </a:ext>
             </a:extLst>
           </p:cNvPr>
@@ -9436,7 +9458,7 @@
           <p:cNvPr id="7" name="Rectangle 6">
             <a:extLst>
               <a:ext uri="{FF2B5EF4-FFF2-40B4-BE49-F238E27FC236}">
-                <a16:creationId xmlns:a16="http://schemas.microsoft.com/office/drawing/2014/main" id="{9EA92359-DDD9-91C4-5139-D3EDEB83509C}"/>
+                <a16:creationId xmlns:a16="http://schemas.microsoft.com/office/drawing/2014/main" id="{D3ECFDC9-6AFC-E00D-CE64-3CFAC007EB06}"/>
               </a:ext>
             </a:extLst>
           </p:cNvPr>
@@ -9490,7 +9512,7 @@
           <p:cNvPr id="8" name="TextBox 7">
             <a:extLst>
               <a:ext uri="{FF2B5EF4-FFF2-40B4-BE49-F238E27FC236}">
-                <a16:creationId xmlns:a16="http://schemas.microsoft.com/office/drawing/2014/main" id="{3D7942FF-EE48-BA55-C96E-E138797BFF8C}"/>
+                <a16:creationId xmlns:a16="http://schemas.microsoft.com/office/drawing/2014/main" id="{6739EB8F-4EB5-61B9-FEE6-BCADAE9FC5C7}"/>
               </a:ext>
             </a:extLst>
           </p:cNvPr>
@@ -9585,7 +9607,7 @@
           <p:cNvPr id="9" name="Rectangle 8">
             <a:extLst>
               <a:ext uri="{FF2B5EF4-FFF2-40B4-BE49-F238E27FC236}">
-                <a16:creationId xmlns:a16="http://schemas.microsoft.com/office/drawing/2014/main" id="{9F7D84E9-84CC-8D16-0E16-95D0A3C2BAFA}"/>
+                <a16:creationId xmlns:a16="http://schemas.microsoft.com/office/drawing/2014/main" id="{79202645-E37F-81EC-C37F-90EAD383DC1C}"/>
               </a:ext>
             </a:extLst>
           </p:cNvPr>
@@ -9639,7 +9661,7 @@
           <p:cNvPr id="10" name="TextBox 9">
             <a:extLst>
               <a:ext uri="{FF2B5EF4-FFF2-40B4-BE49-F238E27FC236}">
-                <a16:creationId xmlns:a16="http://schemas.microsoft.com/office/drawing/2014/main" id="{9BF3D2C4-4DEC-3803-B5DD-6B3806AC5715}"/>
+                <a16:creationId xmlns:a16="http://schemas.microsoft.com/office/drawing/2014/main" id="{61655C07-50B4-D413-587E-2446421C19B0}"/>
               </a:ext>
             </a:extLst>
           </p:cNvPr>
@@ -9677,7 +9699,7 @@
     </p:spTree>
     <p:extLst>
       <p:ext uri="{BB962C8B-B14F-4D97-AF65-F5344CB8AC3E}">
-        <p14:creationId xmlns:p14="http://schemas.microsoft.com/office/powerpoint/2010/main" val="1759695071"/>
+        <p14:creationId xmlns:p14="http://schemas.microsoft.com/office/powerpoint/2010/main" val="1751737842"/>
       </p:ext>
     </p:extLst>
   </p:cSld>
@@ -9709,7 +9731,7 @@
           <p:cNvPr id="2" name="Rectangle 1">
             <a:extLst>
               <a:ext uri="{FF2B5EF4-FFF2-40B4-BE49-F238E27FC236}">
-                <a16:creationId xmlns:a16="http://schemas.microsoft.com/office/drawing/2014/main" id="{537A3A62-0731-41D6-4849-2B6F891624DB}"/>
+                <a16:creationId xmlns:a16="http://schemas.microsoft.com/office/drawing/2014/main" id="{4323CEE9-72F2-C325-2CA6-681D03F4DB17}"/>
               </a:ext>
             </a:extLst>
           </p:cNvPr>
@@ -9777,7 +9799,7 @@
           <p:cNvPr id="3" name="Rectangle 2">
             <a:extLst>
               <a:ext uri="{FF2B5EF4-FFF2-40B4-BE49-F238E27FC236}">
-                <a16:creationId xmlns:a16="http://schemas.microsoft.com/office/drawing/2014/main" id="{FA719890-3352-9412-2E09-B94E5C147193}"/>
+                <a16:creationId xmlns:a16="http://schemas.microsoft.com/office/drawing/2014/main" id="{520605E4-0A54-CEC2-B7CD-DD187DC5EE86}"/>
               </a:ext>
             </a:extLst>
           </p:cNvPr>
@@ -9845,7 +9867,7 @@
           <p:cNvPr id="4" name="TextBox 3">
             <a:extLst>
               <a:ext uri="{FF2B5EF4-FFF2-40B4-BE49-F238E27FC236}">
-                <a16:creationId xmlns:a16="http://schemas.microsoft.com/office/drawing/2014/main" id="{775815E9-15EA-3A92-9D1A-33E4DD053693}"/>
+                <a16:creationId xmlns:a16="http://schemas.microsoft.com/office/drawing/2014/main" id="{13BD7795-86D9-677F-C41F-9E7851FFA896}"/>
               </a:ext>
             </a:extLst>
           </p:cNvPr>
@@ -9885,7 +9907,7 @@
           <p:cNvPr id="5" name="TextBox 4">
             <a:extLst>
               <a:ext uri="{FF2B5EF4-FFF2-40B4-BE49-F238E27FC236}">
-                <a16:creationId xmlns:a16="http://schemas.microsoft.com/office/drawing/2014/main" id="{B29E3D07-662F-B8FE-2376-E8CD4B9E4C17}"/>
+                <a16:creationId xmlns:a16="http://schemas.microsoft.com/office/drawing/2014/main" id="{CE1D2363-D2DB-E70E-E979-E3269E74B515}"/>
               </a:ext>
             </a:extLst>
           </p:cNvPr>
@@ -9925,7 +9947,7 @@
           <p:cNvPr id="6" name="TextBox 5">
             <a:extLst>
               <a:ext uri="{FF2B5EF4-FFF2-40B4-BE49-F238E27FC236}">
-                <a16:creationId xmlns:a16="http://schemas.microsoft.com/office/drawing/2014/main" id="{F3A8ED3D-ED71-A0AE-8FB4-32E3BF15B984}"/>
+                <a16:creationId xmlns:a16="http://schemas.microsoft.com/office/drawing/2014/main" id="{E31CF96D-0558-9649-30AE-6A29CCC5745F}"/>
               </a:ext>
             </a:extLst>
           </p:cNvPr>
@@ -10032,7 +10054,7 @@
     </p:spTree>
     <p:extLst>
       <p:ext uri="{BB962C8B-B14F-4D97-AF65-F5344CB8AC3E}">
-        <p14:creationId xmlns:p14="http://schemas.microsoft.com/office/powerpoint/2010/main" val="1715163099"/>
+        <p14:creationId xmlns:p14="http://schemas.microsoft.com/office/powerpoint/2010/main" val="1105439804"/>
       </p:ext>
     </p:extLst>
   </p:cSld>
@@ -10064,7 +10086,7 @@
           <p:cNvPr id="2" name="Rectangle 1">
             <a:extLst>
               <a:ext uri="{FF2B5EF4-FFF2-40B4-BE49-F238E27FC236}">
-                <a16:creationId xmlns:a16="http://schemas.microsoft.com/office/drawing/2014/main" id="{4DD76C7F-95EA-3012-7581-46F593589A45}"/>
+                <a16:creationId xmlns:a16="http://schemas.microsoft.com/office/drawing/2014/main" id="{5185DD2C-0324-1203-361B-43AA425B8268}"/>
               </a:ext>
             </a:extLst>
           </p:cNvPr>
@@ -10132,7 +10154,7 @@
           <p:cNvPr id="3" name="Rectangle 2">
             <a:extLst>
               <a:ext uri="{FF2B5EF4-FFF2-40B4-BE49-F238E27FC236}">
-                <a16:creationId xmlns:a16="http://schemas.microsoft.com/office/drawing/2014/main" id="{5A9B45C4-D416-8B80-20DA-C373EF58F305}"/>
+                <a16:creationId xmlns:a16="http://schemas.microsoft.com/office/drawing/2014/main" id="{68AB2376-5EC6-87CF-A641-0B191621AC22}"/>
               </a:ext>
             </a:extLst>
           </p:cNvPr>
@@ -10200,7 +10222,7 @@
           <p:cNvPr id="4" name="TextBox 3">
             <a:extLst>
               <a:ext uri="{FF2B5EF4-FFF2-40B4-BE49-F238E27FC236}">
-                <a16:creationId xmlns:a16="http://schemas.microsoft.com/office/drawing/2014/main" id="{32A0C10B-6700-B6C0-9457-80315A8DC9E5}"/>
+                <a16:creationId xmlns:a16="http://schemas.microsoft.com/office/drawing/2014/main" id="{4A4B5E3B-435B-82C4-AB11-60C9003734CF}"/>
               </a:ext>
             </a:extLst>
           </p:cNvPr>
@@ -10240,7 +10262,7 @@
           <p:cNvPr id="5" name="TextBox 4">
             <a:extLst>
               <a:ext uri="{FF2B5EF4-FFF2-40B4-BE49-F238E27FC236}">
-                <a16:creationId xmlns:a16="http://schemas.microsoft.com/office/drawing/2014/main" id="{FE622A51-A254-5348-B889-0298E2ABD9CD}"/>
+                <a16:creationId xmlns:a16="http://schemas.microsoft.com/office/drawing/2014/main" id="{7A97FEFA-11FB-F4CE-A9F3-9D63BDF5BBA2}"/>
               </a:ext>
             </a:extLst>
           </p:cNvPr>
@@ -10280,7 +10302,7 @@
           <p:cNvPr id="6" name="TextBox 5">
             <a:extLst>
               <a:ext uri="{FF2B5EF4-FFF2-40B4-BE49-F238E27FC236}">
-                <a16:creationId xmlns:a16="http://schemas.microsoft.com/office/drawing/2014/main" id="{1D9863D0-EE49-3102-3B15-9555346D8C99}"/>
+                <a16:creationId xmlns:a16="http://schemas.microsoft.com/office/drawing/2014/main" id="{696288FE-A13E-43B1-F76C-E4AB02078479}"/>
               </a:ext>
             </a:extLst>
           </p:cNvPr>
@@ -10320,7 +10342,7 @@
           <p:cNvPr id="7" name="Rectangle 6">
             <a:extLst>
               <a:ext uri="{FF2B5EF4-FFF2-40B4-BE49-F238E27FC236}">
-                <a16:creationId xmlns:a16="http://schemas.microsoft.com/office/drawing/2014/main" id="{19007670-D386-4918-03CA-C0F784D08D35}"/>
+                <a16:creationId xmlns:a16="http://schemas.microsoft.com/office/drawing/2014/main" id="{176CBC71-7401-F0C8-AD5F-2AC6BB51F63E}"/>
               </a:ext>
             </a:extLst>
           </p:cNvPr>
@@ -10374,7 +10396,7 @@
           <p:cNvPr id="8" name="TextBox 7">
             <a:extLst>
               <a:ext uri="{FF2B5EF4-FFF2-40B4-BE49-F238E27FC236}">
-                <a16:creationId xmlns:a16="http://schemas.microsoft.com/office/drawing/2014/main" id="{3085EBF7-3ECB-483C-0AAB-491D160D25FF}"/>
+                <a16:creationId xmlns:a16="http://schemas.microsoft.com/office/drawing/2014/main" id="{A7D5AB99-F8A3-865B-5754-894890E62A9A}"/>
               </a:ext>
             </a:extLst>
           </p:cNvPr>
@@ -10414,7 +10436,7 @@
           <p:cNvPr id="9" name="TextBox 8">
             <a:extLst>
               <a:ext uri="{FF2B5EF4-FFF2-40B4-BE49-F238E27FC236}">
-                <a16:creationId xmlns:a16="http://schemas.microsoft.com/office/drawing/2014/main" id="{5FBA75BD-B0F1-8C6D-C1D2-1F853400BC78}"/>
+                <a16:creationId xmlns:a16="http://schemas.microsoft.com/office/drawing/2014/main" id="{E32D1B20-3576-8C6F-D237-EAF17AB9F6DA}"/>
               </a:ext>
             </a:extLst>
           </p:cNvPr>
@@ -10505,7 +10527,7 @@
     </p:spTree>
     <p:extLst>
       <p:ext uri="{BB962C8B-B14F-4D97-AF65-F5344CB8AC3E}">
-        <p14:creationId xmlns:p14="http://schemas.microsoft.com/office/powerpoint/2010/main" val="4149800370"/>
+        <p14:creationId xmlns:p14="http://schemas.microsoft.com/office/powerpoint/2010/main" val="1153635436"/>
       </p:ext>
     </p:extLst>
   </p:cSld>
@@ -10537,7 +10559,7 @@
           <p:cNvPr id="2" name="Rectangle 1">
             <a:extLst>
               <a:ext uri="{FF2B5EF4-FFF2-40B4-BE49-F238E27FC236}">
-                <a16:creationId xmlns:a16="http://schemas.microsoft.com/office/drawing/2014/main" id="{BBC0E4FB-66E6-0285-6EE0-6C27E34DBB38}"/>
+                <a16:creationId xmlns:a16="http://schemas.microsoft.com/office/drawing/2014/main" id="{6EFCA012-FEA2-ED16-C5CD-321F2487575F}"/>
               </a:ext>
             </a:extLst>
           </p:cNvPr>
@@ -10605,7 +10627,7 @@
           <p:cNvPr id="3" name="Rectangle 2">
             <a:extLst>
               <a:ext uri="{FF2B5EF4-FFF2-40B4-BE49-F238E27FC236}">
-                <a16:creationId xmlns:a16="http://schemas.microsoft.com/office/drawing/2014/main" id="{65092774-445D-C1FC-35CA-37A7FACEC6F1}"/>
+                <a16:creationId xmlns:a16="http://schemas.microsoft.com/office/drawing/2014/main" id="{C455563C-17BE-412B-BA4A-535A17BB041D}"/>
               </a:ext>
             </a:extLst>
           </p:cNvPr>
@@ -10673,7 +10695,7 @@
           <p:cNvPr id="4" name="TextBox 3">
             <a:extLst>
               <a:ext uri="{FF2B5EF4-FFF2-40B4-BE49-F238E27FC236}">
-                <a16:creationId xmlns:a16="http://schemas.microsoft.com/office/drawing/2014/main" id="{1A7FAA3B-9AED-FF98-7545-D573451B03AF}"/>
+                <a16:creationId xmlns:a16="http://schemas.microsoft.com/office/drawing/2014/main" id="{0F34D1B4-76CE-D0B7-E07D-667F85F91083}"/>
               </a:ext>
             </a:extLst>
           </p:cNvPr>
@@ -10713,7 +10735,7 @@
           <p:cNvPr id="5" name="TextBox 4">
             <a:extLst>
               <a:ext uri="{FF2B5EF4-FFF2-40B4-BE49-F238E27FC236}">
-                <a16:creationId xmlns:a16="http://schemas.microsoft.com/office/drawing/2014/main" id="{70C92C7B-A5ED-072F-F3F2-50511B36DA6D}"/>
+                <a16:creationId xmlns:a16="http://schemas.microsoft.com/office/drawing/2014/main" id="{FC9FB190-176D-1861-DF62-9EA7455FF835}"/>
               </a:ext>
             </a:extLst>
           </p:cNvPr>
@@ -10753,7 +10775,7 @@
           <p:cNvPr id="6" name="TextBox 5">
             <a:extLst>
               <a:ext uri="{FF2B5EF4-FFF2-40B4-BE49-F238E27FC236}">
-                <a16:creationId xmlns:a16="http://schemas.microsoft.com/office/drawing/2014/main" id="{45936109-9826-518E-7BD0-A449ECB3B3DF}"/>
+                <a16:creationId xmlns:a16="http://schemas.microsoft.com/office/drawing/2014/main" id="{6EF87883-46F7-CD1E-36F9-127BFCBEEC76}"/>
               </a:ext>
             </a:extLst>
           </p:cNvPr>
@@ -10846,7 +10868,7 @@
           <p:cNvPr id="7" name="Rectangle 6">
             <a:extLst>
               <a:ext uri="{FF2B5EF4-FFF2-40B4-BE49-F238E27FC236}">
-                <a16:creationId xmlns:a16="http://schemas.microsoft.com/office/drawing/2014/main" id="{4535258E-E9D0-145F-4553-CC48F1D3F8C1}"/>
+                <a16:creationId xmlns:a16="http://schemas.microsoft.com/office/drawing/2014/main" id="{CDC3C0BA-59AC-61EF-8321-65DE3D688CEB}"/>
               </a:ext>
             </a:extLst>
           </p:cNvPr>
@@ -10900,7 +10922,7 @@
           <p:cNvPr id="8" name="TextBox 7">
             <a:extLst>
               <a:ext uri="{FF2B5EF4-FFF2-40B4-BE49-F238E27FC236}">
-                <a16:creationId xmlns:a16="http://schemas.microsoft.com/office/drawing/2014/main" id="{78EED55D-D761-F945-7452-EFABCD978DA5}"/>
+                <a16:creationId xmlns:a16="http://schemas.microsoft.com/office/drawing/2014/main" id="{C2708969-D324-96B9-3593-CCEF17A92787}"/>
               </a:ext>
             </a:extLst>
           </p:cNvPr>
@@ -10938,7 +10960,7 @@
     </p:spTree>
     <p:extLst>
       <p:ext uri="{BB962C8B-B14F-4D97-AF65-F5344CB8AC3E}">
-        <p14:creationId xmlns:p14="http://schemas.microsoft.com/office/powerpoint/2010/main" val="3308291309"/>
+        <p14:creationId xmlns:p14="http://schemas.microsoft.com/office/powerpoint/2010/main" val="3212672022"/>
       </p:ext>
     </p:extLst>
   </p:cSld>
@@ -10970,7 +10992,7 @@
           <p:cNvPr id="2" name="Rectangle 1">
             <a:extLst>
               <a:ext uri="{FF2B5EF4-FFF2-40B4-BE49-F238E27FC236}">
-                <a16:creationId xmlns:a16="http://schemas.microsoft.com/office/drawing/2014/main" id="{E6DBC3F5-08C8-784E-1E57-06E923576466}"/>
+                <a16:creationId xmlns:a16="http://schemas.microsoft.com/office/drawing/2014/main" id="{5ED14460-9B36-5A1B-EDA0-DC60A5E9D9C3}"/>
               </a:ext>
             </a:extLst>
           </p:cNvPr>
@@ -11038,7 +11060,7 @@
           <p:cNvPr id="3" name="Rectangle 2">
             <a:extLst>
               <a:ext uri="{FF2B5EF4-FFF2-40B4-BE49-F238E27FC236}">
-                <a16:creationId xmlns:a16="http://schemas.microsoft.com/office/drawing/2014/main" id="{5E2744B9-D379-0AA6-A75B-DEB583F64810}"/>
+                <a16:creationId xmlns:a16="http://schemas.microsoft.com/office/drawing/2014/main" id="{263E519C-5B48-333F-D014-BC3AB28ABC32}"/>
               </a:ext>
             </a:extLst>
           </p:cNvPr>
@@ -11106,7 +11128,7 @@
           <p:cNvPr id="4" name="TextBox 3">
             <a:extLst>
               <a:ext uri="{FF2B5EF4-FFF2-40B4-BE49-F238E27FC236}">
-                <a16:creationId xmlns:a16="http://schemas.microsoft.com/office/drawing/2014/main" id="{D89B35EB-AFA8-562E-C218-9A6A43F1D585}"/>
+                <a16:creationId xmlns:a16="http://schemas.microsoft.com/office/drawing/2014/main" id="{AFA978F6-7F98-FDEB-34EE-B1A03A14B648}"/>
               </a:ext>
             </a:extLst>
           </p:cNvPr>
@@ -11146,7 +11168,7 @@
           <p:cNvPr id="5" name="TextBox 4">
             <a:extLst>
               <a:ext uri="{FF2B5EF4-FFF2-40B4-BE49-F238E27FC236}">
-                <a16:creationId xmlns:a16="http://schemas.microsoft.com/office/drawing/2014/main" id="{0B2EB332-04FA-B7E6-9E54-DCA4509CFA59}"/>
+                <a16:creationId xmlns:a16="http://schemas.microsoft.com/office/drawing/2014/main" id="{91C88E40-5CDE-A43B-A126-AFDE759F9E2F}"/>
               </a:ext>
             </a:extLst>
           </p:cNvPr>
@@ -11186,7 +11208,7 @@
           <p:cNvPr id="6" name="TextBox 5">
             <a:extLst>
               <a:ext uri="{FF2B5EF4-FFF2-40B4-BE49-F238E27FC236}">
-                <a16:creationId xmlns:a16="http://schemas.microsoft.com/office/drawing/2014/main" id="{7B0C1AB0-B093-2C55-4B38-7634D897EAA4}"/>
+                <a16:creationId xmlns:a16="http://schemas.microsoft.com/office/drawing/2014/main" id="{A9997A72-0405-A00D-21FE-55248BAAB2AD}"/>
               </a:ext>
             </a:extLst>
           </p:cNvPr>
@@ -11279,7 +11301,7 @@
           <p:cNvPr id="7" name="Rectangle 6">
             <a:extLst>
               <a:ext uri="{FF2B5EF4-FFF2-40B4-BE49-F238E27FC236}">
-                <a16:creationId xmlns:a16="http://schemas.microsoft.com/office/drawing/2014/main" id="{DFC43547-4DD3-C028-17EC-AEE7A1D7ED61}"/>
+                <a16:creationId xmlns:a16="http://schemas.microsoft.com/office/drawing/2014/main" id="{98030660-98F8-931D-1777-D4F0F207F9F2}"/>
               </a:ext>
             </a:extLst>
           </p:cNvPr>
@@ -11333,7 +11355,7 @@
           <p:cNvPr id="8" name="TextBox 7">
             <a:extLst>
               <a:ext uri="{FF2B5EF4-FFF2-40B4-BE49-F238E27FC236}">
-                <a16:creationId xmlns:a16="http://schemas.microsoft.com/office/drawing/2014/main" id="{2E3B70DD-BA02-9490-47BB-26AFACB1FC1A}"/>
+                <a16:creationId xmlns:a16="http://schemas.microsoft.com/office/drawing/2014/main" id="{0367DF56-2176-41A3-5DF8-7AFB9F945E1C}"/>
               </a:ext>
             </a:extLst>
           </p:cNvPr>
@@ -11439,7 +11461,7 @@
           <p:cNvPr id="9" name="Rectangle 8">
             <a:extLst>
               <a:ext uri="{FF2B5EF4-FFF2-40B4-BE49-F238E27FC236}">
-                <a16:creationId xmlns:a16="http://schemas.microsoft.com/office/drawing/2014/main" id="{29FE1EC7-F03C-B0FC-CB93-C319F1008055}"/>
+                <a16:creationId xmlns:a16="http://schemas.microsoft.com/office/drawing/2014/main" id="{501833E0-4BD4-F790-8B6F-05AF57C6B30E}"/>
               </a:ext>
             </a:extLst>
           </p:cNvPr>
@@ -11493,7 +11515,7 @@
           <p:cNvPr id="10" name="TextBox 9">
             <a:extLst>
               <a:ext uri="{FF2B5EF4-FFF2-40B4-BE49-F238E27FC236}">
-                <a16:creationId xmlns:a16="http://schemas.microsoft.com/office/drawing/2014/main" id="{EA681117-4D02-9E9E-5394-AD15A4EAF401}"/>
+                <a16:creationId xmlns:a16="http://schemas.microsoft.com/office/drawing/2014/main" id="{9CB881E2-FC94-7497-CD23-B27DC455FC66}"/>
               </a:ext>
             </a:extLst>
           </p:cNvPr>
@@ -11531,7 +11553,7 @@
     </p:spTree>
     <p:extLst>
       <p:ext uri="{BB962C8B-B14F-4D97-AF65-F5344CB8AC3E}">
-        <p14:creationId xmlns:p14="http://schemas.microsoft.com/office/powerpoint/2010/main" val="2633663297"/>
+        <p14:creationId xmlns:p14="http://schemas.microsoft.com/office/powerpoint/2010/main" val="2466346124"/>
       </p:ext>
     </p:extLst>
   </p:cSld>
@@ -11563,7 +11585,7 @@
           <p:cNvPr id="2" name="Rectangle 1">
             <a:extLst>
               <a:ext uri="{FF2B5EF4-FFF2-40B4-BE49-F238E27FC236}">
-                <a16:creationId xmlns:a16="http://schemas.microsoft.com/office/drawing/2014/main" id="{6A1AAB13-8170-B2DE-7B89-5CBC4C6CB738}"/>
+                <a16:creationId xmlns:a16="http://schemas.microsoft.com/office/drawing/2014/main" id="{E78790A4-3601-4324-4B46-118169E1B84D}"/>
               </a:ext>
             </a:extLst>
           </p:cNvPr>
@@ -11631,7 +11653,7 @@
           <p:cNvPr id="3" name="Rectangle 2">
             <a:extLst>
               <a:ext uri="{FF2B5EF4-FFF2-40B4-BE49-F238E27FC236}">
-                <a16:creationId xmlns:a16="http://schemas.microsoft.com/office/drawing/2014/main" id="{7E0C953E-4308-8654-69C3-6E32A353AB11}"/>
+                <a16:creationId xmlns:a16="http://schemas.microsoft.com/office/drawing/2014/main" id="{6C3CB48E-F71F-3E29-515D-4952A0EFACB7}"/>
               </a:ext>
             </a:extLst>
           </p:cNvPr>
@@ -11699,7 +11721,7 @@
           <p:cNvPr id="4" name="TextBox 3">
             <a:extLst>
               <a:ext uri="{FF2B5EF4-FFF2-40B4-BE49-F238E27FC236}">
-                <a16:creationId xmlns:a16="http://schemas.microsoft.com/office/drawing/2014/main" id="{BA49DAF6-9C0A-CF0B-72C0-546B977F0A55}"/>
+                <a16:creationId xmlns:a16="http://schemas.microsoft.com/office/drawing/2014/main" id="{E9197DA6-3EB4-0C8A-DFC0-07A387FC2499}"/>
               </a:ext>
             </a:extLst>
           </p:cNvPr>
@@ -11739,7 +11761,7 @@
           <p:cNvPr id="5" name="TextBox 4">
             <a:extLst>
               <a:ext uri="{FF2B5EF4-FFF2-40B4-BE49-F238E27FC236}">
-                <a16:creationId xmlns:a16="http://schemas.microsoft.com/office/drawing/2014/main" id="{A80D8701-E0AA-4B99-D510-38B718054DA0}"/>
+                <a16:creationId xmlns:a16="http://schemas.microsoft.com/office/drawing/2014/main" id="{6F913F9F-BE18-1618-0BE5-AA4EE786B763}"/>
               </a:ext>
             </a:extLst>
           </p:cNvPr>
@@ -11779,7 +11801,7 @@
           <p:cNvPr id="6" name="TextBox 5">
             <a:extLst>
               <a:ext uri="{FF2B5EF4-FFF2-40B4-BE49-F238E27FC236}">
-                <a16:creationId xmlns:a16="http://schemas.microsoft.com/office/drawing/2014/main" id="{E8A76D10-7BD1-CE71-E4A2-BAB96286C861}"/>
+                <a16:creationId xmlns:a16="http://schemas.microsoft.com/office/drawing/2014/main" id="{0286273C-73DC-3AF6-0A0B-F0ABBDEE2A00}"/>
               </a:ext>
             </a:extLst>
           </p:cNvPr>
@@ -11819,7 +11841,7 @@
           <p:cNvPr id="7" name="Rectangle 6">
             <a:extLst>
               <a:ext uri="{FF2B5EF4-FFF2-40B4-BE49-F238E27FC236}">
-                <a16:creationId xmlns:a16="http://schemas.microsoft.com/office/drawing/2014/main" id="{835580FB-5B02-7CAC-FB05-9D7D9754AFC9}"/>
+                <a16:creationId xmlns:a16="http://schemas.microsoft.com/office/drawing/2014/main" id="{CC1EAEBA-3DC3-C904-3CC9-BCFD3A0C4C6D}"/>
               </a:ext>
             </a:extLst>
           </p:cNvPr>
@@ -11873,7 +11895,7 @@
           <p:cNvPr id="8" name="TextBox 7">
             <a:extLst>
               <a:ext uri="{FF2B5EF4-FFF2-40B4-BE49-F238E27FC236}">
-                <a16:creationId xmlns:a16="http://schemas.microsoft.com/office/drawing/2014/main" id="{952AF2E6-45D8-B996-7C49-06C0EE8F482C}"/>
+                <a16:creationId xmlns:a16="http://schemas.microsoft.com/office/drawing/2014/main" id="{9E73DC8D-9A5C-3DBD-B6DC-091977055781}"/>
               </a:ext>
             </a:extLst>
           </p:cNvPr>
@@ -11913,7 +11935,7 @@
           <p:cNvPr id="9" name="TextBox 8">
             <a:extLst>
               <a:ext uri="{FF2B5EF4-FFF2-40B4-BE49-F238E27FC236}">
-                <a16:creationId xmlns:a16="http://schemas.microsoft.com/office/drawing/2014/main" id="{3E861E5A-1B0A-7D42-5498-ABCDD68D565E}"/>
+                <a16:creationId xmlns:a16="http://schemas.microsoft.com/office/drawing/2014/main" id="{D603013E-0FD5-E68A-B4B8-2D3AD660259B}"/>
               </a:ext>
             </a:extLst>
           </p:cNvPr>
@@ -12004,7 +12026,7 @@
     </p:spTree>
     <p:extLst>
       <p:ext uri="{BB962C8B-B14F-4D97-AF65-F5344CB8AC3E}">
-        <p14:creationId xmlns:p14="http://schemas.microsoft.com/office/powerpoint/2010/main" val="2142210830"/>
+        <p14:creationId xmlns:p14="http://schemas.microsoft.com/office/powerpoint/2010/main" val="166563313"/>
       </p:ext>
     </p:extLst>
   </p:cSld>
@@ -12036,7 +12058,7 @@
           <p:cNvPr id="2" name="Rectangle 1">
             <a:extLst>
               <a:ext uri="{FF2B5EF4-FFF2-40B4-BE49-F238E27FC236}">
-                <a16:creationId xmlns:a16="http://schemas.microsoft.com/office/drawing/2014/main" id="{78010937-367D-2D3F-790A-4739414F8064}"/>
+                <a16:creationId xmlns:a16="http://schemas.microsoft.com/office/drawing/2014/main" id="{2CBA9D92-41B9-6134-E903-C6F41B82893F}"/>
               </a:ext>
             </a:extLst>
           </p:cNvPr>
@@ -12104,7 +12126,7 @@
           <p:cNvPr id="3" name="Rectangle 2">
             <a:extLst>
               <a:ext uri="{FF2B5EF4-FFF2-40B4-BE49-F238E27FC236}">
-                <a16:creationId xmlns:a16="http://schemas.microsoft.com/office/drawing/2014/main" id="{BD7E49CC-4CBF-9A0F-E7BA-31EBD0FC2CFA}"/>
+                <a16:creationId xmlns:a16="http://schemas.microsoft.com/office/drawing/2014/main" id="{E3352396-F785-4B05-6922-7224D37A9170}"/>
               </a:ext>
             </a:extLst>
           </p:cNvPr>
@@ -12172,7 +12194,7 @@
           <p:cNvPr id="4" name="TextBox 3">
             <a:extLst>
               <a:ext uri="{FF2B5EF4-FFF2-40B4-BE49-F238E27FC236}">
-                <a16:creationId xmlns:a16="http://schemas.microsoft.com/office/drawing/2014/main" id="{3B9795F4-9DF1-4C96-B852-3225B6B887D8}"/>
+                <a16:creationId xmlns:a16="http://schemas.microsoft.com/office/drawing/2014/main" id="{D88C681C-6C3C-190C-AE74-49F9EF9339BE}"/>
               </a:ext>
             </a:extLst>
           </p:cNvPr>
@@ -12212,7 +12234,7 @@
           <p:cNvPr id="5" name="TextBox 4">
             <a:extLst>
               <a:ext uri="{FF2B5EF4-FFF2-40B4-BE49-F238E27FC236}">
-                <a16:creationId xmlns:a16="http://schemas.microsoft.com/office/drawing/2014/main" id="{EC1F1BC5-466B-E4FE-8C00-40BA4276D71A}"/>
+                <a16:creationId xmlns:a16="http://schemas.microsoft.com/office/drawing/2014/main" id="{A0D890F8-42C4-0C69-7574-2B6010F23D3B}"/>
               </a:ext>
             </a:extLst>
           </p:cNvPr>
@@ -12252,7 +12274,7 @@
           <p:cNvPr id="6" name="TextBox 5">
             <a:extLst>
               <a:ext uri="{FF2B5EF4-FFF2-40B4-BE49-F238E27FC236}">
-                <a16:creationId xmlns:a16="http://schemas.microsoft.com/office/drawing/2014/main" id="{470011FC-32D2-1AD7-932E-D37A37C8FDA0}"/>
+                <a16:creationId xmlns:a16="http://schemas.microsoft.com/office/drawing/2014/main" id="{89660747-5EAD-A269-5506-2A88B92FF72A}"/>
               </a:ext>
             </a:extLst>
           </p:cNvPr>
@@ -12345,7 +12367,7 @@
           <p:cNvPr id="7" name="Rectangle 6">
             <a:extLst>
               <a:ext uri="{FF2B5EF4-FFF2-40B4-BE49-F238E27FC236}">
-                <a16:creationId xmlns:a16="http://schemas.microsoft.com/office/drawing/2014/main" id="{22C9DCCE-B9A8-5217-2E9F-A02A461FD2CB}"/>
+                <a16:creationId xmlns:a16="http://schemas.microsoft.com/office/drawing/2014/main" id="{4273EC09-EB61-260B-ECAF-CA5D4A5A5CA0}"/>
               </a:ext>
             </a:extLst>
           </p:cNvPr>
@@ -12399,7 +12421,7 @@
           <p:cNvPr id="8" name="TextBox 7">
             <a:extLst>
               <a:ext uri="{FF2B5EF4-FFF2-40B4-BE49-F238E27FC236}">
-                <a16:creationId xmlns:a16="http://schemas.microsoft.com/office/drawing/2014/main" id="{B10F3F4F-B23F-5618-51F0-620597E74231}"/>
+                <a16:creationId xmlns:a16="http://schemas.microsoft.com/office/drawing/2014/main" id="{8C147A14-1521-DBE8-C714-701C1016A08D}"/>
               </a:ext>
             </a:extLst>
           </p:cNvPr>
@@ -12437,7 +12459,7 @@
     </p:spTree>
     <p:extLst>
       <p:ext uri="{BB962C8B-B14F-4D97-AF65-F5344CB8AC3E}">
-        <p14:creationId xmlns:p14="http://schemas.microsoft.com/office/powerpoint/2010/main" val="1389995420"/>
+        <p14:creationId xmlns:p14="http://schemas.microsoft.com/office/powerpoint/2010/main" val="4038090725"/>
       </p:ext>
     </p:extLst>
   </p:cSld>
@@ -12469,7 +12491,7 @@
           <p:cNvPr id="2" name="Rectangle 1">
             <a:extLst>
               <a:ext uri="{FF2B5EF4-FFF2-40B4-BE49-F238E27FC236}">
-                <a16:creationId xmlns:a16="http://schemas.microsoft.com/office/drawing/2014/main" id="{D1EAB1DB-D222-DDA5-D8CB-3FFBBB32C5C0}"/>
+                <a16:creationId xmlns:a16="http://schemas.microsoft.com/office/drawing/2014/main" id="{43AA6870-7001-77C5-28E1-0D266EDAA1FC}"/>
               </a:ext>
             </a:extLst>
           </p:cNvPr>
@@ -12537,7 +12559,7 @@
           <p:cNvPr id="3" name="Rectangle 2">
             <a:extLst>
               <a:ext uri="{FF2B5EF4-FFF2-40B4-BE49-F238E27FC236}">
-                <a16:creationId xmlns:a16="http://schemas.microsoft.com/office/drawing/2014/main" id="{3E2E7D88-74FE-435F-75EF-28772651C4EF}"/>
+                <a16:creationId xmlns:a16="http://schemas.microsoft.com/office/drawing/2014/main" id="{4D099345-B531-66F3-C339-FA04FB84BB5D}"/>
               </a:ext>
             </a:extLst>
           </p:cNvPr>
@@ -12605,7 +12627,7 @@
           <p:cNvPr id="4" name="TextBox 3">
             <a:extLst>
               <a:ext uri="{FF2B5EF4-FFF2-40B4-BE49-F238E27FC236}">
-                <a16:creationId xmlns:a16="http://schemas.microsoft.com/office/drawing/2014/main" id="{BA5EE3FD-825B-03CF-850E-85898A0E6B82}"/>
+                <a16:creationId xmlns:a16="http://schemas.microsoft.com/office/drawing/2014/main" id="{1288B37F-28DF-5738-AA41-A3288D8E67E3}"/>
               </a:ext>
             </a:extLst>
           </p:cNvPr>
@@ -12645,7 +12667,7 @@
           <p:cNvPr id="5" name="TextBox 4">
             <a:extLst>
               <a:ext uri="{FF2B5EF4-FFF2-40B4-BE49-F238E27FC236}">
-                <a16:creationId xmlns:a16="http://schemas.microsoft.com/office/drawing/2014/main" id="{3FCE0FF6-35A7-83A6-45EC-F5AC49C15407}"/>
+                <a16:creationId xmlns:a16="http://schemas.microsoft.com/office/drawing/2014/main" id="{1B5CF339-A353-9C68-6CA8-01D3E8837C78}"/>
               </a:ext>
             </a:extLst>
           </p:cNvPr>
@@ -12685,7 +12707,7 @@
           <p:cNvPr id="6" name="TextBox 5">
             <a:extLst>
               <a:ext uri="{FF2B5EF4-FFF2-40B4-BE49-F238E27FC236}">
-                <a16:creationId xmlns:a16="http://schemas.microsoft.com/office/drawing/2014/main" id="{E2E56F0C-F97B-CC74-27FB-2D24B10CC720}"/>
+                <a16:creationId xmlns:a16="http://schemas.microsoft.com/office/drawing/2014/main" id="{204D7700-70D8-B4F4-3866-B6579F8E2833}"/>
               </a:ext>
             </a:extLst>
           </p:cNvPr>
@@ -12778,7 +12800,7 @@
           <p:cNvPr id="7" name="Rectangle 6">
             <a:extLst>
               <a:ext uri="{FF2B5EF4-FFF2-40B4-BE49-F238E27FC236}">
-                <a16:creationId xmlns:a16="http://schemas.microsoft.com/office/drawing/2014/main" id="{26B8A453-B4A8-AEBD-F7AE-077CF887C67B}"/>
+                <a16:creationId xmlns:a16="http://schemas.microsoft.com/office/drawing/2014/main" id="{83CC82E2-6034-FC25-D3E9-B4B254CC3193}"/>
               </a:ext>
             </a:extLst>
           </p:cNvPr>
@@ -12832,7 +12854,7 @@
           <p:cNvPr id="8" name="TextBox 7">
             <a:extLst>
               <a:ext uri="{FF2B5EF4-FFF2-40B4-BE49-F238E27FC236}">
-                <a16:creationId xmlns:a16="http://schemas.microsoft.com/office/drawing/2014/main" id="{0CD3C872-6828-7D33-CD27-F6466C12AADD}"/>
+                <a16:creationId xmlns:a16="http://schemas.microsoft.com/office/drawing/2014/main" id="{D34F12FE-30FA-75FA-4F82-551552434252}"/>
               </a:ext>
             </a:extLst>
           </p:cNvPr>
@@ -12927,7 +12949,7 @@
           <p:cNvPr id="9" name="Rectangle 8">
             <a:extLst>
               <a:ext uri="{FF2B5EF4-FFF2-40B4-BE49-F238E27FC236}">
-                <a16:creationId xmlns:a16="http://schemas.microsoft.com/office/drawing/2014/main" id="{8EE4FA30-5F03-505C-4DBC-3DD54CE86870}"/>
+                <a16:creationId xmlns:a16="http://schemas.microsoft.com/office/drawing/2014/main" id="{DB2D2D01-05D8-FD19-FAAC-2DC7B1030720}"/>
               </a:ext>
             </a:extLst>
           </p:cNvPr>
@@ -12981,7 +13003,7 @@
           <p:cNvPr id="10" name="TextBox 9">
             <a:extLst>
               <a:ext uri="{FF2B5EF4-FFF2-40B4-BE49-F238E27FC236}">
-                <a16:creationId xmlns:a16="http://schemas.microsoft.com/office/drawing/2014/main" id="{2ECD28F4-6E32-9368-05D8-8B48116AEAF9}"/>
+                <a16:creationId xmlns:a16="http://schemas.microsoft.com/office/drawing/2014/main" id="{A3F4A2B2-705C-4F9F-DEA9-FB92852C0CF5}"/>
               </a:ext>
             </a:extLst>
           </p:cNvPr>
@@ -13019,7 +13041,7 @@
     </p:spTree>
     <p:extLst>
       <p:ext uri="{BB962C8B-B14F-4D97-AF65-F5344CB8AC3E}">
-        <p14:creationId xmlns:p14="http://schemas.microsoft.com/office/powerpoint/2010/main" val="978733001"/>
+        <p14:creationId xmlns:p14="http://schemas.microsoft.com/office/powerpoint/2010/main" val="1962988412"/>
       </p:ext>
     </p:extLst>
   </p:cSld>
@@ -13051,7 +13073,7 @@
           <p:cNvPr id="2" name="Rectangle 1">
             <a:extLst>
               <a:ext uri="{FF2B5EF4-FFF2-40B4-BE49-F238E27FC236}">
-                <a16:creationId xmlns:a16="http://schemas.microsoft.com/office/drawing/2014/main" id="{9E1C7FFB-B124-2A3E-1889-C187B4E99869}"/>
+                <a16:creationId xmlns:a16="http://schemas.microsoft.com/office/drawing/2014/main" id="{55CF8ECD-CFCF-296D-DB26-566FCBD19B45}"/>
               </a:ext>
             </a:extLst>
           </p:cNvPr>
@@ -13119,7 +13141,7 @@
           <p:cNvPr id="3" name="Rectangle 2">
             <a:extLst>
               <a:ext uri="{FF2B5EF4-FFF2-40B4-BE49-F238E27FC236}">
-                <a16:creationId xmlns:a16="http://schemas.microsoft.com/office/drawing/2014/main" id="{841BF3B8-F468-96AF-9579-55732F4D6E98}"/>
+                <a16:creationId xmlns:a16="http://schemas.microsoft.com/office/drawing/2014/main" id="{1AFCEEF7-B20F-A2CA-E25B-3366B2B4AB69}"/>
               </a:ext>
             </a:extLst>
           </p:cNvPr>
@@ -13187,7 +13209,7 @@
           <p:cNvPr id="4" name="TextBox 3">
             <a:extLst>
               <a:ext uri="{FF2B5EF4-FFF2-40B4-BE49-F238E27FC236}">
-                <a16:creationId xmlns:a16="http://schemas.microsoft.com/office/drawing/2014/main" id="{49B434C7-ACAE-A1E8-66E8-3A1A77EA6041}"/>
+                <a16:creationId xmlns:a16="http://schemas.microsoft.com/office/drawing/2014/main" id="{9BF0CD2D-AA49-C84E-3C65-3B3D6CB1F4EC}"/>
               </a:ext>
             </a:extLst>
           </p:cNvPr>
@@ -13227,7 +13249,7 @@
           <p:cNvPr id="5" name="TextBox 4">
             <a:extLst>
               <a:ext uri="{FF2B5EF4-FFF2-40B4-BE49-F238E27FC236}">
-                <a16:creationId xmlns:a16="http://schemas.microsoft.com/office/drawing/2014/main" id="{9CDFD4BB-A3D9-78F3-00E5-2F5CA4C284F6}"/>
+                <a16:creationId xmlns:a16="http://schemas.microsoft.com/office/drawing/2014/main" id="{8DAFF7A6-C0B7-D971-8FD4-5943E93259AE}"/>
               </a:ext>
             </a:extLst>
           </p:cNvPr>
@@ -13267,7 +13289,7 @@
           <p:cNvPr id="6" name="TextBox 5">
             <a:extLst>
               <a:ext uri="{FF2B5EF4-FFF2-40B4-BE49-F238E27FC236}">
-                <a16:creationId xmlns:a16="http://schemas.microsoft.com/office/drawing/2014/main" id="{9A60372B-10CA-5DCC-8258-F03D8FF3BB04}"/>
+                <a16:creationId xmlns:a16="http://schemas.microsoft.com/office/drawing/2014/main" id="{9E70AC12-8418-611E-7717-0804C4F47365}"/>
               </a:ext>
             </a:extLst>
           </p:cNvPr>
@@ -13307,7 +13329,7 @@
           <p:cNvPr id="7" name="Rectangle 6">
             <a:extLst>
               <a:ext uri="{FF2B5EF4-FFF2-40B4-BE49-F238E27FC236}">
-                <a16:creationId xmlns:a16="http://schemas.microsoft.com/office/drawing/2014/main" id="{07ABEF0D-370B-F031-73E5-3F4009AD6B7A}"/>
+                <a16:creationId xmlns:a16="http://schemas.microsoft.com/office/drawing/2014/main" id="{20093080-41BD-2A65-37E5-A300A75C4519}"/>
               </a:ext>
             </a:extLst>
           </p:cNvPr>
@@ -13361,7 +13383,7 @@
           <p:cNvPr id="8" name="TextBox 7">
             <a:extLst>
               <a:ext uri="{FF2B5EF4-FFF2-40B4-BE49-F238E27FC236}">
-                <a16:creationId xmlns:a16="http://schemas.microsoft.com/office/drawing/2014/main" id="{2F66F05E-3401-7B0B-D97A-5BE38A791F68}"/>
+                <a16:creationId xmlns:a16="http://schemas.microsoft.com/office/drawing/2014/main" id="{B84138F9-57BA-7113-A5CA-0863040C1315}"/>
               </a:ext>
             </a:extLst>
           </p:cNvPr>
@@ -13401,7 +13423,7 @@
           <p:cNvPr id="9" name="TextBox 8">
             <a:extLst>
               <a:ext uri="{FF2B5EF4-FFF2-40B4-BE49-F238E27FC236}">
-                <a16:creationId xmlns:a16="http://schemas.microsoft.com/office/drawing/2014/main" id="{0C96BDBA-D5A1-853C-45A5-C6149EB13815}"/>
+                <a16:creationId xmlns:a16="http://schemas.microsoft.com/office/drawing/2014/main" id="{7B2226E1-D2B4-017E-2238-07BD7BE0A08E}"/>
               </a:ext>
             </a:extLst>
           </p:cNvPr>
@@ -13492,7 +13514,7 @@
     </p:spTree>
     <p:extLst>
       <p:ext uri="{BB962C8B-B14F-4D97-AF65-F5344CB8AC3E}">
-        <p14:creationId xmlns:p14="http://schemas.microsoft.com/office/powerpoint/2010/main" val="1255479529"/>
+        <p14:creationId xmlns:p14="http://schemas.microsoft.com/office/powerpoint/2010/main" val="3169383378"/>
       </p:ext>
     </p:extLst>
   </p:cSld>
@@ -13524,7 +13546,7 @@
           <p:cNvPr id="2" name="Rectangle 1">
             <a:extLst>
               <a:ext uri="{FF2B5EF4-FFF2-40B4-BE49-F238E27FC236}">
-                <a16:creationId xmlns:a16="http://schemas.microsoft.com/office/drawing/2014/main" id="{B65779FE-0274-723F-C539-19E26B21A627}"/>
+                <a16:creationId xmlns:a16="http://schemas.microsoft.com/office/drawing/2014/main" id="{CB718C96-301C-D4CE-7CA9-EBE581692936}"/>
               </a:ext>
             </a:extLst>
           </p:cNvPr>
@@ -13592,7 +13614,7 @@
           <p:cNvPr id="3" name="Rectangle 2">
             <a:extLst>
               <a:ext uri="{FF2B5EF4-FFF2-40B4-BE49-F238E27FC236}">
-                <a16:creationId xmlns:a16="http://schemas.microsoft.com/office/drawing/2014/main" id="{D9E4F19F-B771-4A1C-8EFF-A6FCAC60C94C}"/>
+                <a16:creationId xmlns:a16="http://schemas.microsoft.com/office/drawing/2014/main" id="{245FCD2E-E3C0-9C20-5E3C-B5E5AF9A0F1E}"/>
               </a:ext>
             </a:extLst>
           </p:cNvPr>
@@ -13660,7 +13682,7 @@
           <p:cNvPr id="4" name="TextBox 3">
             <a:extLst>
               <a:ext uri="{FF2B5EF4-FFF2-40B4-BE49-F238E27FC236}">
-                <a16:creationId xmlns:a16="http://schemas.microsoft.com/office/drawing/2014/main" id="{4B5F549E-4BF7-64E7-5CB5-05023F6365AF}"/>
+                <a16:creationId xmlns:a16="http://schemas.microsoft.com/office/drawing/2014/main" id="{4E124198-4C04-8A17-5AAA-712C614DD38F}"/>
               </a:ext>
             </a:extLst>
           </p:cNvPr>
@@ -13700,7 +13722,7 @@
           <p:cNvPr id="5" name="TextBox 4">
             <a:extLst>
               <a:ext uri="{FF2B5EF4-FFF2-40B4-BE49-F238E27FC236}">
-                <a16:creationId xmlns:a16="http://schemas.microsoft.com/office/drawing/2014/main" id="{7F90513C-E4F5-E517-CF1A-34BBB7F5A72E}"/>
+                <a16:creationId xmlns:a16="http://schemas.microsoft.com/office/drawing/2014/main" id="{D7161A7A-60F8-1C3C-2D70-77F640958C54}"/>
               </a:ext>
             </a:extLst>
           </p:cNvPr>
@@ -13740,7 +13762,7 @@
           <p:cNvPr id="6" name="TextBox 5">
             <a:extLst>
               <a:ext uri="{FF2B5EF4-FFF2-40B4-BE49-F238E27FC236}">
-                <a16:creationId xmlns:a16="http://schemas.microsoft.com/office/drawing/2014/main" id="{A946D53D-9F32-1187-8126-2BC57A609DFD}"/>
+                <a16:creationId xmlns:a16="http://schemas.microsoft.com/office/drawing/2014/main" id="{BDC28D23-7E49-B04B-0D4C-091BB703BC6F}"/>
               </a:ext>
             </a:extLst>
           </p:cNvPr>
@@ -13833,7 +13855,7 @@
           <p:cNvPr id="7" name="Rectangle 6">
             <a:extLst>
               <a:ext uri="{FF2B5EF4-FFF2-40B4-BE49-F238E27FC236}">
-                <a16:creationId xmlns:a16="http://schemas.microsoft.com/office/drawing/2014/main" id="{EE91D1EA-B588-C0E1-8C6A-FF8406070979}"/>
+                <a16:creationId xmlns:a16="http://schemas.microsoft.com/office/drawing/2014/main" id="{A2FCC857-26B2-E887-29A6-D7DB495461E4}"/>
               </a:ext>
             </a:extLst>
           </p:cNvPr>
@@ -13887,7 +13909,7 @@
           <p:cNvPr id="8" name="TextBox 7">
             <a:extLst>
               <a:ext uri="{FF2B5EF4-FFF2-40B4-BE49-F238E27FC236}">
-                <a16:creationId xmlns:a16="http://schemas.microsoft.com/office/drawing/2014/main" id="{227782E0-1542-AEBB-6986-ADE6A6116596}"/>
+                <a16:creationId xmlns:a16="http://schemas.microsoft.com/office/drawing/2014/main" id="{377E70A1-8D0B-332A-2035-AF83498B275B}"/>
               </a:ext>
             </a:extLst>
           </p:cNvPr>
@@ -13925,7 +13947,7 @@
     </p:spTree>
     <p:extLst>
       <p:ext uri="{BB962C8B-B14F-4D97-AF65-F5344CB8AC3E}">
-        <p14:creationId xmlns:p14="http://schemas.microsoft.com/office/powerpoint/2010/main" val="371879201"/>
+        <p14:creationId xmlns:p14="http://schemas.microsoft.com/office/powerpoint/2010/main" val="1158864070"/>
       </p:ext>
     </p:extLst>
   </p:cSld>
@@ -13957,7 +13979,7 @@
           <p:cNvPr id="2" name="Rectangle 1">
             <a:extLst>
               <a:ext uri="{FF2B5EF4-FFF2-40B4-BE49-F238E27FC236}">
-                <a16:creationId xmlns:a16="http://schemas.microsoft.com/office/drawing/2014/main" id="{84D2581C-9C33-7393-78E6-45B2D8B844B4}"/>
+                <a16:creationId xmlns:a16="http://schemas.microsoft.com/office/drawing/2014/main" id="{5E92AAEF-B3BA-1E7D-B59E-79B0D0DB8FC6}"/>
               </a:ext>
             </a:extLst>
           </p:cNvPr>
@@ -14025,7 +14047,7 @@
           <p:cNvPr id="3" name="Rectangle 2">
             <a:extLst>
               <a:ext uri="{FF2B5EF4-FFF2-40B4-BE49-F238E27FC236}">
-                <a16:creationId xmlns:a16="http://schemas.microsoft.com/office/drawing/2014/main" id="{80E0F34D-5B14-2739-A675-E8F1A537CAC5}"/>
+                <a16:creationId xmlns:a16="http://schemas.microsoft.com/office/drawing/2014/main" id="{71683A4F-C83C-BA92-94A0-CB02B50C09A9}"/>
               </a:ext>
             </a:extLst>
           </p:cNvPr>
@@ -14093,7 +14115,7 @@
           <p:cNvPr id="4" name="TextBox 3">
             <a:extLst>
               <a:ext uri="{FF2B5EF4-FFF2-40B4-BE49-F238E27FC236}">
-                <a16:creationId xmlns:a16="http://schemas.microsoft.com/office/drawing/2014/main" id="{7209A352-FEF9-BA88-CFDD-3A0C03F76CC5}"/>
+                <a16:creationId xmlns:a16="http://schemas.microsoft.com/office/drawing/2014/main" id="{5B90120E-93BD-32D1-4614-03DAB8158014}"/>
               </a:ext>
             </a:extLst>
           </p:cNvPr>
@@ -14133,7 +14155,7 @@
           <p:cNvPr id="5" name="TextBox 4">
             <a:extLst>
               <a:ext uri="{FF2B5EF4-FFF2-40B4-BE49-F238E27FC236}">
-                <a16:creationId xmlns:a16="http://schemas.microsoft.com/office/drawing/2014/main" id="{D8C48D42-664C-6E74-986C-F90F3F7AFE6A}"/>
+                <a16:creationId xmlns:a16="http://schemas.microsoft.com/office/drawing/2014/main" id="{4053A250-2C07-1EAB-7B9C-7F3CF1374827}"/>
               </a:ext>
             </a:extLst>
           </p:cNvPr>
@@ -14173,7 +14195,7 @@
           <p:cNvPr id="6" name="TextBox 5">
             <a:extLst>
               <a:ext uri="{FF2B5EF4-FFF2-40B4-BE49-F238E27FC236}">
-                <a16:creationId xmlns:a16="http://schemas.microsoft.com/office/drawing/2014/main" id="{06441EAD-AC99-71C2-4BA3-363D3C5A9C87}"/>
+                <a16:creationId xmlns:a16="http://schemas.microsoft.com/office/drawing/2014/main" id="{C5DF22C8-779F-776E-D725-873A90D59C97}"/>
               </a:ext>
             </a:extLst>
           </p:cNvPr>
@@ -14266,7 +14288,7 @@
           <p:cNvPr id="7" name="Rectangle 6">
             <a:extLst>
               <a:ext uri="{FF2B5EF4-FFF2-40B4-BE49-F238E27FC236}">
-                <a16:creationId xmlns:a16="http://schemas.microsoft.com/office/drawing/2014/main" id="{E4691258-AB88-8C24-D889-6E050FF69910}"/>
+                <a16:creationId xmlns:a16="http://schemas.microsoft.com/office/drawing/2014/main" id="{25F6018A-09A4-3EF5-036D-05CC0568C19B}"/>
               </a:ext>
             </a:extLst>
           </p:cNvPr>
@@ -14320,7 +14342,7 @@
           <p:cNvPr id="8" name="TextBox 7">
             <a:extLst>
               <a:ext uri="{FF2B5EF4-FFF2-40B4-BE49-F238E27FC236}">
-                <a16:creationId xmlns:a16="http://schemas.microsoft.com/office/drawing/2014/main" id="{43A6ADB3-9CAD-B9F3-5210-F160F42BFA96}"/>
+                <a16:creationId xmlns:a16="http://schemas.microsoft.com/office/drawing/2014/main" id="{CAFF07FD-1CD1-B805-6BE9-A7D74A325352}"/>
               </a:ext>
             </a:extLst>
           </p:cNvPr>
@@ -14415,7 +14437,7 @@
           <p:cNvPr id="9" name="Rectangle 8">
             <a:extLst>
               <a:ext uri="{FF2B5EF4-FFF2-40B4-BE49-F238E27FC236}">
-                <a16:creationId xmlns:a16="http://schemas.microsoft.com/office/drawing/2014/main" id="{18A5BF28-9C01-F565-3D1A-779E36162735}"/>
+                <a16:creationId xmlns:a16="http://schemas.microsoft.com/office/drawing/2014/main" id="{0B3BC945-7FFA-84DA-4F31-A8D0248B95F9}"/>
               </a:ext>
             </a:extLst>
           </p:cNvPr>
@@ -14469,7 +14491,7 @@
           <p:cNvPr id="10" name="TextBox 9">
             <a:extLst>
               <a:ext uri="{FF2B5EF4-FFF2-40B4-BE49-F238E27FC236}">
-                <a16:creationId xmlns:a16="http://schemas.microsoft.com/office/drawing/2014/main" id="{60A7DF7F-C5F2-BD26-AA8E-2B514FB120DB}"/>
+                <a16:creationId xmlns:a16="http://schemas.microsoft.com/office/drawing/2014/main" id="{70AF9396-DBE4-786C-6B86-C57005C45C6B}"/>
               </a:ext>
             </a:extLst>
           </p:cNvPr>
@@ -14507,7 +14529,7 @@
     </p:spTree>
     <p:extLst>
       <p:ext uri="{BB962C8B-B14F-4D97-AF65-F5344CB8AC3E}">
-        <p14:creationId xmlns:p14="http://schemas.microsoft.com/office/powerpoint/2010/main" val="3426516069"/>
+        <p14:creationId xmlns:p14="http://schemas.microsoft.com/office/powerpoint/2010/main" val="650181063"/>
       </p:ext>
     </p:extLst>
   </p:cSld>
@@ -14539,7 +14561,7 @@
           <p:cNvPr id="2" name="Rectangle 1">
             <a:extLst>
               <a:ext uri="{FF2B5EF4-FFF2-40B4-BE49-F238E27FC236}">
-                <a16:creationId xmlns:a16="http://schemas.microsoft.com/office/drawing/2014/main" id="{59E2BD58-BC3B-C0EF-195D-F9BBD239B81F}"/>
+                <a16:creationId xmlns:a16="http://schemas.microsoft.com/office/drawing/2014/main" id="{E893FBFC-4965-484D-EF7C-F7998863D137}"/>
               </a:ext>
             </a:extLst>
           </p:cNvPr>
@@ -14607,7 +14629,7 @@
           <p:cNvPr id="3" name="Rectangle 2">
             <a:extLst>
               <a:ext uri="{FF2B5EF4-FFF2-40B4-BE49-F238E27FC236}">
-                <a16:creationId xmlns:a16="http://schemas.microsoft.com/office/drawing/2014/main" id="{8D0E1707-EA31-B232-0FF5-73E701195774}"/>
+                <a16:creationId xmlns:a16="http://schemas.microsoft.com/office/drawing/2014/main" id="{153479FD-3E57-CF66-1236-AE89C1FD283D}"/>
               </a:ext>
             </a:extLst>
           </p:cNvPr>
@@ -14675,7 +14697,7 @@
           <p:cNvPr id="4" name="TextBox 3">
             <a:extLst>
               <a:ext uri="{FF2B5EF4-FFF2-40B4-BE49-F238E27FC236}">
-                <a16:creationId xmlns:a16="http://schemas.microsoft.com/office/drawing/2014/main" id="{116CA399-3875-AD06-0DD0-94D3439932F1}"/>
+                <a16:creationId xmlns:a16="http://schemas.microsoft.com/office/drawing/2014/main" id="{366A763A-7C6E-6083-7366-1DF8612C947F}"/>
               </a:ext>
             </a:extLst>
           </p:cNvPr>
@@ -14715,7 +14737,7 @@
           <p:cNvPr id="5" name="TextBox 4">
             <a:extLst>
               <a:ext uri="{FF2B5EF4-FFF2-40B4-BE49-F238E27FC236}">
-                <a16:creationId xmlns:a16="http://schemas.microsoft.com/office/drawing/2014/main" id="{7CE772A9-63AA-35FA-3E22-6795745C570E}"/>
+                <a16:creationId xmlns:a16="http://schemas.microsoft.com/office/drawing/2014/main" id="{335C9A11-EAA1-D973-B8F3-529FC7BE5206}"/>
               </a:ext>
             </a:extLst>
           </p:cNvPr>
@@ -14755,7 +14777,7 @@
           <p:cNvPr id="6" name="TextBox 5">
             <a:extLst>
               <a:ext uri="{FF2B5EF4-FFF2-40B4-BE49-F238E27FC236}">
-                <a16:creationId xmlns:a16="http://schemas.microsoft.com/office/drawing/2014/main" id="{B49E0460-E19E-D155-5804-7FE5C3B43A59}"/>
+                <a16:creationId xmlns:a16="http://schemas.microsoft.com/office/drawing/2014/main" id="{C270F0BC-E738-B0F5-9177-1DF47711D552}"/>
               </a:ext>
             </a:extLst>
           </p:cNvPr>
@@ -14795,7 +14817,7 @@
           <p:cNvPr id="7" name="Rectangle 6">
             <a:extLst>
               <a:ext uri="{FF2B5EF4-FFF2-40B4-BE49-F238E27FC236}">
-                <a16:creationId xmlns:a16="http://schemas.microsoft.com/office/drawing/2014/main" id="{6F64E5E3-73DB-8ED1-74AA-889198D83971}"/>
+                <a16:creationId xmlns:a16="http://schemas.microsoft.com/office/drawing/2014/main" id="{C35B04F6-B77B-50E9-1CD2-C8B29DB4A5F5}"/>
               </a:ext>
             </a:extLst>
           </p:cNvPr>
@@ -14849,7 +14871,7 @@
           <p:cNvPr id="8" name="TextBox 7">
             <a:extLst>
               <a:ext uri="{FF2B5EF4-FFF2-40B4-BE49-F238E27FC236}">
-                <a16:creationId xmlns:a16="http://schemas.microsoft.com/office/drawing/2014/main" id="{DCFFABE9-ED41-873D-53B0-5F74402E9ED1}"/>
+                <a16:creationId xmlns:a16="http://schemas.microsoft.com/office/drawing/2014/main" id="{32CE6C92-177B-93CB-D5BC-97FA828C5BD9}"/>
               </a:ext>
             </a:extLst>
           </p:cNvPr>
@@ -14889,7 +14911,7 @@
           <p:cNvPr id="9" name="TextBox 8">
             <a:extLst>
               <a:ext uri="{FF2B5EF4-FFF2-40B4-BE49-F238E27FC236}">
-                <a16:creationId xmlns:a16="http://schemas.microsoft.com/office/drawing/2014/main" id="{6177E50D-4EC0-8346-63D7-91680BA36E16}"/>
+                <a16:creationId xmlns:a16="http://schemas.microsoft.com/office/drawing/2014/main" id="{938D7001-3A6C-25F0-D359-699008A8148F}"/>
               </a:ext>
             </a:extLst>
           </p:cNvPr>
@@ -14980,7 +15002,7 @@
     </p:spTree>
     <p:extLst>
       <p:ext uri="{BB962C8B-B14F-4D97-AF65-F5344CB8AC3E}">
-        <p14:creationId xmlns:p14="http://schemas.microsoft.com/office/powerpoint/2010/main" val="2842087314"/>
+        <p14:creationId xmlns:p14="http://schemas.microsoft.com/office/powerpoint/2010/main" val="3702388262"/>
       </p:ext>
     </p:extLst>
   </p:cSld>
@@ -15012,7 +15034,7 @@
           <p:cNvPr id="2" name="Rectangle 1">
             <a:extLst>
               <a:ext uri="{FF2B5EF4-FFF2-40B4-BE49-F238E27FC236}">
-                <a16:creationId xmlns:a16="http://schemas.microsoft.com/office/drawing/2014/main" id="{8BD916F2-BFB7-8074-6B31-23B694F51696}"/>
+                <a16:creationId xmlns:a16="http://schemas.microsoft.com/office/drawing/2014/main" id="{C5699CB0-8845-B4AD-4000-AE0765045B31}"/>
               </a:ext>
             </a:extLst>
           </p:cNvPr>
@@ -15080,7 +15102,7 @@
           <p:cNvPr id="3" name="Rectangle 2">
             <a:extLst>
               <a:ext uri="{FF2B5EF4-FFF2-40B4-BE49-F238E27FC236}">
-                <a16:creationId xmlns:a16="http://schemas.microsoft.com/office/drawing/2014/main" id="{0CB99754-FD26-8838-A30D-5A137865D92A}"/>
+                <a16:creationId xmlns:a16="http://schemas.microsoft.com/office/drawing/2014/main" id="{CAC79796-50DC-F445-4161-7C005C646547}"/>
               </a:ext>
             </a:extLst>
           </p:cNvPr>
@@ -15148,7 +15170,7 @@
           <p:cNvPr id="4" name="TextBox 3">
             <a:extLst>
               <a:ext uri="{FF2B5EF4-FFF2-40B4-BE49-F238E27FC236}">
-                <a16:creationId xmlns:a16="http://schemas.microsoft.com/office/drawing/2014/main" id="{CA4D92DF-56E6-21E5-1D2E-03ACC82DF251}"/>
+                <a16:creationId xmlns:a16="http://schemas.microsoft.com/office/drawing/2014/main" id="{55E4E8E2-864A-5BFB-9FA4-ED93D9A9C6FB}"/>
               </a:ext>
             </a:extLst>
           </p:cNvPr>
@@ -15188,7 +15210,7 @@
           <p:cNvPr id="5" name="TextBox 4">
             <a:extLst>
               <a:ext uri="{FF2B5EF4-FFF2-40B4-BE49-F238E27FC236}">
-                <a16:creationId xmlns:a16="http://schemas.microsoft.com/office/drawing/2014/main" id="{9FAB1999-7722-0AAC-B6CE-E6FE3A7ACB5E}"/>
+                <a16:creationId xmlns:a16="http://schemas.microsoft.com/office/drawing/2014/main" id="{2FD3FE2E-AA2A-1B14-2E21-066C11A51C1F}"/>
               </a:ext>
             </a:extLst>
           </p:cNvPr>
@@ -15228,7 +15250,7 @@
           <p:cNvPr id="6" name="Rectangle 5">
             <a:extLst>
               <a:ext uri="{FF2B5EF4-FFF2-40B4-BE49-F238E27FC236}">
-                <a16:creationId xmlns:a16="http://schemas.microsoft.com/office/drawing/2014/main" id="{75A32403-0B50-21E5-12A3-53CE3B85380C}"/>
+                <a16:creationId xmlns:a16="http://schemas.microsoft.com/office/drawing/2014/main" id="{43990162-339B-00BD-92A0-96A9CA4B544F}"/>
               </a:ext>
             </a:extLst>
           </p:cNvPr>
@@ -15282,7 +15304,7 @@
           <p:cNvPr id="7" name="TextBox 6">
             <a:extLst>
               <a:ext uri="{FF2B5EF4-FFF2-40B4-BE49-F238E27FC236}">
-                <a16:creationId xmlns:a16="http://schemas.microsoft.com/office/drawing/2014/main" id="{EFCB5560-3362-15D0-7AEE-92CEFDA51E1D}"/>
+                <a16:creationId xmlns:a16="http://schemas.microsoft.com/office/drawing/2014/main" id="{309CD898-F0BB-1C6F-075D-7292A93F70B3}"/>
               </a:ext>
             </a:extLst>
           </p:cNvPr>
@@ -15323,7 +15345,7 @@
           <p:cNvPr id="8" name="Rectangle 7">
             <a:extLst>
               <a:ext uri="{FF2B5EF4-FFF2-40B4-BE49-F238E27FC236}">
-                <a16:creationId xmlns:a16="http://schemas.microsoft.com/office/drawing/2014/main" id="{E7399D5B-C976-C7E0-839D-4E9CEB330E4A}"/>
+                <a16:creationId xmlns:a16="http://schemas.microsoft.com/office/drawing/2014/main" id="{AA1BA93F-CC06-A30D-BEEF-514EF52C62D8}"/>
               </a:ext>
             </a:extLst>
           </p:cNvPr>
@@ -15377,7 +15399,7 @@
           <p:cNvPr id="9" name="TextBox 8">
             <a:extLst>
               <a:ext uri="{FF2B5EF4-FFF2-40B4-BE49-F238E27FC236}">
-                <a16:creationId xmlns:a16="http://schemas.microsoft.com/office/drawing/2014/main" id="{60335DEC-5BA2-A6F2-1571-8AE883C6F7EC}"/>
+                <a16:creationId xmlns:a16="http://schemas.microsoft.com/office/drawing/2014/main" id="{7668F421-5C51-6F69-CB80-306FAC16A010}"/>
               </a:ext>
             </a:extLst>
           </p:cNvPr>
@@ -15418,7 +15440,7 @@
           <p:cNvPr id="10" name="Rectangle 9">
             <a:extLst>
               <a:ext uri="{FF2B5EF4-FFF2-40B4-BE49-F238E27FC236}">
-                <a16:creationId xmlns:a16="http://schemas.microsoft.com/office/drawing/2014/main" id="{8BCC6EE1-6907-B297-3CEC-591C8DDE9FF0}"/>
+                <a16:creationId xmlns:a16="http://schemas.microsoft.com/office/drawing/2014/main" id="{E7398117-EA06-A7F9-87C8-9EF33BED9619}"/>
               </a:ext>
             </a:extLst>
           </p:cNvPr>
@@ -15472,7 +15494,7 @@
           <p:cNvPr id="11" name="TextBox 10">
             <a:extLst>
               <a:ext uri="{FF2B5EF4-FFF2-40B4-BE49-F238E27FC236}">
-                <a16:creationId xmlns:a16="http://schemas.microsoft.com/office/drawing/2014/main" id="{24A3EE24-FFF5-C423-7F35-E8D6E3FBA79F}"/>
+                <a16:creationId xmlns:a16="http://schemas.microsoft.com/office/drawing/2014/main" id="{11A66DD8-920E-120E-1380-5640CCCBB325}"/>
               </a:ext>
             </a:extLst>
           </p:cNvPr>
@@ -15513,7 +15535,7 @@
           <p:cNvPr id="12" name="TextBox 11">
             <a:extLst>
               <a:ext uri="{FF2B5EF4-FFF2-40B4-BE49-F238E27FC236}">
-                <a16:creationId xmlns:a16="http://schemas.microsoft.com/office/drawing/2014/main" id="{6F4BC3AF-8FED-73F0-19AC-2D6191744A7F}"/>
+                <a16:creationId xmlns:a16="http://schemas.microsoft.com/office/drawing/2014/main" id="{A9F56006-9E8A-A9E7-E29F-0C815792A4E8}"/>
               </a:ext>
             </a:extLst>
           </p:cNvPr>
@@ -15604,7 +15626,7 @@
     </p:spTree>
     <p:extLst>
       <p:ext uri="{BB962C8B-B14F-4D97-AF65-F5344CB8AC3E}">
-        <p14:creationId xmlns:p14="http://schemas.microsoft.com/office/powerpoint/2010/main" val="3034086018"/>
+        <p14:creationId xmlns:p14="http://schemas.microsoft.com/office/powerpoint/2010/main" val="1907945732"/>
       </p:ext>
     </p:extLst>
   </p:cSld>
@@ -15636,7 +15658,7 @@
           <p:cNvPr id="2" name="Rectangle 1">
             <a:extLst>
               <a:ext uri="{FF2B5EF4-FFF2-40B4-BE49-F238E27FC236}">
-                <a16:creationId xmlns:a16="http://schemas.microsoft.com/office/drawing/2014/main" id="{6601884E-D1AB-FCB3-8515-80502FAAA86B}"/>
+                <a16:creationId xmlns:a16="http://schemas.microsoft.com/office/drawing/2014/main" id="{91BE0AFB-8671-32D8-7B87-22D4A7BF0E43}"/>
               </a:ext>
             </a:extLst>
           </p:cNvPr>
@@ -15704,7 +15726,7 @@
           <p:cNvPr id="3" name="Rectangle 2">
             <a:extLst>
               <a:ext uri="{FF2B5EF4-FFF2-40B4-BE49-F238E27FC236}">
-                <a16:creationId xmlns:a16="http://schemas.microsoft.com/office/drawing/2014/main" id="{60E9D449-4222-1089-0337-2CACD21526BB}"/>
+                <a16:creationId xmlns:a16="http://schemas.microsoft.com/office/drawing/2014/main" id="{9C6F7143-FEB6-2782-50AA-A006257E2E19}"/>
               </a:ext>
             </a:extLst>
           </p:cNvPr>
@@ -15772,7 +15794,7 @@
           <p:cNvPr id="4" name="TextBox 3">
             <a:extLst>
               <a:ext uri="{FF2B5EF4-FFF2-40B4-BE49-F238E27FC236}">
-                <a16:creationId xmlns:a16="http://schemas.microsoft.com/office/drawing/2014/main" id="{187F9B8D-379F-6B86-8759-199043A9C299}"/>
+                <a16:creationId xmlns:a16="http://schemas.microsoft.com/office/drawing/2014/main" id="{C4A1F082-417D-113C-BDE0-E33ED8CEA40A}"/>
               </a:ext>
             </a:extLst>
           </p:cNvPr>
@@ -15812,7 +15834,7 @@
           <p:cNvPr id="5" name="TextBox 4">
             <a:extLst>
               <a:ext uri="{FF2B5EF4-FFF2-40B4-BE49-F238E27FC236}">
-                <a16:creationId xmlns:a16="http://schemas.microsoft.com/office/drawing/2014/main" id="{B7B27312-4439-4D8C-F6CC-1C74CABF725A}"/>
+                <a16:creationId xmlns:a16="http://schemas.microsoft.com/office/drawing/2014/main" id="{24099536-1596-EB82-E0BF-C8FC22F70470}"/>
               </a:ext>
             </a:extLst>
           </p:cNvPr>
@@ -15852,7 +15874,7 @@
           <p:cNvPr id="6" name="TextBox 5">
             <a:extLst>
               <a:ext uri="{FF2B5EF4-FFF2-40B4-BE49-F238E27FC236}">
-                <a16:creationId xmlns:a16="http://schemas.microsoft.com/office/drawing/2014/main" id="{9FE72BE6-900A-CE28-E536-C774101EB931}"/>
+                <a16:creationId xmlns:a16="http://schemas.microsoft.com/office/drawing/2014/main" id="{CC44F369-D9A9-6067-55B8-D64A8F21EA54}"/>
               </a:ext>
             </a:extLst>
           </p:cNvPr>
@@ -15945,7 +15967,7 @@
           <p:cNvPr id="7" name="Rectangle 6">
             <a:extLst>
               <a:ext uri="{FF2B5EF4-FFF2-40B4-BE49-F238E27FC236}">
-                <a16:creationId xmlns:a16="http://schemas.microsoft.com/office/drawing/2014/main" id="{4D5CA1C5-52A8-0146-DAA6-5F8426E5BD94}"/>
+                <a16:creationId xmlns:a16="http://schemas.microsoft.com/office/drawing/2014/main" id="{C1105931-2499-1646-8064-7C4F83812811}"/>
               </a:ext>
             </a:extLst>
           </p:cNvPr>
@@ -15999,7 +16021,7 @@
           <p:cNvPr id="8" name="TextBox 7">
             <a:extLst>
               <a:ext uri="{FF2B5EF4-FFF2-40B4-BE49-F238E27FC236}">
-                <a16:creationId xmlns:a16="http://schemas.microsoft.com/office/drawing/2014/main" id="{63E316E9-732A-BD50-BADB-759AD6B9E17F}"/>
+                <a16:creationId xmlns:a16="http://schemas.microsoft.com/office/drawing/2014/main" id="{A4AD5520-35F6-C915-8BF2-CF75615BEADC}"/>
               </a:ext>
             </a:extLst>
           </p:cNvPr>
@@ -16037,7 +16059,7 @@
     </p:spTree>
     <p:extLst>
       <p:ext uri="{BB962C8B-B14F-4D97-AF65-F5344CB8AC3E}">
-        <p14:creationId xmlns:p14="http://schemas.microsoft.com/office/powerpoint/2010/main" val="1193161778"/>
+        <p14:creationId xmlns:p14="http://schemas.microsoft.com/office/powerpoint/2010/main" val="3089395027"/>
       </p:ext>
     </p:extLst>
   </p:cSld>
@@ -16069,7 +16091,7 @@
           <p:cNvPr id="2" name="Rectangle 1">
             <a:extLst>
               <a:ext uri="{FF2B5EF4-FFF2-40B4-BE49-F238E27FC236}">
-                <a16:creationId xmlns:a16="http://schemas.microsoft.com/office/drawing/2014/main" id="{DB57A59D-803F-7112-5913-969DF9D28BEA}"/>
+                <a16:creationId xmlns:a16="http://schemas.microsoft.com/office/drawing/2014/main" id="{6D3D70DF-A95F-FD05-6D37-013EE6227D48}"/>
               </a:ext>
             </a:extLst>
           </p:cNvPr>
@@ -16137,7 +16159,7 @@
           <p:cNvPr id="3" name="Rectangle 2">
             <a:extLst>
               <a:ext uri="{FF2B5EF4-FFF2-40B4-BE49-F238E27FC236}">
-                <a16:creationId xmlns:a16="http://schemas.microsoft.com/office/drawing/2014/main" id="{E88C9608-378E-934C-D60A-8520B46DEEC3}"/>
+                <a16:creationId xmlns:a16="http://schemas.microsoft.com/office/drawing/2014/main" id="{8F4244EE-1C53-4B9C-557D-2C50433FAF2C}"/>
               </a:ext>
             </a:extLst>
           </p:cNvPr>
@@ -16205,7 +16227,7 @@
           <p:cNvPr id="4" name="TextBox 3">
             <a:extLst>
               <a:ext uri="{FF2B5EF4-FFF2-40B4-BE49-F238E27FC236}">
-                <a16:creationId xmlns:a16="http://schemas.microsoft.com/office/drawing/2014/main" id="{7601F500-6D15-DB63-BAC6-612E33C3D7E2}"/>
+                <a16:creationId xmlns:a16="http://schemas.microsoft.com/office/drawing/2014/main" id="{37AF7C28-3A54-1FAC-8F22-689C5C8318BE}"/>
               </a:ext>
             </a:extLst>
           </p:cNvPr>
@@ -16245,7 +16267,7 @@
           <p:cNvPr id="5" name="TextBox 4">
             <a:extLst>
               <a:ext uri="{FF2B5EF4-FFF2-40B4-BE49-F238E27FC236}">
-                <a16:creationId xmlns:a16="http://schemas.microsoft.com/office/drawing/2014/main" id="{FCAA06CB-B370-1205-E73D-D46EC7CAE664}"/>
+                <a16:creationId xmlns:a16="http://schemas.microsoft.com/office/drawing/2014/main" id="{DC47310D-8FC2-D982-7E40-48BE43ABF69E}"/>
               </a:ext>
             </a:extLst>
           </p:cNvPr>
@@ -16285,7 +16307,7 @@
           <p:cNvPr id="6" name="TextBox 5">
             <a:extLst>
               <a:ext uri="{FF2B5EF4-FFF2-40B4-BE49-F238E27FC236}">
-                <a16:creationId xmlns:a16="http://schemas.microsoft.com/office/drawing/2014/main" id="{97828133-2821-5B3C-F5F7-976FA2AEA474}"/>
+                <a16:creationId xmlns:a16="http://schemas.microsoft.com/office/drawing/2014/main" id="{7CC28ED6-DB97-D75D-97B4-2F595E33DF6D}"/>
               </a:ext>
             </a:extLst>
           </p:cNvPr>
@@ -16378,7 +16400,7 @@
           <p:cNvPr id="7" name="Rectangle 6">
             <a:extLst>
               <a:ext uri="{FF2B5EF4-FFF2-40B4-BE49-F238E27FC236}">
-                <a16:creationId xmlns:a16="http://schemas.microsoft.com/office/drawing/2014/main" id="{DAFF905B-C4EB-3FD4-AF19-169878C5619D}"/>
+                <a16:creationId xmlns:a16="http://schemas.microsoft.com/office/drawing/2014/main" id="{73A2579F-963D-8214-1EB5-EC72DD48D7EB}"/>
               </a:ext>
             </a:extLst>
           </p:cNvPr>
@@ -16432,7 +16454,7 @@
           <p:cNvPr id="8" name="TextBox 7">
             <a:extLst>
               <a:ext uri="{FF2B5EF4-FFF2-40B4-BE49-F238E27FC236}">
-                <a16:creationId xmlns:a16="http://schemas.microsoft.com/office/drawing/2014/main" id="{ACFBDC86-A222-EDF9-6457-F99335F582E7}"/>
+                <a16:creationId xmlns:a16="http://schemas.microsoft.com/office/drawing/2014/main" id="{4A6A58C7-F550-063E-BA19-C85FD5ADE94B}"/>
               </a:ext>
             </a:extLst>
           </p:cNvPr>
@@ -16527,7 +16549,7 @@
           <p:cNvPr id="9" name="Rectangle 8">
             <a:extLst>
               <a:ext uri="{FF2B5EF4-FFF2-40B4-BE49-F238E27FC236}">
-                <a16:creationId xmlns:a16="http://schemas.microsoft.com/office/drawing/2014/main" id="{6CA284BA-0106-C619-F7BB-36187E278D21}"/>
+                <a16:creationId xmlns:a16="http://schemas.microsoft.com/office/drawing/2014/main" id="{DD9697D2-40A4-FB14-7738-61E58A704DC9}"/>
               </a:ext>
             </a:extLst>
           </p:cNvPr>
@@ -16581,7 +16603,7 @@
           <p:cNvPr id="10" name="TextBox 9">
             <a:extLst>
               <a:ext uri="{FF2B5EF4-FFF2-40B4-BE49-F238E27FC236}">
-                <a16:creationId xmlns:a16="http://schemas.microsoft.com/office/drawing/2014/main" id="{B6897503-12B2-87C4-210C-FB9CC392ADAF}"/>
+                <a16:creationId xmlns:a16="http://schemas.microsoft.com/office/drawing/2014/main" id="{5654809E-6166-B4BC-0F9E-AF880C267D7E}"/>
               </a:ext>
             </a:extLst>
           </p:cNvPr>
@@ -16619,7 +16641,7 @@
     </p:spTree>
     <p:extLst>
       <p:ext uri="{BB962C8B-B14F-4D97-AF65-F5344CB8AC3E}">
-        <p14:creationId xmlns:p14="http://schemas.microsoft.com/office/powerpoint/2010/main" val="1239612091"/>
+        <p14:creationId xmlns:p14="http://schemas.microsoft.com/office/powerpoint/2010/main" val="2285601646"/>
       </p:ext>
     </p:extLst>
   </p:cSld>
@@ -16651,7 +16673,7 @@
           <p:cNvPr id="2" name="Rectangle 1">
             <a:extLst>
               <a:ext uri="{FF2B5EF4-FFF2-40B4-BE49-F238E27FC236}">
-                <a16:creationId xmlns:a16="http://schemas.microsoft.com/office/drawing/2014/main" id="{F6E19468-C296-CA02-9EC3-99328029E752}"/>
+                <a16:creationId xmlns:a16="http://schemas.microsoft.com/office/drawing/2014/main" id="{DB7A1BEC-1908-3EAB-2135-E8D69C0DEECD}"/>
               </a:ext>
             </a:extLst>
           </p:cNvPr>
@@ -16719,7 +16741,7 @@
           <p:cNvPr id="3" name="Rectangle 2">
             <a:extLst>
               <a:ext uri="{FF2B5EF4-FFF2-40B4-BE49-F238E27FC236}">
-                <a16:creationId xmlns:a16="http://schemas.microsoft.com/office/drawing/2014/main" id="{EB8C9F5E-5AC2-5E98-D6F2-DDDB89319930}"/>
+                <a16:creationId xmlns:a16="http://schemas.microsoft.com/office/drawing/2014/main" id="{401A5436-E01B-3F83-A618-2116893633C0}"/>
               </a:ext>
             </a:extLst>
           </p:cNvPr>
@@ -16787,7 +16809,7 @@
           <p:cNvPr id="4" name="TextBox 3">
             <a:extLst>
               <a:ext uri="{FF2B5EF4-FFF2-40B4-BE49-F238E27FC236}">
-                <a16:creationId xmlns:a16="http://schemas.microsoft.com/office/drawing/2014/main" id="{562F53EA-2EF3-FDB3-6A1E-A628162A162F}"/>
+                <a16:creationId xmlns:a16="http://schemas.microsoft.com/office/drawing/2014/main" id="{B62DE554-B4CF-8483-2659-3FC438AAEC8E}"/>
               </a:ext>
             </a:extLst>
           </p:cNvPr>
@@ -16827,7 +16849,7 @@
           <p:cNvPr id="5" name="TextBox 4">
             <a:extLst>
               <a:ext uri="{FF2B5EF4-FFF2-40B4-BE49-F238E27FC236}">
-                <a16:creationId xmlns:a16="http://schemas.microsoft.com/office/drawing/2014/main" id="{0EB91800-F18E-025C-9637-62DC4CD7ACEB}"/>
+                <a16:creationId xmlns:a16="http://schemas.microsoft.com/office/drawing/2014/main" id="{D665AB30-58D9-86BF-68BC-53BB48F0F39C}"/>
               </a:ext>
             </a:extLst>
           </p:cNvPr>
@@ -16867,7 +16889,7 @@
           <p:cNvPr id="6" name="TextBox 5">
             <a:extLst>
               <a:ext uri="{FF2B5EF4-FFF2-40B4-BE49-F238E27FC236}">
-                <a16:creationId xmlns:a16="http://schemas.microsoft.com/office/drawing/2014/main" id="{5F763A34-2C21-1D32-3764-2A04886DF373}"/>
+                <a16:creationId xmlns:a16="http://schemas.microsoft.com/office/drawing/2014/main" id="{9481B7B4-4DC7-C4B2-4C7D-3A9C1AF09ABE}"/>
               </a:ext>
             </a:extLst>
           </p:cNvPr>
@@ -16907,7 +16929,7 @@
           <p:cNvPr id="7" name="Rectangle 6">
             <a:extLst>
               <a:ext uri="{FF2B5EF4-FFF2-40B4-BE49-F238E27FC236}">
-                <a16:creationId xmlns:a16="http://schemas.microsoft.com/office/drawing/2014/main" id="{634C53BE-A1AE-3A8E-A823-E62952984B10}"/>
+                <a16:creationId xmlns:a16="http://schemas.microsoft.com/office/drawing/2014/main" id="{DCB58B7B-7747-2BC3-26E9-95EED380000C}"/>
               </a:ext>
             </a:extLst>
           </p:cNvPr>
@@ -16961,7 +16983,7 @@
           <p:cNvPr id="8" name="TextBox 7">
             <a:extLst>
               <a:ext uri="{FF2B5EF4-FFF2-40B4-BE49-F238E27FC236}">
-                <a16:creationId xmlns:a16="http://schemas.microsoft.com/office/drawing/2014/main" id="{EB328227-37B9-2F86-5F2D-7D917CA94B92}"/>
+                <a16:creationId xmlns:a16="http://schemas.microsoft.com/office/drawing/2014/main" id="{39EE8AE6-B046-4D30-99B7-4B7762574E3D}"/>
               </a:ext>
             </a:extLst>
           </p:cNvPr>
@@ -17001,7 +17023,7 @@
           <p:cNvPr id="9" name="TextBox 8">
             <a:extLst>
               <a:ext uri="{FF2B5EF4-FFF2-40B4-BE49-F238E27FC236}">
-                <a16:creationId xmlns:a16="http://schemas.microsoft.com/office/drawing/2014/main" id="{812C5246-18F2-D23E-A040-3F7C97F6076D}"/>
+                <a16:creationId xmlns:a16="http://schemas.microsoft.com/office/drawing/2014/main" id="{34A2E8C4-707B-1A44-6E0B-A4C8FD9F3C2E}"/>
               </a:ext>
             </a:extLst>
           </p:cNvPr>
@@ -17092,7 +17114,7 @@
     </p:spTree>
     <p:extLst>
       <p:ext uri="{BB962C8B-B14F-4D97-AF65-F5344CB8AC3E}">
-        <p14:creationId xmlns:p14="http://schemas.microsoft.com/office/powerpoint/2010/main" val="288777553"/>
+        <p14:creationId xmlns:p14="http://schemas.microsoft.com/office/powerpoint/2010/main" val="1165642141"/>
       </p:ext>
     </p:extLst>
   </p:cSld>
@@ -17124,7 +17146,7 @@
           <p:cNvPr id="2" name="Rectangle 1">
             <a:extLst>
               <a:ext uri="{FF2B5EF4-FFF2-40B4-BE49-F238E27FC236}">
-                <a16:creationId xmlns:a16="http://schemas.microsoft.com/office/drawing/2014/main" id="{282F7989-47BB-1AB7-FFC4-0A3EF99EF3C3}"/>
+                <a16:creationId xmlns:a16="http://schemas.microsoft.com/office/drawing/2014/main" id="{E08C17CE-1BE7-71E6-97C0-D57938D64D54}"/>
               </a:ext>
             </a:extLst>
           </p:cNvPr>
@@ -17192,7 +17214,7 @@
           <p:cNvPr id="3" name="Rectangle 2">
             <a:extLst>
               <a:ext uri="{FF2B5EF4-FFF2-40B4-BE49-F238E27FC236}">
-                <a16:creationId xmlns:a16="http://schemas.microsoft.com/office/drawing/2014/main" id="{262D9E08-9E90-6F13-0282-5D423A37A2CA}"/>
+                <a16:creationId xmlns:a16="http://schemas.microsoft.com/office/drawing/2014/main" id="{F0CC6432-E0BB-5F03-8ADB-76BEF0701CFC}"/>
               </a:ext>
             </a:extLst>
           </p:cNvPr>
@@ -17260,7 +17282,7 @@
           <p:cNvPr id="4" name="TextBox 3">
             <a:extLst>
               <a:ext uri="{FF2B5EF4-FFF2-40B4-BE49-F238E27FC236}">
-                <a16:creationId xmlns:a16="http://schemas.microsoft.com/office/drawing/2014/main" id="{C1CED997-BE95-007F-4F92-D6690026AAAA}"/>
+                <a16:creationId xmlns:a16="http://schemas.microsoft.com/office/drawing/2014/main" id="{2F72C656-1A9F-5F4C-ED4E-887C8E7CB576}"/>
               </a:ext>
             </a:extLst>
           </p:cNvPr>
@@ -17300,7 +17322,7 @@
           <p:cNvPr id="5" name="TextBox 4">
             <a:extLst>
               <a:ext uri="{FF2B5EF4-FFF2-40B4-BE49-F238E27FC236}">
-                <a16:creationId xmlns:a16="http://schemas.microsoft.com/office/drawing/2014/main" id="{E948E598-70E1-E14B-8041-F9C482D6B5C5}"/>
+                <a16:creationId xmlns:a16="http://schemas.microsoft.com/office/drawing/2014/main" id="{7E861E91-0F2B-830C-171A-38DBE75C4F96}"/>
               </a:ext>
             </a:extLst>
           </p:cNvPr>
@@ -17340,7 +17362,7 @@
           <p:cNvPr id="6" name="TextBox 5">
             <a:extLst>
               <a:ext uri="{FF2B5EF4-FFF2-40B4-BE49-F238E27FC236}">
-                <a16:creationId xmlns:a16="http://schemas.microsoft.com/office/drawing/2014/main" id="{5D915798-59E6-157D-9118-9D97B67670B8}"/>
+                <a16:creationId xmlns:a16="http://schemas.microsoft.com/office/drawing/2014/main" id="{3C9AF8DF-F2F5-4921-10F9-255FC7763FBA}"/>
               </a:ext>
             </a:extLst>
           </p:cNvPr>
@@ -17433,7 +17455,7 @@
           <p:cNvPr id="7" name="Rectangle 6">
             <a:extLst>
               <a:ext uri="{FF2B5EF4-FFF2-40B4-BE49-F238E27FC236}">
-                <a16:creationId xmlns:a16="http://schemas.microsoft.com/office/drawing/2014/main" id="{CEF9D83A-C791-5810-F87C-64972E1A1985}"/>
+                <a16:creationId xmlns:a16="http://schemas.microsoft.com/office/drawing/2014/main" id="{18E54226-A5BA-DF45-2864-5697D4FFB8C1}"/>
               </a:ext>
             </a:extLst>
           </p:cNvPr>
@@ -17487,7 +17509,7 @@
           <p:cNvPr id="8" name="TextBox 7">
             <a:extLst>
               <a:ext uri="{FF2B5EF4-FFF2-40B4-BE49-F238E27FC236}">
-                <a16:creationId xmlns:a16="http://schemas.microsoft.com/office/drawing/2014/main" id="{DAB89651-4AB9-85A3-DED6-EFD723908894}"/>
+                <a16:creationId xmlns:a16="http://schemas.microsoft.com/office/drawing/2014/main" id="{17922889-6917-6422-4805-C2440727C346}"/>
               </a:ext>
             </a:extLst>
           </p:cNvPr>
@@ -17525,7 +17547,7 @@
     </p:spTree>
     <p:extLst>
       <p:ext uri="{BB962C8B-B14F-4D97-AF65-F5344CB8AC3E}">
-        <p14:creationId xmlns:p14="http://schemas.microsoft.com/office/powerpoint/2010/main" val="3345991266"/>
+        <p14:creationId xmlns:p14="http://schemas.microsoft.com/office/powerpoint/2010/main" val="287189248"/>
       </p:ext>
     </p:extLst>
   </p:cSld>
@@ -17557,7 +17579,7 @@
           <p:cNvPr id="2" name="Rectangle 1">
             <a:extLst>
               <a:ext uri="{FF2B5EF4-FFF2-40B4-BE49-F238E27FC236}">
-                <a16:creationId xmlns:a16="http://schemas.microsoft.com/office/drawing/2014/main" id="{E4A2C714-D66A-F71B-A753-39EE58211617}"/>
+                <a16:creationId xmlns:a16="http://schemas.microsoft.com/office/drawing/2014/main" id="{1E7468A2-0B22-CE57-3335-4B168362780E}"/>
               </a:ext>
             </a:extLst>
           </p:cNvPr>
@@ -17625,7 +17647,7 @@
           <p:cNvPr id="3" name="Rectangle 2">
             <a:extLst>
               <a:ext uri="{FF2B5EF4-FFF2-40B4-BE49-F238E27FC236}">
-                <a16:creationId xmlns:a16="http://schemas.microsoft.com/office/drawing/2014/main" id="{0FFA624C-6180-1E1C-B4C6-944C03E24684}"/>
+                <a16:creationId xmlns:a16="http://schemas.microsoft.com/office/drawing/2014/main" id="{C840B4B2-4378-7F64-9FBA-0CE9F53F281B}"/>
               </a:ext>
             </a:extLst>
           </p:cNvPr>
@@ -17693,7 +17715,7 @@
           <p:cNvPr id="4" name="TextBox 3">
             <a:extLst>
               <a:ext uri="{FF2B5EF4-FFF2-40B4-BE49-F238E27FC236}">
-                <a16:creationId xmlns:a16="http://schemas.microsoft.com/office/drawing/2014/main" id="{E105AF39-884D-5715-8E2B-FFAB10BB9CCC}"/>
+                <a16:creationId xmlns:a16="http://schemas.microsoft.com/office/drawing/2014/main" id="{26F75A7E-9DBB-FCC1-2CA2-85D7EF6272F2}"/>
               </a:ext>
             </a:extLst>
           </p:cNvPr>
@@ -17733,7 +17755,7 @@
           <p:cNvPr id="5" name="TextBox 4">
             <a:extLst>
               <a:ext uri="{FF2B5EF4-FFF2-40B4-BE49-F238E27FC236}">
-                <a16:creationId xmlns:a16="http://schemas.microsoft.com/office/drawing/2014/main" id="{3AFA9406-1EFF-AD25-0BD3-8B7F2E170C6B}"/>
+                <a16:creationId xmlns:a16="http://schemas.microsoft.com/office/drawing/2014/main" id="{C80F5F91-7CA7-53B0-4D2A-987DD010A8A7}"/>
               </a:ext>
             </a:extLst>
           </p:cNvPr>
@@ -17773,7 +17795,7 @@
           <p:cNvPr id="6" name="TextBox 5">
             <a:extLst>
               <a:ext uri="{FF2B5EF4-FFF2-40B4-BE49-F238E27FC236}">
-                <a16:creationId xmlns:a16="http://schemas.microsoft.com/office/drawing/2014/main" id="{826CA84C-2EF5-E918-E70F-8ACDB4B93236}"/>
+                <a16:creationId xmlns:a16="http://schemas.microsoft.com/office/drawing/2014/main" id="{3EBF8405-E807-F6FB-9286-3F763791F025}"/>
               </a:ext>
             </a:extLst>
           </p:cNvPr>
@@ -17866,7 +17888,7 @@
           <p:cNvPr id="7" name="Rectangle 6">
             <a:extLst>
               <a:ext uri="{FF2B5EF4-FFF2-40B4-BE49-F238E27FC236}">
-                <a16:creationId xmlns:a16="http://schemas.microsoft.com/office/drawing/2014/main" id="{380FB485-3FE8-F43D-88D8-E814E38117E9}"/>
+                <a16:creationId xmlns:a16="http://schemas.microsoft.com/office/drawing/2014/main" id="{44FD440E-E17D-F0E9-398E-71DB5C65E47C}"/>
               </a:ext>
             </a:extLst>
           </p:cNvPr>
@@ -17920,7 +17942,7 @@
           <p:cNvPr id="8" name="TextBox 7">
             <a:extLst>
               <a:ext uri="{FF2B5EF4-FFF2-40B4-BE49-F238E27FC236}">
-                <a16:creationId xmlns:a16="http://schemas.microsoft.com/office/drawing/2014/main" id="{A776F718-E6D6-78B7-143D-64D5DB4BA73B}"/>
+                <a16:creationId xmlns:a16="http://schemas.microsoft.com/office/drawing/2014/main" id="{D636D31B-F5F1-0666-BD0B-02F99BC91B3D}"/>
               </a:ext>
             </a:extLst>
           </p:cNvPr>
@@ -18015,7 +18037,7 @@
           <p:cNvPr id="9" name="Rectangle 8">
             <a:extLst>
               <a:ext uri="{FF2B5EF4-FFF2-40B4-BE49-F238E27FC236}">
-                <a16:creationId xmlns:a16="http://schemas.microsoft.com/office/drawing/2014/main" id="{5065CD63-4825-5B12-E9DD-A02746418525}"/>
+                <a16:creationId xmlns:a16="http://schemas.microsoft.com/office/drawing/2014/main" id="{5BA724CD-075A-056B-EA27-44A29B4D7330}"/>
               </a:ext>
             </a:extLst>
           </p:cNvPr>
@@ -18069,7 +18091,7 @@
           <p:cNvPr id="10" name="TextBox 9">
             <a:extLst>
               <a:ext uri="{FF2B5EF4-FFF2-40B4-BE49-F238E27FC236}">
-                <a16:creationId xmlns:a16="http://schemas.microsoft.com/office/drawing/2014/main" id="{D173F008-9678-C305-D95F-751902ED0E7C}"/>
+                <a16:creationId xmlns:a16="http://schemas.microsoft.com/office/drawing/2014/main" id="{1D69705B-3530-FF4A-42AB-6086B7614531}"/>
               </a:ext>
             </a:extLst>
           </p:cNvPr>
@@ -18107,7 +18129,7 @@
     </p:spTree>
     <p:extLst>
       <p:ext uri="{BB962C8B-B14F-4D97-AF65-F5344CB8AC3E}">
-        <p14:creationId xmlns:p14="http://schemas.microsoft.com/office/powerpoint/2010/main" val="3792565323"/>
+        <p14:creationId xmlns:p14="http://schemas.microsoft.com/office/powerpoint/2010/main" val="1595164049"/>
       </p:ext>
     </p:extLst>
   </p:cSld>
@@ -18139,7 +18161,7 @@
           <p:cNvPr id="2" name="Rectangle 1">
             <a:extLst>
               <a:ext uri="{FF2B5EF4-FFF2-40B4-BE49-F238E27FC236}">
-                <a16:creationId xmlns:a16="http://schemas.microsoft.com/office/drawing/2014/main" id="{25D36E50-8B8C-8436-EB46-368B88A092D6}"/>
+                <a16:creationId xmlns:a16="http://schemas.microsoft.com/office/drawing/2014/main" id="{20925E63-E1A3-42D1-1B8D-B0CF824BA922}"/>
               </a:ext>
             </a:extLst>
           </p:cNvPr>
@@ -18207,7 +18229,7 @@
           <p:cNvPr id="3" name="Rectangle 2">
             <a:extLst>
               <a:ext uri="{FF2B5EF4-FFF2-40B4-BE49-F238E27FC236}">
-                <a16:creationId xmlns:a16="http://schemas.microsoft.com/office/drawing/2014/main" id="{F13658C1-519D-0172-2495-2338809EF693}"/>
+                <a16:creationId xmlns:a16="http://schemas.microsoft.com/office/drawing/2014/main" id="{8575E6F0-D27B-2912-E91B-2622D983FE8E}"/>
               </a:ext>
             </a:extLst>
           </p:cNvPr>
@@ -18275,7 +18297,7 @@
           <p:cNvPr id="4" name="TextBox 3">
             <a:extLst>
               <a:ext uri="{FF2B5EF4-FFF2-40B4-BE49-F238E27FC236}">
-                <a16:creationId xmlns:a16="http://schemas.microsoft.com/office/drawing/2014/main" id="{D193321F-3409-6079-CADC-11630CDFE424}"/>
+                <a16:creationId xmlns:a16="http://schemas.microsoft.com/office/drawing/2014/main" id="{802CB37C-DC79-F2C5-AB61-5D0F0334A830}"/>
               </a:ext>
             </a:extLst>
           </p:cNvPr>
@@ -18315,7 +18337,7 @@
           <p:cNvPr id="5" name="TextBox 4">
             <a:extLst>
               <a:ext uri="{FF2B5EF4-FFF2-40B4-BE49-F238E27FC236}">
-                <a16:creationId xmlns:a16="http://schemas.microsoft.com/office/drawing/2014/main" id="{F6CEF353-E373-F2EE-E34D-D8800BCA6258}"/>
+                <a16:creationId xmlns:a16="http://schemas.microsoft.com/office/drawing/2014/main" id="{B2249FF4-06F5-161E-4BBE-8142AA7351CC}"/>
               </a:ext>
             </a:extLst>
           </p:cNvPr>
@@ -18355,7 +18377,7 @@
           <p:cNvPr id="6" name="TextBox 5">
             <a:extLst>
               <a:ext uri="{FF2B5EF4-FFF2-40B4-BE49-F238E27FC236}">
-                <a16:creationId xmlns:a16="http://schemas.microsoft.com/office/drawing/2014/main" id="{BEF33D1E-F200-86A6-434C-9022A034F1AE}"/>
+                <a16:creationId xmlns:a16="http://schemas.microsoft.com/office/drawing/2014/main" id="{2D46A601-63C0-CA09-2CE1-16BCBCE26F9C}"/>
               </a:ext>
             </a:extLst>
           </p:cNvPr>
@@ -18395,7 +18417,7 @@
           <p:cNvPr id="7" name="Rectangle 6">
             <a:extLst>
               <a:ext uri="{FF2B5EF4-FFF2-40B4-BE49-F238E27FC236}">
-                <a16:creationId xmlns:a16="http://schemas.microsoft.com/office/drawing/2014/main" id="{9BF4CBDF-35CE-9A02-9B7C-4EAB3CBA2CFF}"/>
+                <a16:creationId xmlns:a16="http://schemas.microsoft.com/office/drawing/2014/main" id="{1EFBB762-BC19-B32E-C0AC-9E5EC7EEDDBC}"/>
               </a:ext>
             </a:extLst>
           </p:cNvPr>
@@ -18449,7 +18471,7 @@
           <p:cNvPr id="8" name="TextBox 7">
             <a:extLst>
               <a:ext uri="{FF2B5EF4-FFF2-40B4-BE49-F238E27FC236}">
-                <a16:creationId xmlns:a16="http://schemas.microsoft.com/office/drawing/2014/main" id="{3660AFC3-78D2-E17D-CFCA-164BCC81D7E8}"/>
+                <a16:creationId xmlns:a16="http://schemas.microsoft.com/office/drawing/2014/main" id="{8DEBB751-529F-979E-85C7-443FA8D85E8D}"/>
               </a:ext>
             </a:extLst>
           </p:cNvPr>
@@ -18489,7 +18511,7 @@
           <p:cNvPr id="9" name="TextBox 8">
             <a:extLst>
               <a:ext uri="{FF2B5EF4-FFF2-40B4-BE49-F238E27FC236}">
-                <a16:creationId xmlns:a16="http://schemas.microsoft.com/office/drawing/2014/main" id="{AD72CFD9-B4D1-A901-1A6C-5FEAF3C1E72B}"/>
+                <a16:creationId xmlns:a16="http://schemas.microsoft.com/office/drawing/2014/main" id="{035AB545-58F5-C04B-B17B-ED412EFC6B27}"/>
               </a:ext>
             </a:extLst>
           </p:cNvPr>
@@ -18580,7 +18602,7 @@
     </p:spTree>
     <p:extLst>
       <p:ext uri="{BB962C8B-B14F-4D97-AF65-F5344CB8AC3E}">
-        <p14:creationId xmlns:p14="http://schemas.microsoft.com/office/powerpoint/2010/main" val="3171354092"/>
+        <p14:creationId xmlns:p14="http://schemas.microsoft.com/office/powerpoint/2010/main" val="1522399511"/>
       </p:ext>
     </p:extLst>
   </p:cSld>
@@ -18612,7 +18634,7 @@
           <p:cNvPr id="2" name="Rectangle 1">
             <a:extLst>
               <a:ext uri="{FF2B5EF4-FFF2-40B4-BE49-F238E27FC236}">
-                <a16:creationId xmlns:a16="http://schemas.microsoft.com/office/drawing/2014/main" id="{A9163D46-B4DB-D8C9-7A0D-57D47B0110C6}"/>
+                <a16:creationId xmlns:a16="http://schemas.microsoft.com/office/drawing/2014/main" id="{628368DC-1BB7-9AEE-82F5-25E8C7EB46E4}"/>
               </a:ext>
             </a:extLst>
           </p:cNvPr>
@@ -18680,7 +18702,7 @@
           <p:cNvPr id="3" name="Rectangle 2">
             <a:extLst>
               <a:ext uri="{FF2B5EF4-FFF2-40B4-BE49-F238E27FC236}">
-                <a16:creationId xmlns:a16="http://schemas.microsoft.com/office/drawing/2014/main" id="{F701573B-BEDD-5493-D0FE-77C7DC3D330A}"/>
+                <a16:creationId xmlns:a16="http://schemas.microsoft.com/office/drawing/2014/main" id="{01E9A8F3-F443-67ED-4542-44C356DC9162}"/>
               </a:ext>
             </a:extLst>
           </p:cNvPr>
@@ -18748,7 +18770,7 @@
           <p:cNvPr id="4" name="TextBox 3">
             <a:extLst>
               <a:ext uri="{FF2B5EF4-FFF2-40B4-BE49-F238E27FC236}">
-                <a16:creationId xmlns:a16="http://schemas.microsoft.com/office/drawing/2014/main" id="{72E0E16D-B4C6-193A-F711-9BCB5303A3D7}"/>
+                <a16:creationId xmlns:a16="http://schemas.microsoft.com/office/drawing/2014/main" id="{3D0CDF28-F71A-8110-9679-B7BDDEC79ECF}"/>
               </a:ext>
             </a:extLst>
           </p:cNvPr>
@@ -18788,7 +18810,7 @@
           <p:cNvPr id="5" name="TextBox 4">
             <a:extLst>
               <a:ext uri="{FF2B5EF4-FFF2-40B4-BE49-F238E27FC236}">
-                <a16:creationId xmlns:a16="http://schemas.microsoft.com/office/drawing/2014/main" id="{CFCA6CEF-91FC-88D6-E5AC-21892BEE147D}"/>
+                <a16:creationId xmlns:a16="http://schemas.microsoft.com/office/drawing/2014/main" id="{CF55F8E7-368C-1ADD-38BA-AB126108F551}"/>
               </a:ext>
             </a:extLst>
           </p:cNvPr>
@@ -18828,7 +18850,7 @@
           <p:cNvPr id="6" name="TextBox 5">
             <a:extLst>
               <a:ext uri="{FF2B5EF4-FFF2-40B4-BE49-F238E27FC236}">
-                <a16:creationId xmlns:a16="http://schemas.microsoft.com/office/drawing/2014/main" id="{DE9F8B65-58A6-F455-4645-75934540A902}"/>
+                <a16:creationId xmlns:a16="http://schemas.microsoft.com/office/drawing/2014/main" id="{31061DC1-4B4B-E03C-C8B7-1AE273ABCC09}"/>
               </a:ext>
             </a:extLst>
           </p:cNvPr>
@@ -18921,7 +18943,7 @@
           <p:cNvPr id="7" name="Rectangle 6">
             <a:extLst>
               <a:ext uri="{FF2B5EF4-FFF2-40B4-BE49-F238E27FC236}">
-                <a16:creationId xmlns:a16="http://schemas.microsoft.com/office/drawing/2014/main" id="{4CF273EE-034A-967A-B477-D4C389ED5AA0}"/>
+                <a16:creationId xmlns:a16="http://schemas.microsoft.com/office/drawing/2014/main" id="{6E928AEF-AC71-C120-99D0-9B333C5F42B8}"/>
               </a:ext>
             </a:extLst>
           </p:cNvPr>
@@ -18975,7 +18997,7 @@
           <p:cNvPr id="8" name="TextBox 7">
             <a:extLst>
               <a:ext uri="{FF2B5EF4-FFF2-40B4-BE49-F238E27FC236}">
-                <a16:creationId xmlns:a16="http://schemas.microsoft.com/office/drawing/2014/main" id="{ACF0EBC9-C928-06E7-3DF9-90528474D093}"/>
+                <a16:creationId xmlns:a16="http://schemas.microsoft.com/office/drawing/2014/main" id="{2E1FE7B1-92A4-366D-F500-A708E07B0C88}"/>
               </a:ext>
             </a:extLst>
           </p:cNvPr>
@@ -19013,7 +19035,7 @@
     </p:spTree>
     <p:extLst>
       <p:ext uri="{BB962C8B-B14F-4D97-AF65-F5344CB8AC3E}">
-        <p14:creationId xmlns:p14="http://schemas.microsoft.com/office/powerpoint/2010/main" val="2037944172"/>
+        <p14:creationId xmlns:p14="http://schemas.microsoft.com/office/powerpoint/2010/main" val="2947304150"/>
       </p:ext>
     </p:extLst>
   </p:cSld>
@@ -19045,7 +19067,7 @@
           <p:cNvPr id="2" name="Rectangle 1">
             <a:extLst>
               <a:ext uri="{FF2B5EF4-FFF2-40B4-BE49-F238E27FC236}">
-                <a16:creationId xmlns:a16="http://schemas.microsoft.com/office/drawing/2014/main" id="{95206295-4BEE-D38D-A604-19CB544E606F}"/>
+                <a16:creationId xmlns:a16="http://schemas.microsoft.com/office/drawing/2014/main" id="{BD76708D-90E7-E028-0222-10D85C981BB2}"/>
               </a:ext>
             </a:extLst>
           </p:cNvPr>
@@ -19113,7 +19135,7 @@
           <p:cNvPr id="3" name="Rectangle 2">
             <a:extLst>
               <a:ext uri="{FF2B5EF4-FFF2-40B4-BE49-F238E27FC236}">
-                <a16:creationId xmlns:a16="http://schemas.microsoft.com/office/drawing/2014/main" id="{E8AAF33D-6450-8BD3-4C14-EEC7B1DA246A}"/>
+                <a16:creationId xmlns:a16="http://schemas.microsoft.com/office/drawing/2014/main" id="{1A87AA1C-D54C-71E6-AB6A-8A2E8CC2FD6F}"/>
               </a:ext>
             </a:extLst>
           </p:cNvPr>
@@ -19181,7 +19203,7 @@
           <p:cNvPr id="4" name="TextBox 3">
             <a:extLst>
               <a:ext uri="{FF2B5EF4-FFF2-40B4-BE49-F238E27FC236}">
-                <a16:creationId xmlns:a16="http://schemas.microsoft.com/office/drawing/2014/main" id="{93B4557F-D9BE-5497-B40F-6817872BDBC2}"/>
+                <a16:creationId xmlns:a16="http://schemas.microsoft.com/office/drawing/2014/main" id="{466DD115-0F18-0CB0-250E-A1ADB7C3FB47}"/>
               </a:ext>
             </a:extLst>
           </p:cNvPr>
@@ -19221,7 +19243,7 @@
           <p:cNvPr id="5" name="TextBox 4">
             <a:extLst>
               <a:ext uri="{FF2B5EF4-FFF2-40B4-BE49-F238E27FC236}">
-                <a16:creationId xmlns:a16="http://schemas.microsoft.com/office/drawing/2014/main" id="{769731A6-1D7E-F523-7F8F-78D416F84DE0}"/>
+                <a16:creationId xmlns:a16="http://schemas.microsoft.com/office/drawing/2014/main" id="{E1F2927C-9FB3-1934-7CE9-73DBC4CD33B1}"/>
               </a:ext>
             </a:extLst>
           </p:cNvPr>
@@ -19261,7 +19283,7 @@
           <p:cNvPr id="6" name="TextBox 5">
             <a:extLst>
               <a:ext uri="{FF2B5EF4-FFF2-40B4-BE49-F238E27FC236}">
-                <a16:creationId xmlns:a16="http://schemas.microsoft.com/office/drawing/2014/main" id="{6B77786C-0C99-9617-4E36-BC0FB58DDA0A}"/>
+                <a16:creationId xmlns:a16="http://schemas.microsoft.com/office/drawing/2014/main" id="{5628287D-8C48-8C82-302B-F8FBE7057729}"/>
               </a:ext>
             </a:extLst>
           </p:cNvPr>
@@ -19354,7 +19376,7 @@
           <p:cNvPr id="7" name="Rectangle 6">
             <a:extLst>
               <a:ext uri="{FF2B5EF4-FFF2-40B4-BE49-F238E27FC236}">
-                <a16:creationId xmlns:a16="http://schemas.microsoft.com/office/drawing/2014/main" id="{19601672-A861-7801-E16B-DEAB6050263B}"/>
+                <a16:creationId xmlns:a16="http://schemas.microsoft.com/office/drawing/2014/main" id="{735F7425-23E6-B14F-FC4E-2318B843ACA6}"/>
               </a:ext>
             </a:extLst>
           </p:cNvPr>
@@ -19408,7 +19430,7 @@
           <p:cNvPr id="8" name="TextBox 7">
             <a:extLst>
               <a:ext uri="{FF2B5EF4-FFF2-40B4-BE49-F238E27FC236}">
-                <a16:creationId xmlns:a16="http://schemas.microsoft.com/office/drawing/2014/main" id="{07B9A0BC-5FFB-3472-07C2-5EE99375A686}"/>
+                <a16:creationId xmlns:a16="http://schemas.microsoft.com/office/drawing/2014/main" id="{D60BFFCA-4703-021C-3BF1-89206FA2166D}"/>
               </a:ext>
             </a:extLst>
           </p:cNvPr>
@@ -19482,7 +19504,7 @@
                 </a:solidFill>
                 <a:latin typeface="Cascadia Mono" panose="020B0609020000020004" pitchFamily="49" charset="0"/>
               </a:rPr>
-              <a:t>| where FileName has "gsecdump" or Title has_any ("Vigorf", "malware")</a:t>
+              <a:t>| where FileName has "gsecdump" or Title has "Vigorf"</a:t>
             </a:r>
           </a:p>
           <a:p>
@@ -19503,7 +19525,7 @@
           <p:cNvPr id="9" name="Rectangle 8">
             <a:extLst>
               <a:ext uri="{FF2B5EF4-FFF2-40B4-BE49-F238E27FC236}">
-                <a16:creationId xmlns:a16="http://schemas.microsoft.com/office/drawing/2014/main" id="{2EB7E299-492D-8DC3-3DB4-DBC10054449F}"/>
+                <a16:creationId xmlns:a16="http://schemas.microsoft.com/office/drawing/2014/main" id="{E922BB32-B314-879C-3BC0-87DDBA6D0D50}"/>
               </a:ext>
             </a:extLst>
           </p:cNvPr>
@@ -19557,7 +19579,7 @@
           <p:cNvPr id="10" name="TextBox 9">
             <a:extLst>
               <a:ext uri="{FF2B5EF4-FFF2-40B4-BE49-F238E27FC236}">
-                <a16:creationId xmlns:a16="http://schemas.microsoft.com/office/drawing/2014/main" id="{3BB48F0A-A8D5-83D4-88DA-DC40405EF35A}"/>
+                <a16:creationId xmlns:a16="http://schemas.microsoft.com/office/drawing/2014/main" id="{4A393A7D-63F9-9F4A-5AA8-104CBDF79BA5}"/>
               </a:ext>
             </a:extLst>
           </p:cNvPr>
@@ -19595,7 +19617,7 @@
     </p:spTree>
     <p:extLst>
       <p:ext uri="{BB962C8B-B14F-4D97-AF65-F5344CB8AC3E}">
-        <p14:creationId xmlns:p14="http://schemas.microsoft.com/office/powerpoint/2010/main" val="3110202244"/>
+        <p14:creationId xmlns:p14="http://schemas.microsoft.com/office/powerpoint/2010/main" val="3484045855"/>
       </p:ext>
     </p:extLst>
   </p:cSld>
@@ -19627,7 +19649,7 @@
           <p:cNvPr id="2" name="Rectangle 1">
             <a:extLst>
               <a:ext uri="{FF2B5EF4-FFF2-40B4-BE49-F238E27FC236}">
-                <a16:creationId xmlns:a16="http://schemas.microsoft.com/office/drawing/2014/main" id="{183AD587-1E20-0CD6-38F9-A2D7582246BF}"/>
+                <a16:creationId xmlns:a16="http://schemas.microsoft.com/office/drawing/2014/main" id="{DB2EE808-2C27-3C62-0C8E-34661BCDD9E1}"/>
               </a:ext>
             </a:extLst>
           </p:cNvPr>
@@ -19695,7 +19717,7 @@
           <p:cNvPr id="3" name="Rectangle 2">
             <a:extLst>
               <a:ext uri="{FF2B5EF4-FFF2-40B4-BE49-F238E27FC236}">
-                <a16:creationId xmlns:a16="http://schemas.microsoft.com/office/drawing/2014/main" id="{6129547D-D144-D2A8-98E9-58B61021B1C5}"/>
+                <a16:creationId xmlns:a16="http://schemas.microsoft.com/office/drawing/2014/main" id="{1A4334E6-9C3B-D6E7-0FD2-C758AD803B47}"/>
               </a:ext>
             </a:extLst>
           </p:cNvPr>
@@ -19763,7 +19785,7 @@
           <p:cNvPr id="4" name="TextBox 3">
             <a:extLst>
               <a:ext uri="{FF2B5EF4-FFF2-40B4-BE49-F238E27FC236}">
-                <a16:creationId xmlns:a16="http://schemas.microsoft.com/office/drawing/2014/main" id="{45225952-7D09-16BB-3C47-D88ED552E949}"/>
+                <a16:creationId xmlns:a16="http://schemas.microsoft.com/office/drawing/2014/main" id="{3D4F611D-010F-DC05-3438-02EC24973BF8}"/>
               </a:ext>
             </a:extLst>
           </p:cNvPr>
@@ -19803,7 +19825,7 @@
           <p:cNvPr id="5" name="TextBox 4">
             <a:extLst>
               <a:ext uri="{FF2B5EF4-FFF2-40B4-BE49-F238E27FC236}">
-                <a16:creationId xmlns:a16="http://schemas.microsoft.com/office/drawing/2014/main" id="{84C8EDD8-5472-B367-0281-4B02FB96B646}"/>
+                <a16:creationId xmlns:a16="http://schemas.microsoft.com/office/drawing/2014/main" id="{3E1A677F-D289-4535-E8AF-DA6CC8EF09FF}"/>
               </a:ext>
             </a:extLst>
           </p:cNvPr>
@@ -19843,7 +19865,7 @@
           <p:cNvPr id="6" name="TextBox 5">
             <a:extLst>
               <a:ext uri="{FF2B5EF4-FFF2-40B4-BE49-F238E27FC236}">
-                <a16:creationId xmlns:a16="http://schemas.microsoft.com/office/drawing/2014/main" id="{54F91625-6E35-E57A-8543-77BB77A6C414}"/>
+                <a16:creationId xmlns:a16="http://schemas.microsoft.com/office/drawing/2014/main" id="{125BD3DA-7113-2482-8332-03D82372C9C6}"/>
               </a:ext>
             </a:extLst>
           </p:cNvPr>
@@ -19883,7 +19905,7 @@
           <p:cNvPr id="7" name="Rectangle 6">
             <a:extLst>
               <a:ext uri="{FF2B5EF4-FFF2-40B4-BE49-F238E27FC236}">
-                <a16:creationId xmlns:a16="http://schemas.microsoft.com/office/drawing/2014/main" id="{273E24A9-FB61-95D9-66FF-04790B304C39}"/>
+                <a16:creationId xmlns:a16="http://schemas.microsoft.com/office/drawing/2014/main" id="{EA77D2CD-564E-ECFF-6A48-7C85F7380A53}"/>
               </a:ext>
             </a:extLst>
           </p:cNvPr>
@@ -19937,7 +19959,7 @@
           <p:cNvPr id="8" name="TextBox 7">
             <a:extLst>
               <a:ext uri="{FF2B5EF4-FFF2-40B4-BE49-F238E27FC236}">
-                <a16:creationId xmlns:a16="http://schemas.microsoft.com/office/drawing/2014/main" id="{B5338BFD-D3EB-ACD8-8895-373EC34D1A14}"/>
+                <a16:creationId xmlns:a16="http://schemas.microsoft.com/office/drawing/2014/main" id="{D5332E00-F910-B70F-402B-6EC2D6C03140}"/>
               </a:ext>
             </a:extLst>
           </p:cNvPr>
@@ -19977,7 +19999,7 @@
           <p:cNvPr id="9" name="TextBox 8">
             <a:extLst>
               <a:ext uri="{FF2B5EF4-FFF2-40B4-BE49-F238E27FC236}">
-                <a16:creationId xmlns:a16="http://schemas.microsoft.com/office/drawing/2014/main" id="{90861A0E-EDF0-38C4-76EB-4C27FC64E0F1}"/>
+                <a16:creationId xmlns:a16="http://schemas.microsoft.com/office/drawing/2014/main" id="{076469B8-0D24-52B8-9D91-4039059B0BA8}"/>
               </a:ext>
             </a:extLst>
           </p:cNvPr>
@@ -20068,7 +20090,7 @@
     </p:spTree>
     <p:extLst>
       <p:ext uri="{BB962C8B-B14F-4D97-AF65-F5344CB8AC3E}">
-        <p14:creationId xmlns:p14="http://schemas.microsoft.com/office/powerpoint/2010/main" val="4222827370"/>
+        <p14:creationId xmlns:p14="http://schemas.microsoft.com/office/powerpoint/2010/main" val="458172066"/>
       </p:ext>
     </p:extLst>
   </p:cSld>
@@ -20100,7 +20122,7 @@
           <p:cNvPr id="2" name="Rectangle 1">
             <a:extLst>
               <a:ext uri="{FF2B5EF4-FFF2-40B4-BE49-F238E27FC236}">
-                <a16:creationId xmlns:a16="http://schemas.microsoft.com/office/drawing/2014/main" id="{5C0617FB-AE72-9C02-4F15-BD585D90C319}"/>
+                <a16:creationId xmlns:a16="http://schemas.microsoft.com/office/drawing/2014/main" id="{F8FFD954-7CA0-1D06-AABD-9A72B40BC2E8}"/>
               </a:ext>
             </a:extLst>
           </p:cNvPr>
@@ -20168,7 +20190,7 @@
           <p:cNvPr id="3" name="Rectangle 2">
             <a:extLst>
               <a:ext uri="{FF2B5EF4-FFF2-40B4-BE49-F238E27FC236}">
-                <a16:creationId xmlns:a16="http://schemas.microsoft.com/office/drawing/2014/main" id="{0BF3BC49-95C1-3AB3-4571-980CF0504B79}"/>
+                <a16:creationId xmlns:a16="http://schemas.microsoft.com/office/drawing/2014/main" id="{58295955-D7F8-46AB-DC21-5C8AAAF934DF}"/>
               </a:ext>
             </a:extLst>
           </p:cNvPr>
@@ -20236,7 +20258,7 @@
           <p:cNvPr id="4" name="TextBox 3">
             <a:extLst>
               <a:ext uri="{FF2B5EF4-FFF2-40B4-BE49-F238E27FC236}">
-                <a16:creationId xmlns:a16="http://schemas.microsoft.com/office/drawing/2014/main" id="{AB10A457-72A3-7DC2-1D45-692C56D59883}"/>
+                <a16:creationId xmlns:a16="http://schemas.microsoft.com/office/drawing/2014/main" id="{B1478C98-93F5-5E5D-72E8-DB4756204B73}"/>
               </a:ext>
             </a:extLst>
           </p:cNvPr>
@@ -20276,7 +20298,7 @@
           <p:cNvPr id="5" name="TextBox 4">
             <a:extLst>
               <a:ext uri="{FF2B5EF4-FFF2-40B4-BE49-F238E27FC236}">
-                <a16:creationId xmlns:a16="http://schemas.microsoft.com/office/drawing/2014/main" id="{4F7F4286-2D1C-D608-0710-61A73B316564}"/>
+                <a16:creationId xmlns:a16="http://schemas.microsoft.com/office/drawing/2014/main" id="{62437780-7A19-41BE-2619-BE990604D687}"/>
               </a:ext>
             </a:extLst>
           </p:cNvPr>
@@ -20316,7 +20338,7 @@
           <p:cNvPr id="6" name="TextBox 5">
             <a:extLst>
               <a:ext uri="{FF2B5EF4-FFF2-40B4-BE49-F238E27FC236}">
-                <a16:creationId xmlns:a16="http://schemas.microsoft.com/office/drawing/2014/main" id="{B3120A48-A2CE-10B1-AA1D-EBB66D11B640}"/>
+                <a16:creationId xmlns:a16="http://schemas.microsoft.com/office/drawing/2014/main" id="{A088DF6C-C0C9-D0B2-3103-A2B506FD3E7B}"/>
               </a:ext>
             </a:extLst>
           </p:cNvPr>
@@ -20409,7 +20431,7 @@
           <p:cNvPr id="7" name="Rectangle 6">
             <a:extLst>
               <a:ext uri="{FF2B5EF4-FFF2-40B4-BE49-F238E27FC236}">
-                <a16:creationId xmlns:a16="http://schemas.microsoft.com/office/drawing/2014/main" id="{0ACBAE83-8AC1-F840-3F47-2A11D1D4800A}"/>
+                <a16:creationId xmlns:a16="http://schemas.microsoft.com/office/drawing/2014/main" id="{282371C6-641F-47B2-4A7A-1E0AE3F72335}"/>
               </a:ext>
             </a:extLst>
           </p:cNvPr>
@@ -20463,7 +20485,7 @@
           <p:cNvPr id="8" name="TextBox 7">
             <a:extLst>
               <a:ext uri="{FF2B5EF4-FFF2-40B4-BE49-F238E27FC236}">
-                <a16:creationId xmlns:a16="http://schemas.microsoft.com/office/drawing/2014/main" id="{EEEF2D6D-5111-E14B-A072-6627087CBEA6}"/>
+                <a16:creationId xmlns:a16="http://schemas.microsoft.com/office/drawing/2014/main" id="{56C08A99-B959-1D2D-9EF3-A92848CBC239}"/>
               </a:ext>
             </a:extLst>
           </p:cNvPr>
@@ -20501,7 +20523,7 @@
     </p:spTree>
     <p:extLst>
       <p:ext uri="{BB962C8B-B14F-4D97-AF65-F5344CB8AC3E}">
-        <p14:creationId xmlns:p14="http://schemas.microsoft.com/office/powerpoint/2010/main" val="2379217498"/>
+        <p14:creationId xmlns:p14="http://schemas.microsoft.com/office/powerpoint/2010/main" val="3309398775"/>
       </p:ext>
     </p:extLst>
   </p:cSld>
@@ -20533,7 +20555,7 @@
           <p:cNvPr id="2" name="Rectangle 1">
             <a:extLst>
               <a:ext uri="{FF2B5EF4-FFF2-40B4-BE49-F238E27FC236}">
-                <a16:creationId xmlns:a16="http://schemas.microsoft.com/office/drawing/2014/main" id="{039FEFA9-AF01-1EE2-7D10-87611124F586}"/>
+                <a16:creationId xmlns:a16="http://schemas.microsoft.com/office/drawing/2014/main" id="{3B76BB55-FFA5-54B2-2E02-FE2BDA9F97AF}"/>
               </a:ext>
             </a:extLst>
           </p:cNvPr>
@@ -20601,7 +20623,7 @@
           <p:cNvPr id="3" name="Rectangle 2">
             <a:extLst>
               <a:ext uri="{FF2B5EF4-FFF2-40B4-BE49-F238E27FC236}">
-                <a16:creationId xmlns:a16="http://schemas.microsoft.com/office/drawing/2014/main" id="{B17D94AF-F29D-D159-3FEE-F8A12840E820}"/>
+                <a16:creationId xmlns:a16="http://schemas.microsoft.com/office/drawing/2014/main" id="{1B69E8D7-B779-1923-ACB2-22E71D5D05D6}"/>
               </a:ext>
             </a:extLst>
           </p:cNvPr>
@@ -20669,7 +20691,7 @@
           <p:cNvPr id="4" name="TextBox 3">
             <a:extLst>
               <a:ext uri="{FF2B5EF4-FFF2-40B4-BE49-F238E27FC236}">
-                <a16:creationId xmlns:a16="http://schemas.microsoft.com/office/drawing/2014/main" id="{23C7AA76-FDD4-17BE-D0D4-C8FE7F039DCF}"/>
+                <a16:creationId xmlns:a16="http://schemas.microsoft.com/office/drawing/2014/main" id="{F0F27ADA-17C8-20E8-AC43-7FBE37E40C88}"/>
               </a:ext>
             </a:extLst>
           </p:cNvPr>
@@ -20709,7 +20731,7 @@
           <p:cNvPr id="5" name="TextBox 4">
             <a:extLst>
               <a:ext uri="{FF2B5EF4-FFF2-40B4-BE49-F238E27FC236}">
-                <a16:creationId xmlns:a16="http://schemas.microsoft.com/office/drawing/2014/main" id="{C58AA75D-C88A-F5BE-0415-C4C4545CF1E3}"/>
+                <a16:creationId xmlns:a16="http://schemas.microsoft.com/office/drawing/2014/main" id="{B35ECBB8-C503-34E0-39F9-BC962400BE6A}"/>
               </a:ext>
             </a:extLst>
           </p:cNvPr>
@@ -20749,7 +20771,7 @@
           <p:cNvPr id="6" name="TextBox 5">
             <a:extLst>
               <a:ext uri="{FF2B5EF4-FFF2-40B4-BE49-F238E27FC236}">
-                <a16:creationId xmlns:a16="http://schemas.microsoft.com/office/drawing/2014/main" id="{5173E5A1-B036-7E39-D834-6E302D69E58B}"/>
+                <a16:creationId xmlns:a16="http://schemas.microsoft.com/office/drawing/2014/main" id="{A7A793B6-2E30-CC36-B0EE-C107E50C3806}"/>
               </a:ext>
             </a:extLst>
           </p:cNvPr>
@@ -20858,7 +20880,7 @@
           <p:cNvPr id="7" name="Rectangle 6">
             <a:extLst>
               <a:ext uri="{FF2B5EF4-FFF2-40B4-BE49-F238E27FC236}">
-                <a16:creationId xmlns:a16="http://schemas.microsoft.com/office/drawing/2014/main" id="{001FA321-14D2-BCBB-E0A5-0462F9CFEADE}"/>
+                <a16:creationId xmlns:a16="http://schemas.microsoft.com/office/drawing/2014/main" id="{74C7FCBC-F1E1-3BAC-08BB-A50E273241DF}"/>
               </a:ext>
             </a:extLst>
           </p:cNvPr>
@@ -20912,7 +20934,7 @@
           <p:cNvPr id="8" name="TextBox 7">
             <a:extLst>
               <a:ext uri="{FF2B5EF4-FFF2-40B4-BE49-F238E27FC236}">
-                <a16:creationId xmlns:a16="http://schemas.microsoft.com/office/drawing/2014/main" id="{F1BEC964-19B8-3644-A097-D3F56CA49B51}"/>
+                <a16:creationId xmlns:a16="http://schemas.microsoft.com/office/drawing/2014/main" id="{B84F7033-E87C-396A-DD11-6D0F1C4E264F}"/>
               </a:ext>
             </a:extLst>
           </p:cNvPr>
@@ -20922,7 +20944,7 @@
         <p:spPr>
           <a:xfrm>
             <a:off x="6324600" y="1549400"/>
-            <a:ext cx="4648200" cy="1502976"/>
+            <a:ext cx="4648200" cy="1703030"/>
           </a:xfrm>
           <a:prstGeom prst="rect">
             <a:avLst/>
@@ -20942,6 +20964,17 @@
                 </a:solidFill>
                 <a:latin typeface="Cascadia Mono" panose="020B0609020000020004" pitchFamily="49" charset="0"/>
               </a:rPr>
+              <a:t>let TargetDevice = "usm262346";</a:t>
+            </a:r>
+          </a:p>
+          <a:p>
+            <a:r>
+              <a:rPr lang="en-US" sz="1300">
+                <a:solidFill>
+                  <a:srgbClr val="0B1F3A"/>
+                </a:solidFill>
+                <a:latin typeface="Cascadia Mono" panose="020B0609020000020004" pitchFamily="49" charset="0"/>
+              </a:rPr>
               <a:t>DeviceProcessEvents</a:t>
             </a:r>
           </a:p>
@@ -21007,7 +21040,7 @@
           <p:cNvPr id="9" name="Rectangle 8">
             <a:extLst>
               <a:ext uri="{FF2B5EF4-FFF2-40B4-BE49-F238E27FC236}">
-                <a16:creationId xmlns:a16="http://schemas.microsoft.com/office/drawing/2014/main" id="{FAE03E2F-9CF5-5DF4-4927-37ECACEA2C9A}"/>
+                <a16:creationId xmlns:a16="http://schemas.microsoft.com/office/drawing/2014/main" id="{3112CE03-32DE-765F-6E7E-76B34C8217CF}"/>
               </a:ext>
             </a:extLst>
           </p:cNvPr>
@@ -21061,7 +21094,7 @@
           <p:cNvPr id="10" name="TextBox 9">
             <a:extLst>
               <a:ext uri="{FF2B5EF4-FFF2-40B4-BE49-F238E27FC236}">
-                <a16:creationId xmlns:a16="http://schemas.microsoft.com/office/drawing/2014/main" id="{704B35E2-F710-BBED-CE48-1BC70FE58E60}"/>
+                <a16:creationId xmlns:a16="http://schemas.microsoft.com/office/drawing/2014/main" id="{7BAAB162-FEB5-49DF-483C-055403C469F1}"/>
               </a:ext>
             </a:extLst>
           </p:cNvPr>
@@ -21099,7 +21132,7 @@
     </p:spTree>
     <p:extLst>
       <p:ext uri="{BB962C8B-B14F-4D97-AF65-F5344CB8AC3E}">
-        <p14:creationId xmlns:p14="http://schemas.microsoft.com/office/powerpoint/2010/main" val="1527428465"/>
+        <p14:creationId xmlns:p14="http://schemas.microsoft.com/office/powerpoint/2010/main" val="357909270"/>
       </p:ext>
     </p:extLst>
   </p:cSld>
@@ -21131,7 +21164,7 @@
           <p:cNvPr id="2" name="Rectangle 1">
             <a:extLst>
               <a:ext uri="{FF2B5EF4-FFF2-40B4-BE49-F238E27FC236}">
-                <a16:creationId xmlns:a16="http://schemas.microsoft.com/office/drawing/2014/main" id="{B26BF90A-0604-5335-B5AD-F680B773C36A}"/>
+                <a16:creationId xmlns:a16="http://schemas.microsoft.com/office/drawing/2014/main" id="{EC1B1613-01F2-0E09-9E68-5E7DC7809CC2}"/>
               </a:ext>
             </a:extLst>
           </p:cNvPr>
@@ -21199,7 +21232,7 @@
           <p:cNvPr id="3" name="Rectangle 2">
             <a:extLst>
               <a:ext uri="{FF2B5EF4-FFF2-40B4-BE49-F238E27FC236}">
-                <a16:creationId xmlns:a16="http://schemas.microsoft.com/office/drawing/2014/main" id="{2AF17240-20D5-42B6-9742-50A082779962}"/>
+                <a16:creationId xmlns:a16="http://schemas.microsoft.com/office/drawing/2014/main" id="{68D69AEE-80A9-0BA3-69F4-751DFF705B48}"/>
               </a:ext>
             </a:extLst>
           </p:cNvPr>
@@ -21267,7 +21300,7 @@
           <p:cNvPr id="4" name="TextBox 3">
             <a:extLst>
               <a:ext uri="{FF2B5EF4-FFF2-40B4-BE49-F238E27FC236}">
-                <a16:creationId xmlns:a16="http://schemas.microsoft.com/office/drawing/2014/main" id="{EA02EB6E-0216-8FBF-12E0-2650B0EDE0E1}"/>
+                <a16:creationId xmlns:a16="http://schemas.microsoft.com/office/drawing/2014/main" id="{630A456B-22C4-4C98-EF7F-1CE2E082FD22}"/>
               </a:ext>
             </a:extLst>
           </p:cNvPr>
@@ -21307,7 +21340,7 @@
           <p:cNvPr id="5" name="TextBox 4">
             <a:extLst>
               <a:ext uri="{FF2B5EF4-FFF2-40B4-BE49-F238E27FC236}">
-                <a16:creationId xmlns:a16="http://schemas.microsoft.com/office/drawing/2014/main" id="{EEF4F28F-B97C-B0EA-43EF-61E218071161}"/>
+                <a16:creationId xmlns:a16="http://schemas.microsoft.com/office/drawing/2014/main" id="{2D3AA216-157D-A98E-42AC-B0D108B814DB}"/>
               </a:ext>
             </a:extLst>
           </p:cNvPr>
@@ -21347,7 +21380,7 @@
           <p:cNvPr id="6" name="TextBox 5">
             <a:extLst>
               <a:ext uri="{FF2B5EF4-FFF2-40B4-BE49-F238E27FC236}">
-                <a16:creationId xmlns:a16="http://schemas.microsoft.com/office/drawing/2014/main" id="{8ECB3977-10F2-280F-5AF1-A98FACBF23FE}"/>
+                <a16:creationId xmlns:a16="http://schemas.microsoft.com/office/drawing/2014/main" id="{CB33AEF0-324B-AE20-2329-070EB757328D}"/>
               </a:ext>
             </a:extLst>
           </p:cNvPr>
@@ -21440,7 +21473,7 @@
           <p:cNvPr id="7" name="Rectangle 6">
             <a:extLst>
               <a:ext uri="{FF2B5EF4-FFF2-40B4-BE49-F238E27FC236}">
-                <a16:creationId xmlns:a16="http://schemas.microsoft.com/office/drawing/2014/main" id="{8EDDB359-C04F-4BA7-0C08-FD9CF33E4D0B}"/>
+                <a16:creationId xmlns:a16="http://schemas.microsoft.com/office/drawing/2014/main" id="{B0ADCD4A-5A5C-23F0-43C1-2F81DE1134F4}"/>
               </a:ext>
             </a:extLst>
           </p:cNvPr>
@@ -21494,7 +21527,7 @@
           <p:cNvPr id="8" name="TextBox 7">
             <a:extLst>
               <a:ext uri="{FF2B5EF4-FFF2-40B4-BE49-F238E27FC236}">
-                <a16:creationId xmlns:a16="http://schemas.microsoft.com/office/drawing/2014/main" id="{0B0EC9D1-DFE8-94DE-8F30-08D84D1F658E}"/>
+                <a16:creationId xmlns:a16="http://schemas.microsoft.com/office/drawing/2014/main" id="{2BD6FB21-A017-CEC5-5169-EF63FAF76B38}"/>
               </a:ext>
             </a:extLst>
           </p:cNvPr>
@@ -21589,7 +21622,7 @@
           <p:cNvPr id="9" name="Rectangle 8">
             <a:extLst>
               <a:ext uri="{FF2B5EF4-FFF2-40B4-BE49-F238E27FC236}">
-                <a16:creationId xmlns:a16="http://schemas.microsoft.com/office/drawing/2014/main" id="{AF6A2E3E-4AEE-40E6-C41D-62DD552A0C54}"/>
+                <a16:creationId xmlns:a16="http://schemas.microsoft.com/office/drawing/2014/main" id="{9EEC9361-29E8-7DC5-D1DA-45E36EDD9CB9}"/>
               </a:ext>
             </a:extLst>
           </p:cNvPr>
@@ -21643,7 +21676,7 @@
           <p:cNvPr id="10" name="TextBox 9">
             <a:extLst>
               <a:ext uri="{FF2B5EF4-FFF2-40B4-BE49-F238E27FC236}">
-                <a16:creationId xmlns:a16="http://schemas.microsoft.com/office/drawing/2014/main" id="{2B403928-CC24-6CA4-CD2E-165FF2C66B92}"/>
+                <a16:creationId xmlns:a16="http://schemas.microsoft.com/office/drawing/2014/main" id="{FE077FEF-2D31-7686-CF26-B6FBD250C8CB}"/>
               </a:ext>
             </a:extLst>
           </p:cNvPr>
@@ -21681,7 +21714,7 @@
     </p:spTree>
     <p:extLst>
       <p:ext uri="{BB962C8B-B14F-4D97-AF65-F5344CB8AC3E}">
-        <p14:creationId xmlns:p14="http://schemas.microsoft.com/office/powerpoint/2010/main" val="1511144655"/>
+        <p14:creationId xmlns:p14="http://schemas.microsoft.com/office/powerpoint/2010/main" val="1789934767"/>
       </p:ext>
     </p:extLst>
   </p:cSld>
@@ -21713,7 +21746,7 @@
           <p:cNvPr id="2" name="Rectangle 1">
             <a:extLst>
               <a:ext uri="{FF2B5EF4-FFF2-40B4-BE49-F238E27FC236}">
-                <a16:creationId xmlns:a16="http://schemas.microsoft.com/office/drawing/2014/main" id="{3B7AD3F1-1441-E30C-7BE8-6682EF5F54DA}"/>
+                <a16:creationId xmlns:a16="http://schemas.microsoft.com/office/drawing/2014/main" id="{24273F6B-F7FB-9670-B295-89C8AB24B38C}"/>
               </a:ext>
             </a:extLst>
           </p:cNvPr>
@@ -21781,7 +21814,7 @@
           <p:cNvPr id="3" name="Rectangle 2">
             <a:extLst>
               <a:ext uri="{FF2B5EF4-FFF2-40B4-BE49-F238E27FC236}">
-                <a16:creationId xmlns:a16="http://schemas.microsoft.com/office/drawing/2014/main" id="{C5B32895-F585-1D19-E322-C306485C535A}"/>
+                <a16:creationId xmlns:a16="http://schemas.microsoft.com/office/drawing/2014/main" id="{2836F97B-CE17-534B-85CA-8EC3B812C2A6}"/>
               </a:ext>
             </a:extLst>
           </p:cNvPr>
@@ -21849,7 +21882,7 @@
           <p:cNvPr id="4" name="TextBox 3">
             <a:extLst>
               <a:ext uri="{FF2B5EF4-FFF2-40B4-BE49-F238E27FC236}">
-                <a16:creationId xmlns:a16="http://schemas.microsoft.com/office/drawing/2014/main" id="{30B1D2A6-054F-4695-49FA-9653365FF1DD}"/>
+                <a16:creationId xmlns:a16="http://schemas.microsoft.com/office/drawing/2014/main" id="{14C8E5D2-530B-BABC-2033-D43D6466B188}"/>
               </a:ext>
             </a:extLst>
           </p:cNvPr>
@@ -21889,7 +21922,7 @@
           <p:cNvPr id="5" name="TextBox 4">
             <a:extLst>
               <a:ext uri="{FF2B5EF4-FFF2-40B4-BE49-F238E27FC236}">
-                <a16:creationId xmlns:a16="http://schemas.microsoft.com/office/drawing/2014/main" id="{C339DDB4-346C-195A-6F71-18FD4AC204DC}"/>
+                <a16:creationId xmlns:a16="http://schemas.microsoft.com/office/drawing/2014/main" id="{3F0E6168-D8CA-0110-FACC-DC778929B06E}"/>
               </a:ext>
             </a:extLst>
           </p:cNvPr>
@@ -21929,7 +21962,7 @@
           <p:cNvPr id="6" name="TextBox 5">
             <a:extLst>
               <a:ext uri="{FF2B5EF4-FFF2-40B4-BE49-F238E27FC236}">
-                <a16:creationId xmlns:a16="http://schemas.microsoft.com/office/drawing/2014/main" id="{1CF243C9-B720-5713-08F8-FDEA3CF54816}"/>
+                <a16:creationId xmlns:a16="http://schemas.microsoft.com/office/drawing/2014/main" id="{70CC9CD4-8F3B-80CB-F4DE-B40774772AC5}"/>
               </a:ext>
             </a:extLst>
           </p:cNvPr>
@@ -21969,7 +22002,7 @@
           <p:cNvPr id="7" name="Rectangle 6">
             <a:extLst>
               <a:ext uri="{FF2B5EF4-FFF2-40B4-BE49-F238E27FC236}">
-                <a16:creationId xmlns:a16="http://schemas.microsoft.com/office/drawing/2014/main" id="{6D5BFD95-B67B-8057-1313-0386F0C50576}"/>
+                <a16:creationId xmlns:a16="http://schemas.microsoft.com/office/drawing/2014/main" id="{512F0D03-38B7-110E-C843-C1997AE298DF}"/>
               </a:ext>
             </a:extLst>
           </p:cNvPr>
@@ -22023,7 +22056,7 @@
           <p:cNvPr id="8" name="TextBox 7">
             <a:extLst>
               <a:ext uri="{FF2B5EF4-FFF2-40B4-BE49-F238E27FC236}">
-                <a16:creationId xmlns:a16="http://schemas.microsoft.com/office/drawing/2014/main" id="{F95C04F6-E6CE-B665-2DE2-3C6C0BA5A959}"/>
+                <a16:creationId xmlns:a16="http://schemas.microsoft.com/office/drawing/2014/main" id="{3D8FCF7C-8DF7-B17A-C6B5-15C98EE7294E}"/>
               </a:ext>
             </a:extLst>
           </p:cNvPr>
@@ -22063,7 +22096,7 @@
           <p:cNvPr id="9" name="TextBox 8">
             <a:extLst>
               <a:ext uri="{FF2B5EF4-FFF2-40B4-BE49-F238E27FC236}">
-                <a16:creationId xmlns:a16="http://schemas.microsoft.com/office/drawing/2014/main" id="{131ADC5B-1F96-DEB9-3324-6A5A8DB730C7}"/>
+                <a16:creationId xmlns:a16="http://schemas.microsoft.com/office/drawing/2014/main" id="{6B4C97B1-F2FF-470C-64F3-BF4C835E4A34}"/>
               </a:ext>
             </a:extLst>
           </p:cNvPr>
@@ -22154,7 +22187,7 @@
     </p:spTree>
     <p:extLst>
       <p:ext uri="{BB962C8B-B14F-4D97-AF65-F5344CB8AC3E}">
-        <p14:creationId xmlns:p14="http://schemas.microsoft.com/office/powerpoint/2010/main" val="662415912"/>
+        <p14:creationId xmlns:p14="http://schemas.microsoft.com/office/powerpoint/2010/main" val="3423525907"/>
       </p:ext>
     </p:extLst>
   </p:cSld>
@@ -22186,7 +22219,7 @@
           <p:cNvPr id="2" name="Rectangle 1">
             <a:extLst>
               <a:ext uri="{FF2B5EF4-FFF2-40B4-BE49-F238E27FC236}">
-                <a16:creationId xmlns:a16="http://schemas.microsoft.com/office/drawing/2014/main" id="{35729C3B-13DC-6B88-BB3D-814B02ED2A7C}"/>
+                <a16:creationId xmlns:a16="http://schemas.microsoft.com/office/drawing/2014/main" id="{3855BB7C-73CF-9FA6-F404-1A577BA34D66}"/>
               </a:ext>
             </a:extLst>
           </p:cNvPr>
@@ -22254,7 +22287,7 @@
           <p:cNvPr id="3" name="Rectangle 2">
             <a:extLst>
               <a:ext uri="{FF2B5EF4-FFF2-40B4-BE49-F238E27FC236}">
-                <a16:creationId xmlns:a16="http://schemas.microsoft.com/office/drawing/2014/main" id="{82BD6F79-3671-2E36-84EA-8C74DF37E486}"/>
+                <a16:creationId xmlns:a16="http://schemas.microsoft.com/office/drawing/2014/main" id="{87236DA5-60CB-6EF5-F030-F2AA4EE0683E}"/>
               </a:ext>
             </a:extLst>
           </p:cNvPr>
@@ -22322,7 +22355,7 @@
           <p:cNvPr id="4" name="TextBox 3">
             <a:extLst>
               <a:ext uri="{FF2B5EF4-FFF2-40B4-BE49-F238E27FC236}">
-                <a16:creationId xmlns:a16="http://schemas.microsoft.com/office/drawing/2014/main" id="{BE003222-A023-3B9E-3844-85CB1F7A9DD3}"/>
+                <a16:creationId xmlns:a16="http://schemas.microsoft.com/office/drawing/2014/main" id="{8664FB30-DF58-96A4-FF5F-444B05BCF341}"/>
               </a:ext>
             </a:extLst>
           </p:cNvPr>
@@ -22362,7 +22395,7 @@
           <p:cNvPr id="5" name="TextBox 4">
             <a:extLst>
               <a:ext uri="{FF2B5EF4-FFF2-40B4-BE49-F238E27FC236}">
-                <a16:creationId xmlns:a16="http://schemas.microsoft.com/office/drawing/2014/main" id="{9CF7B698-F7BF-4B64-C55C-28780B16D747}"/>
+                <a16:creationId xmlns:a16="http://schemas.microsoft.com/office/drawing/2014/main" id="{D62CCE91-368A-0331-E255-048ECA374FC4}"/>
               </a:ext>
             </a:extLst>
           </p:cNvPr>
@@ -22402,7 +22435,7 @@
           <p:cNvPr id="6" name="TextBox 5">
             <a:extLst>
               <a:ext uri="{FF2B5EF4-FFF2-40B4-BE49-F238E27FC236}">
-                <a16:creationId xmlns:a16="http://schemas.microsoft.com/office/drawing/2014/main" id="{6AF27ADE-C92B-3D7A-BAD5-7901213D404E}"/>
+                <a16:creationId xmlns:a16="http://schemas.microsoft.com/office/drawing/2014/main" id="{0AAA524E-2BC8-CC6A-6F25-5D1527A5A0B2}"/>
               </a:ext>
             </a:extLst>
           </p:cNvPr>
@@ -22495,7 +22528,7 @@
           <p:cNvPr id="7" name="Rectangle 6">
             <a:extLst>
               <a:ext uri="{FF2B5EF4-FFF2-40B4-BE49-F238E27FC236}">
-                <a16:creationId xmlns:a16="http://schemas.microsoft.com/office/drawing/2014/main" id="{E8C8BEAA-3C1B-26BB-D9FE-C6D58D4FBDDA}"/>
+                <a16:creationId xmlns:a16="http://schemas.microsoft.com/office/drawing/2014/main" id="{F2E9DDD3-ECFD-2578-0AE7-1B6D8CB86FCB}"/>
               </a:ext>
             </a:extLst>
           </p:cNvPr>
@@ -22549,7 +22582,7 @@
           <p:cNvPr id="8" name="TextBox 7">
             <a:extLst>
               <a:ext uri="{FF2B5EF4-FFF2-40B4-BE49-F238E27FC236}">
-                <a16:creationId xmlns:a16="http://schemas.microsoft.com/office/drawing/2014/main" id="{7F1C0DA4-4778-84E0-569A-8A0946D37AF2}"/>
+                <a16:creationId xmlns:a16="http://schemas.microsoft.com/office/drawing/2014/main" id="{43733B39-601B-7BA5-61E6-31A380F52C2E}"/>
               </a:ext>
             </a:extLst>
           </p:cNvPr>
@@ -22587,7 +22620,7 @@
     </p:spTree>
     <p:extLst>
       <p:ext uri="{BB962C8B-B14F-4D97-AF65-F5344CB8AC3E}">
-        <p14:creationId xmlns:p14="http://schemas.microsoft.com/office/powerpoint/2010/main" val="2493516286"/>
+        <p14:creationId xmlns:p14="http://schemas.microsoft.com/office/powerpoint/2010/main" val="203997446"/>
       </p:ext>
     </p:extLst>
   </p:cSld>
@@ -22619,7 +22652,7 @@
           <p:cNvPr id="2" name="Rectangle 1">
             <a:extLst>
               <a:ext uri="{FF2B5EF4-FFF2-40B4-BE49-F238E27FC236}">
-                <a16:creationId xmlns:a16="http://schemas.microsoft.com/office/drawing/2014/main" id="{483ABB40-DCD0-720D-5603-AF2B716ED176}"/>
+                <a16:creationId xmlns:a16="http://schemas.microsoft.com/office/drawing/2014/main" id="{C20B9BA8-3192-057B-75B3-E18A46AEF71D}"/>
               </a:ext>
             </a:extLst>
           </p:cNvPr>
@@ -22687,7 +22720,7 @@
           <p:cNvPr id="3" name="Rectangle 2">
             <a:extLst>
               <a:ext uri="{FF2B5EF4-FFF2-40B4-BE49-F238E27FC236}">
-                <a16:creationId xmlns:a16="http://schemas.microsoft.com/office/drawing/2014/main" id="{68234839-C030-4CEA-6669-C2ED37E61B01}"/>
+                <a16:creationId xmlns:a16="http://schemas.microsoft.com/office/drawing/2014/main" id="{1FC2B4D1-CF52-7A02-2CC7-1EAB91A3A7C6}"/>
               </a:ext>
             </a:extLst>
           </p:cNvPr>
@@ -22755,7 +22788,7 @@
           <p:cNvPr id="4" name="TextBox 3">
             <a:extLst>
               <a:ext uri="{FF2B5EF4-FFF2-40B4-BE49-F238E27FC236}">
-                <a16:creationId xmlns:a16="http://schemas.microsoft.com/office/drawing/2014/main" id="{8C46FD87-0FF5-F026-5761-5D83772D8568}"/>
+                <a16:creationId xmlns:a16="http://schemas.microsoft.com/office/drawing/2014/main" id="{521371E5-C62E-D3E5-CA81-50C03FC4C497}"/>
               </a:ext>
             </a:extLst>
           </p:cNvPr>
@@ -22795,7 +22828,7 @@
           <p:cNvPr id="5" name="TextBox 4">
             <a:extLst>
               <a:ext uri="{FF2B5EF4-FFF2-40B4-BE49-F238E27FC236}">
-                <a16:creationId xmlns:a16="http://schemas.microsoft.com/office/drawing/2014/main" id="{9672894C-BCCA-3B01-8F0E-023E02DD798F}"/>
+                <a16:creationId xmlns:a16="http://schemas.microsoft.com/office/drawing/2014/main" id="{E4D5A881-D368-AB73-AE23-19362835D9CF}"/>
               </a:ext>
             </a:extLst>
           </p:cNvPr>
@@ -22835,7 +22868,7 @@
           <p:cNvPr id="6" name="TextBox 5">
             <a:extLst>
               <a:ext uri="{FF2B5EF4-FFF2-40B4-BE49-F238E27FC236}">
-                <a16:creationId xmlns:a16="http://schemas.microsoft.com/office/drawing/2014/main" id="{07721CD8-0F79-DDB1-46E9-79EB23B992BD}"/>
+                <a16:creationId xmlns:a16="http://schemas.microsoft.com/office/drawing/2014/main" id="{A6031ACD-4785-45A6-686D-75788B7C5D42}"/>
               </a:ext>
             </a:extLst>
           </p:cNvPr>
@@ -22928,7 +22961,7 @@
           <p:cNvPr id="7" name="Rectangle 6">
             <a:extLst>
               <a:ext uri="{FF2B5EF4-FFF2-40B4-BE49-F238E27FC236}">
-                <a16:creationId xmlns:a16="http://schemas.microsoft.com/office/drawing/2014/main" id="{B6BF7CF5-69ED-A41E-C38D-9C150E417B98}"/>
+                <a16:creationId xmlns:a16="http://schemas.microsoft.com/office/drawing/2014/main" id="{70E4D9CA-0FDE-C8A0-17C4-03E6AFFA1248}"/>
               </a:ext>
             </a:extLst>
           </p:cNvPr>
@@ -22982,7 +23015,7 @@
           <p:cNvPr id="8" name="TextBox 7">
             <a:extLst>
               <a:ext uri="{FF2B5EF4-FFF2-40B4-BE49-F238E27FC236}">
-                <a16:creationId xmlns:a16="http://schemas.microsoft.com/office/drawing/2014/main" id="{E094B321-AE9D-D9D5-77B0-62EC11C1577E}"/>
+                <a16:creationId xmlns:a16="http://schemas.microsoft.com/office/drawing/2014/main" id="{99E83DC4-1ECF-C143-1082-259D88DFEE59}"/>
               </a:ext>
             </a:extLst>
           </p:cNvPr>
@@ -23077,7 +23110,7 @@
           <p:cNvPr id="9" name="Rectangle 8">
             <a:extLst>
               <a:ext uri="{FF2B5EF4-FFF2-40B4-BE49-F238E27FC236}">
-                <a16:creationId xmlns:a16="http://schemas.microsoft.com/office/drawing/2014/main" id="{EEB73B47-C6E6-F264-315F-AC84AB0A0C3E}"/>
+                <a16:creationId xmlns:a16="http://schemas.microsoft.com/office/drawing/2014/main" id="{3D15F050-480C-9C6C-5D7E-3EAA91DEB0C6}"/>
               </a:ext>
             </a:extLst>
           </p:cNvPr>
@@ -23131,7 +23164,7 @@
           <p:cNvPr id="10" name="TextBox 9">
             <a:extLst>
               <a:ext uri="{FF2B5EF4-FFF2-40B4-BE49-F238E27FC236}">
-                <a16:creationId xmlns:a16="http://schemas.microsoft.com/office/drawing/2014/main" id="{CE674BAF-6C25-7FE5-4878-0A1FFD9E5C79}"/>
+                <a16:creationId xmlns:a16="http://schemas.microsoft.com/office/drawing/2014/main" id="{9843F257-74AA-564C-A486-6A7CDCEFEBCF}"/>
               </a:ext>
             </a:extLst>
           </p:cNvPr>
@@ -23169,7 +23202,7 @@
     </p:spTree>
     <p:extLst>
       <p:ext uri="{BB962C8B-B14F-4D97-AF65-F5344CB8AC3E}">
-        <p14:creationId xmlns:p14="http://schemas.microsoft.com/office/powerpoint/2010/main" val="4241077583"/>
+        <p14:creationId xmlns:p14="http://schemas.microsoft.com/office/powerpoint/2010/main" val="3216349872"/>
       </p:ext>
     </p:extLst>
   </p:cSld>
@@ -23201,7 +23234,7 @@
           <p:cNvPr id="2" name="Rectangle 1">
             <a:extLst>
               <a:ext uri="{FF2B5EF4-FFF2-40B4-BE49-F238E27FC236}">
-                <a16:creationId xmlns:a16="http://schemas.microsoft.com/office/drawing/2014/main" id="{9B8D4B5A-C9EF-16CE-39B6-43FD93DEC7A2}"/>
+                <a16:creationId xmlns:a16="http://schemas.microsoft.com/office/drawing/2014/main" id="{D389C307-97E7-D60A-32C1-126BD99B5848}"/>
               </a:ext>
             </a:extLst>
           </p:cNvPr>
@@ -23269,7 +23302,7 @@
           <p:cNvPr id="3" name="Rectangle 2">
             <a:extLst>
               <a:ext uri="{FF2B5EF4-FFF2-40B4-BE49-F238E27FC236}">
-                <a16:creationId xmlns:a16="http://schemas.microsoft.com/office/drawing/2014/main" id="{5C61C2CF-72C3-110E-0BFE-6CB1D9E8A071}"/>
+                <a16:creationId xmlns:a16="http://schemas.microsoft.com/office/drawing/2014/main" id="{E02B92D2-9DA1-F1B5-BC2F-F233DF211726}"/>
               </a:ext>
             </a:extLst>
           </p:cNvPr>
@@ -23337,7 +23370,7 @@
           <p:cNvPr id="4" name="TextBox 3">
             <a:extLst>
               <a:ext uri="{FF2B5EF4-FFF2-40B4-BE49-F238E27FC236}">
-                <a16:creationId xmlns:a16="http://schemas.microsoft.com/office/drawing/2014/main" id="{55A0276A-6F6F-E229-8F52-1D355DACF6E8}"/>
+                <a16:creationId xmlns:a16="http://schemas.microsoft.com/office/drawing/2014/main" id="{ED55C508-9FDF-3956-1BE5-EC3741D7B79B}"/>
               </a:ext>
             </a:extLst>
           </p:cNvPr>
@@ -23377,7 +23410,7 @@
           <p:cNvPr id="5" name="TextBox 4">
             <a:extLst>
               <a:ext uri="{FF2B5EF4-FFF2-40B4-BE49-F238E27FC236}">
-                <a16:creationId xmlns:a16="http://schemas.microsoft.com/office/drawing/2014/main" id="{CEC4E82E-B137-B2A4-8CBD-B041863CF1F1}"/>
+                <a16:creationId xmlns:a16="http://schemas.microsoft.com/office/drawing/2014/main" id="{DECC200A-3BFE-FFCF-80CF-66384884CA43}"/>
               </a:ext>
             </a:extLst>
           </p:cNvPr>
@@ -23417,7 +23450,7 @@
           <p:cNvPr id="6" name="TextBox 5">
             <a:extLst>
               <a:ext uri="{FF2B5EF4-FFF2-40B4-BE49-F238E27FC236}">
-                <a16:creationId xmlns:a16="http://schemas.microsoft.com/office/drawing/2014/main" id="{6B263581-E106-1E94-DDA6-E18F274DB3A8}"/>
+                <a16:creationId xmlns:a16="http://schemas.microsoft.com/office/drawing/2014/main" id="{1C034903-D43F-3A5E-A416-8E903DA1CDE3}"/>
               </a:ext>
             </a:extLst>
           </p:cNvPr>
@@ -23457,7 +23490,7 @@
           <p:cNvPr id="7" name="Rectangle 6">
             <a:extLst>
               <a:ext uri="{FF2B5EF4-FFF2-40B4-BE49-F238E27FC236}">
-                <a16:creationId xmlns:a16="http://schemas.microsoft.com/office/drawing/2014/main" id="{3F5426C5-6E15-DEEB-13EC-AF9DA7B11E0F}"/>
+                <a16:creationId xmlns:a16="http://schemas.microsoft.com/office/drawing/2014/main" id="{78168B20-F50B-DD94-D5B1-32CF02BD121F}"/>
               </a:ext>
             </a:extLst>
           </p:cNvPr>
@@ -23511,7 +23544,7 @@
           <p:cNvPr id="8" name="TextBox 7">
             <a:extLst>
               <a:ext uri="{FF2B5EF4-FFF2-40B4-BE49-F238E27FC236}">
-                <a16:creationId xmlns:a16="http://schemas.microsoft.com/office/drawing/2014/main" id="{9B3E16D7-67ED-EF76-EF69-238AC3F8DD6D}"/>
+                <a16:creationId xmlns:a16="http://schemas.microsoft.com/office/drawing/2014/main" id="{5DF3BE45-62F3-6590-9AAD-673B19FA9AFA}"/>
               </a:ext>
             </a:extLst>
           </p:cNvPr>
@@ -23551,7 +23584,7 @@
           <p:cNvPr id="9" name="TextBox 8">
             <a:extLst>
               <a:ext uri="{FF2B5EF4-FFF2-40B4-BE49-F238E27FC236}">
-                <a16:creationId xmlns:a16="http://schemas.microsoft.com/office/drawing/2014/main" id="{43A4D83C-70D7-3C3D-CAC6-1EB99467EB76}"/>
+                <a16:creationId xmlns:a16="http://schemas.microsoft.com/office/drawing/2014/main" id="{36CF4394-1064-65CE-B8E8-82FF8A7B0CC3}"/>
               </a:ext>
             </a:extLst>
           </p:cNvPr>
@@ -23642,7 +23675,7 @@
     </p:spTree>
     <p:extLst>
       <p:ext uri="{BB962C8B-B14F-4D97-AF65-F5344CB8AC3E}">
-        <p14:creationId xmlns:p14="http://schemas.microsoft.com/office/powerpoint/2010/main" val="2230590147"/>
+        <p14:creationId xmlns:p14="http://schemas.microsoft.com/office/powerpoint/2010/main" val="3622645412"/>
       </p:ext>
     </p:extLst>
   </p:cSld>
@@ -23674,7 +23707,7 @@
           <p:cNvPr id="2" name="Rectangle 1">
             <a:extLst>
               <a:ext uri="{FF2B5EF4-FFF2-40B4-BE49-F238E27FC236}">
-                <a16:creationId xmlns:a16="http://schemas.microsoft.com/office/drawing/2014/main" id="{EC9D0795-7DC1-437B-DB6D-C9CC380D4FD3}"/>
+                <a16:creationId xmlns:a16="http://schemas.microsoft.com/office/drawing/2014/main" id="{C4E048F5-E24F-18FD-AA5A-148F6D1B2125}"/>
               </a:ext>
             </a:extLst>
           </p:cNvPr>
@@ -23742,7 +23775,7 @@
           <p:cNvPr id="3" name="Rectangle 2">
             <a:extLst>
               <a:ext uri="{FF2B5EF4-FFF2-40B4-BE49-F238E27FC236}">
-                <a16:creationId xmlns:a16="http://schemas.microsoft.com/office/drawing/2014/main" id="{17E3A42E-4AF6-D752-2FFE-EF21108597E7}"/>
+                <a16:creationId xmlns:a16="http://schemas.microsoft.com/office/drawing/2014/main" id="{CB0E6EA1-F542-AC2A-98E2-EFFE8785349A}"/>
               </a:ext>
             </a:extLst>
           </p:cNvPr>
@@ -23810,7 +23843,7 @@
           <p:cNvPr id="4" name="TextBox 3">
             <a:extLst>
               <a:ext uri="{FF2B5EF4-FFF2-40B4-BE49-F238E27FC236}">
-                <a16:creationId xmlns:a16="http://schemas.microsoft.com/office/drawing/2014/main" id="{564D7C05-4F0E-5E76-E97B-8BA3C0BD1EE7}"/>
+                <a16:creationId xmlns:a16="http://schemas.microsoft.com/office/drawing/2014/main" id="{BAFAE72C-6048-9A2E-4BD6-F46F7220980C}"/>
               </a:ext>
             </a:extLst>
           </p:cNvPr>
@@ -23850,7 +23883,7 @@
           <p:cNvPr id="5" name="TextBox 4">
             <a:extLst>
               <a:ext uri="{FF2B5EF4-FFF2-40B4-BE49-F238E27FC236}">
-                <a16:creationId xmlns:a16="http://schemas.microsoft.com/office/drawing/2014/main" id="{E1F4752B-8522-80DB-0EB9-85F2F3E41CDF}"/>
+                <a16:creationId xmlns:a16="http://schemas.microsoft.com/office/drawing/2014/main" id="{3528FB75-9A5F-694A-7E8F-438A2BE51ED8}"/>
               </a:ext>
             </a:extLst>
           </p:cNvPr>
@@ -23890,7 +23923,7 @@
           <p:cNvPr id="6" name="TextBox 5">
             <a:extLst>
               <a:ext uri="{FF2B5EF4-FFF2-40B4-BE49-F238E27FC236}">
-                <a16:creationId xmlns:a16="http://schemas.microsoft.com/office/drawing/2014/main" id="{FFF3704F-FB3A-72F8-E9DB-CB6F8FB0A0B7}"/>
+                <a16:creationId xmlns:a16="http://schemas.microsoft.com/office/drawing/2014/main" id="{B77B1C6A-D8F5-23EE-4D95-C181C9EE7D77}"/>
               </a:ext>
             </a:extLst>
           </p:cNvPr>
@@ -23983,7 +24016,7 @@
           <p:cNvPr id="7" name="Rectangle 6">
             <a:extLst>
               <a:ext uri="{FF2B5EF4-FFF2-40B4-BE49-F238E27FC236}">
-                <a16:creationId xmlns:a16="http://schemas.microsoft.com/office/drawing/2014/main" id="{DAC8F131-3060-1FF8-C3EF-5F7E8444B9FB}"/>
+                <a16:creationId xmlns:a16="http://schemas.microsoft.com/office/drawing/2014/main" id="{0AB29142-EDE4-F82D-44F4-C0225369E493}"/>
               </a:ext>
             </a:extLst>
           </p:cNvPr>
@@ -24037,7 +24070,7 @@
           <p:cNvPr id="8" name="TextBox 7">
             <a:extLst>
               <a:ext uri="{FF2B5EF4-FFF2-40B4-BE49-F238E27FC236}">
-                <a16:creationId xmlns:a16="http://schemas.microsoft.com/office/drawing/2014/main" id="{0CBF51B5-5B19-0DD9-A0F0-C5E635319F53}"/>
+                <a16:creationId xmlns:a16="http://schemas.microsoft.com/office/drawing/2014/main" id="{D6530508-1627-923F-8331-197054F29042}"/>
               </a:ext>
             </a:extLst>
           </p:cNvPr>
@@ -24075,7 +24108,7 @@
     </p:spTree>
     <p:extLst>
       <p:ext uri="{BB962C8B-B14F-4D97-AF65-F5344CB8AC3E}">
-        <p14:creationId xmlns:p14="http://schemas.microsoft.com/office/powerpoint/2010/main" val="3589153357"/>
+        <p14:creationId xmlns:p14="http://schemas.microsoft.com/office/powerpoint/2010/main" val="3372375395"/>
       </p:ext>
     </p:extLst>
   </p:cSld>
@@ -24107,7 +24140,7 @@
           <p:cNvPr id="2" name="Rectangle 1">
             <a:extLst>
               <a:ext uri="{FF2B5EF4-FFF2-40B4-BE49-F238E27FC236}">
-                <a16:creationId xmlns:a16="http://schemas.microsoft.com/office/drawing/2014/main" id="{9DF50160-4AB3-9F0E-E628-55DB43055049}"/>
+                <a16:creationId xmlns:a16="http://schemas.microsoft.com/office/drawing/2014/main" id="{A008BB6F-57F8-E255-9A41-897300831FE4}"/>
               </a:ext>
             </a:extLst>
           </p:cNvPr>
@@ -24175,7 +24208,7 @@
           <p:cNvPr id="3" name="Rectangle 2">
             <a:extLst>
               <a:ext uri="{FF2B5EF4-FFF2-40B4-BE49-F238E27FC236}">
-                <a16:creationId xmlns:a16="http://schemas.microsoft.com/office/drawing/2014/main" id="{20141610-794E-EFBA-539D-E49BCA735CCC}"/>
+                <a16:creationId xmlns:a16="http://schemas.microsoft.com/office/drawing/2014/main" id="{2053B078-7DE1-6F9B-C536-B0AA4C26444C}"/>
               </a:ext>
             </a:extLst>
           </p:cNvPr>
@@ -24243,7 +24276,7 @@
           <p:cNvPr id="4" name="TextBox 3">
             <a:extLst>
               <a:ext uri="{FF2B5EF4-FFF2-40B4-BE49-F238E27FC236}">
-                <a16:creationId xmlns:a16="http://schemas.microsoft.com/office/drawing/2014/main" id="{9D80B273-3018-E127-3864-0258A6545780}"/>
+                <a16:creationId xmlns:a16="http://schemas.microsoft.com/office/drawing/2014/main" id="{D95A132B-4F3B-86B3-B6F5-5906C98A80EC}"/>
               </a:ext>
             </a:extLst>
           </p:cNvPr>
@@ -24283,7 +24316,7 @@
           <p:cNvPr id="5" name="TextBox 4">
             <a:extLst>
               <a:ext uri="{FF2B5EF4-FFF2-40B4-BE49-F238E27FC236}">
-                <a16:creationId xmlns:a16="http://schemas.microsoft.com/office/drawing/2014/main" id="{8844E2AA-31F5-3DD4-E2E7-C85F33A05EE2}"/>
+                <a16:creationId xmlns:a16="http://schemas.microsoft.com/office/drawing/2014/main" id="{202B3721-6A2F-2B09-DCB7-3BDBF746D625}"/>
               </a:ext>
             </a:extLst>
           </p:cNvPr>
@@ -24323,7 +24356,7 @@
           <p:cNvPr id="6" name="TextBox 5">
             <a:extLst>
               <a:ext uri="{FF2B5EF4-FFF2-40B4-BE49-F238E27FC236}">
-                <a16:creationId xmlns:a16="http://schemas.microsoft.com/office/drawing/2014/main" id="{6193ADF5-A97E-C876-915A-B559FDA7F0D4}"/>
+                <a16:creationId xmlns:a16="http://schemas.microsoft.com/office/drawing/2014/main" id="{02345ECA-DD2C-B78C-5E22-AE25E04B5AC0}"/>
               </a:ext>
             </a:extLst>
           </p:cNvPr>
@@ -24416,7 +24449,7 @@
           <p:cNvPr id="7" name="Rectangle 6">
             <a:extLst>
               <a:ext uri="{FF2B5EF4-FFF2-40B4-BE49-F238E27FC236}">
-                <a16:creationId xmlns:a16="http://schemas.microsoft.com/office/drawing/2014/main" id="{A66D1FF5-FAFD-385B-3F7E-01E3942FEF56}"/>
+                <a16:creationId xmlns:a16="http://schemas.microsoft.com/office/drawing/2014/main" id="{6C102EA3-EBD0-F46C-BA92-04C83FE1BF88}"/>
               </a:ext>
             </a:extLst>
           </p:cNvPr>
@@ -24470,7 +24503,7 @@
           <p:cNvPr id="8" name="TextBox 7">
             <a:extLst>
               <a:ext uri="{FF2B5EF4-FFF2-40B4-BE49-F238E27FC236}">
-                <a16:creationId xmlns:a16="http://schemas.microsoft.com/office/drawing/2014/main" id="{59FD5810-7AEB-251B-27CA-E44BFE84FC8B}"/>
+                <a16:creationId xmlns:a16="http://schemas.microsoft.com/office/drawing/2014/main" id="{048C4F52-0501-9058-9A99-FB972A6ADD81}"/>
               </a:ext>
             </a:extLst>
           </p:cNvPr>
@@ -24565,7 +24598,7 @@
           <p:cNvPr id="9" name="Rectangle 8">
             <a:extLst>
               <a:ext uri="{FF2B5EF4-FFF2-40B4-BE49-F238E27FC236}">
-                <a16:creationId xmlns:a16="http://schemas.microsoft.com/office/drawing/2014/main" id="{D9845F91-5C36-4B7F-573C-189560DFD36D}"/>
+                <a16:creationId xmlns:a16="http://schemas.microsoft.com/office/drawing/2014/main" id="{ECFCC571-4FBC-4F8E-5779-09CE8298A2C8}"/>
               </a:ext>
             </a:extLst>
           </p:cNvPr>
@@ -24619,7 +24652,7 @@
           <p:cNvPr id="10" name="TextBox 9">
             <a:extLst>
               <a:ext uri="{FF2B5EF4-FFF2-40B4-BE49-F238E27FC236}">
-                <a16:creationId xmlns:a16="http://schemas.microsoft.com/office/drawing/2014/main" id="{4D986089-71EC-CC0E-3D3C-0060B56BF156}"/>
+                <a16:creationId xmlns:a16="http://schemas.microsoft.com/office/drawing/2014/main" id="{6E8EFA63-28D0-C5D8-3F4B-61CB5B848C0C}"/>
               </a:ext>
             </a:extLst>
           </p:cNvPr>
@@ -24657,7 +24690,7 @@
     </p:spTree>
     <p:extLst>
       <p:ext uri="{BB962C8B-B14F-4D97-AF65-F5344CB8AC3E}">
-        <p14:creationId xmlns:p14="http://schemas.microsoft.com/office/powerpoint/2010/main" val="1476654655"/>
+        <p14:creationId xmlns:p14="http://schemas.microsoft.com/office/powerpoint/2010/main" val="1994497837"/>
       </p:ext>
     </p:extLst>
   </p:cSld>
@@ -24689,7 +24722,7 @@
           <p:cNvPr id="2" name="Rectangle 1">
             <a:extLst>
               <a:ext uri="{FF2B5EF4-FFF2-40B4-BE49-F238E27FC236}">
-                <a16:creationId xmlns:a16="http://schemas.microsoft.com/office/drawing/2014/main" id="{C8FFA7A0-4478-6F2F-A561-C5C7CB237510}"/>
+                <a16:creationId xmlns:a16="http://schemas.microsoft.com/office/drawing/2014/main" id="{9AC61BBE-4BE4-ED23-A422-621566FDC3DC}"/>
               </a:ext>
             </a:extLst>
           </p:cNvPr>
@@ -24757,7 +24790,7 @@
           <p:cNvPr id="3" name="Rectangle 2">
             <a:extLst>
               <a:ext uri="{FF2B5EF4-FFF2-40B4-BE49-F238E27FC236}">
-                <a16:creationId xmlns:a16="http://schemas.microsoft.com/office/drawing/2014/main" id="{F1D53556-247B-E182-9355-074D85710DB4}"/>
+                <a16:creationId xmlns:a16="http://schemas.microsoft.com/office/drawing/2014/main" id="{E90153E6-9E1D-A533-F69B-6297F8B79199}"/>
               </a:ext>
             </a:extLst>
           </p:cNvPr>
@@ -24825,7 +24858,7 @@
           <p:cNvPr id="4" name="TextBox 3">
             <a:extLst>
               <a:ext uri="{FF2B5EF4-FFF2-40B4-BE49-F238E27FC236}">
-                <a16:creationId xmlns:a16="http://schemas.microsoft.com/office/drawing/2014/main" id="{29926769-B8F9-AFFD-7033-66AC1DC29F6E}"/>
+                <a16:creationId xmlns:a16="http://schemas.microsoft.com/office/drawing/2014/main" id="{A59D5350-9DB5-2E54-FA49-A4BFA053C860}"/>
               </a:ext>
             </a:extLst>
           </p:cNvPr>
@@ -24865,7 +24898,7 @@
           <p:cNvPr id="5" name="TextBox 4">
             <a:extLst>
               <a:ext uri="{FF2B5EF4-FFF2-40B4-BE49-F238E27FC236}">
-                <a16:creationId xmlns:a16="http://schemas.microsoft.com/office/drawing/2014/main" id="{E79FA728-F260-713B-F43E-2FB68739FF3B}"/>
+                <a16:creationId xmlns:a16="http://schemas.microsoft.com/office/drawing/2014/main" id="{B5242E8E-B8EF-E545-DA12-4DF201D62EA3}"/>
               </a:ext>
             </a:extLst>
           </p:cNvPr>
@@ -24905,7 +24938,7 @@
           <p:cNvPr id="6" name="TextBox 5">
             <a:extLst>
               <a:ext uri="{FF2B5EF4-FFF2-40B4-BE49-F238E27FC236}">
-                <a16:creationId xmlns:a16="http://schemas.microsoft.com/office/drawing/2014/main" id="{1A3A132A-9928-3314-FC25-B2E3723188D2}"/>
+                <a16:creationId xmlns:a16="http://schemas.microsoft.com/office/drawing/2014/main" id="{23F5DE27-F688-C0B2-FC64-97268BFA1DE3}"/>
               </a:ext>
             </a:extLst>
           </p:cNvPr>
@@ -24945,7 +24978,7 @@
           <p:cNvPr id="7" name="Rectangle 6">
             <a:extLst>
               <a:ext uri="{FF2B5EF4-FFF2-40B4-BE49-F238E27FC236}">
-                <a16:creationId xmlns:a16="http://schemas.microsoft.com/office/drawing/2014/main" id="{B06E3DFC-D298-703A-DDD2-94CCA52E4D6D}"/>
+                <a16:creationId xmlns:a16="http://schemas.microsoft.com/office/drawing/2014/main" id="{24DE2B14-9CBB-71DB-D15B-CB249155BE85}"/>
               </a:ext>
             </a:extLst>
           </p:cNvPr>
@@ -24999,7 +25032,7 @@
           <p:cNvPr id="8" name="TextBox 7">
             <a:extLst>
               <a:ext uri="{FF2B5EF4-FFF2-40B4-BE49-F238E27FC236}">
-                <a16:creationId xmlns:a16="http://schemas.microsoft.com/office/drawing/2014/main" id="{E94356FE-D169-D045-BD1B-A20CABA4608E}"/>
+                <a16:creationId xmlns:a16="http://schemas.microsoft.com/office/drawing/2014/main" id="{B63C6FDC-57B9-22BE-89E5-3D9DB8AB33D8}"/>
               </a:ext>
             </a:extLst>
           </p:cNvPr>
@@ -25039,7 +25072,7 @@
           <p:cNvPr id="9" name="TextBox 8">
             <a:extLst>
               <a:ext uri="{FF2B5EF4-FFF2-40B4-BE49-F238E27FC236}">
-                <a16:creationId xmlns:a16="http://schemas.microsoft.com/office/drawing/2014/main" id="{34CAEAA8-5D45-4BF7-8D51-35305C8BE2FF}"/>
+                <a16:creationId xmlns:a16="http://schemas.microsoft.com/office/drawing/2014/main" id="{6FD986A0-0095-3781-939C-C7D7E767A7D5}"/>
               </a:ext>
             </a:extLst>
           </p:cNvPr>
@@ -25130,7 +25163,7 @@
     </p:spTree>
     <p:extLst>
       <p:ext uri="{BB962C8B-B14F-4D97-AF65-F5344CB8AC3E}">
-        <p14:creationId xmlns:p14="http://schemas.microsoft.com/office/powerpoint/2010/main" val="3119448409"/>
+        <p14:creationId xmlns:p14="http://schemas.microsoft.com/office/powerpoint/2010/main" val="2640902418"/>
       </p:ext>
     </p:extLst>
   </p:cSld>
@@ -25162,7 +25195,7 @@
           <p:cNvPr id="2" name="Rectangle 1">
             <a:extLst>
               <a:ext uri="{FF2B5EF4-FFF2-40B4-BE49-F238E27FC236}">
-                <a16:creationId xmlns:a16="http://schemas.microsoft.com/office/drawing/2014/main" id="{E9D04880-F711-DA2F-B6A1-2D15777AC705}"/>
+                <a16:creationId xmlns:a16="http://schemas.microsoft.com/office/drawing/2014/main" id="{6D121AB3-90BB-FB5A-9F01-72AE3BCAB64D}"/>
               </a:ext>
             </a:extLst>
           </p:cNvPr>
@@ -25230,7 +25263,7 @@
           <p:cNvPr id="3" name="Rectangle 2">
             <a:extLst>
               <a:ext uri="{FF2B5EF4-FFF2-40B4-BE49-F238E27FC236}">
-                <a16:creationId xmlns:a16="http://schemas.microsoft.com/office/drawing/2014/main" id="{45A9F3D4-5D63-3253-815C-0CF62AF20D61}"/>
+                <a16:creationId xmlns:a16="http://schemas.microsoft.com/office/drawing/2014/main" id="{DF4F8812-904A-EBE3-4AB1-C5C0625293BE}"/>
               </a:ext>
             </a:extLst>
           </p:cNvPr>
@@ -25298,7 +25331,7 @@
           <p:cNvPr id="4" name="TextBox 3">
             <a:extLst>
               <a:ext uri="{FF2B5EF4-FFF2-40B4-BE49-F238E27FC236}">
-                <a16:creationId xmlns:a16="http://schemas.microsoft.com/office/drawing/2014/main" id="{B6F229AA-9495-E047-ED30-2E8589154609}"/>
+                <a16:creationId xmlns:a16="http://schemas.microsoft.com/office/drawing/2014/main" id="{35ACEBA0-5C75-F627-21F3-A43BEBF3C3EF}"/>
               </a:ext>
             </a:extLst>
           </p:cNvPr>
@@ -25338,7 +25371,7 @@
           <p:cNvPr id="5" name="TextBox 4">
             <a:extLst>
               <a:ext uri="{FF2B5EF4-FFF2-40B4-BE49-F238E27FC236}">
-                <a16:creationId xmlns:a16="http://schemas.microsoft.com/office/drawing/2014/main" id="{327DBF34-2F2F-BB6A-01D8-1386F854FC40}"/>
+                <a16:creationId xmlns:a16="http://schemas.microsoft.com/office/drawing/2014/main" id="{D04B93F6-5A3F-F6FB-5841-277F131DDCBE}"/>
               </a:ext>
             </a:extLst>
           </p:cNvPr>
@@ -25378,7 +25411,7 @@
           <p:cNvPr id="6" name="TextBox 5">
             <a:extLst>
               <a:ext uri="{FF2B5EF4-FFF2-40B4-BE49-F238E27FC236}">
-                <a16:creationId xmlns:a16="http://schemas.microsoft.com/office/drawing/2014/main" id="{F9D1AC69-EDEB-076F-8BAF-8DB6DE66F03A}"/>
+                <a16:creationId xmlns:a16="http://schemas.microsoft.com/office/drawing/2014/main" id="{A800CD67-EDE4-9B6A-0D40-C81B339F4DCF}"/>
               </a:ext>
             </a:extLst>
           </p:cNvPr>
@@ -25487,7 +25520,7 @@
           <p:cNvPr id="7" name="Rectangle 6">
             <a:extLst>
               <a:ext uri="{FF2B5EF4-FFF2-40B4-BE49-F238E27FC236}">
-                <a16:creationId xmlns:a16="http://schemas.microsoft.com/office/drawing/2014/main" id="{5B48A001-6CA4-5107-BAF8-68E19CAF003E}"/>
+                <a16:creationId xmlns:a16="http://schemas.microsoft.com/office/drawing/2014/main" id="{03EA2C4F-396A-5878-C94A-4C6DF67FAF5A}"/>
               </a:ext>
             </a:extLst>
           </p:cNvPr>
@@ -25541,7 +25574,7 @@
           <p:cNvPr id="8" name="TextBox 7">
             <a:extLst>
               <a:ext uri="{FF2B5EF4-FFF2-40B4-BE49-F238E27FC236}">
-                <a16:creationId xmlns:a16="http://schemas.microsoft.com/office/drawing/2014/main" id="{700DCD54-78BD-3129-6CF9-DE4945B2FEF3}"/>
+                <a16:creationId xmlns:a16="http://schemas.microsoft.com/office/drawing/2014/main" id="{4996E4F6-5C06-764A-4B39-86BF8CC2B6E7}"/>
               </a:ext>
             </a:extLst>
           </p:cNvPr>
@@ -25579,7 +25612,7 @@
     </p:spTree>
     <p:extLst>
       <p:ext uri="{BB962C8B-B14F-4D97-AF65-F5344CB8AC3E}">
-        <p14:creationId xmlns:p14="http://schemas.microsoft.com/office/powerpoint/2010/main" val="1675343125"/>
+        <p14:creationId xmlns:p14="http://schemas.microsoft.com/office/powerpoint/2010/main" val="3738511801"/>
       </p:ext>
     </p:extLst>
   </p:cSld>
@@ -25611,7 +25644,7 @@
           <p:cNvPr id="2" name="Rectangle 1">
             <a:extLst>
               <a:ext uri="{FF2B5EF4-FFF2-40B4-BE49-F238E27FC236}">
-                <a16:creationId xmlns:a16="http://schemas.microsoft.com/office/drawing/2014/main" id="{DE7DC407-EAE1-C5D8-D5CA-855E1078839F}"/>
+                <a16:creationId xmlns:a16="http://schemas.microsoft.com/office/drawing/2014/main" id="{8E7840DF-EFFA-73DA-2E4C-5BD3833FF4A6}"/>
               </a:ext>
             </a:extLst>
           </p:cNvPr>
@@ -25679,7 +25712,7 @@
           <p:cNvPr id="3" name="Rectangle 2">
             <a:extLst>
               <a:ext uri="{FF2B5EF4-FFF2-40B4-BE49-F238E27FC236}">
-                <a16:creationId xmlns:a16="http://schemas.microsoft.com/office/drawing/2014/main" id="{D3D67400-33E6-BC1E-5FF0-A6B14E57E31A}"/>
+                <a16:creationId xmlns:a16="http://schemas.microsoft.com/office/drawing/2014/main" id="{F789D47E-73C7-291B-F35E-90BA14409377}"/>
               </a:ext>
             </a:extLst>
           </p:cNvPr>
@@ -25747,7 +25780,7 @@
           <p:cNvPr id="4" name="TextBox 3">
             <a:extLst>
               <a:ext uri="{FF2B5EF4-FFF2-40B4-BE49-F238E27FC236}">
-                <a16:creationId xmlns:a16="http://schemas.microsoft.com/office/drawing/2014/main" id="{8B2CAEF4-67E3-FFBE-2E3E-592C5DB507B1}"/>
+                <a16:creationId xmlns:a16="http://schemas.microsoft.com/office/drawing/2014/main" id="{2927F53A-DA61-6060-34A9-A64DD8BBE144}"/>
               </a:ext>
             </a:extLst>
           </p:cNvPr>
@@ -25787,7 +25820,7 @@
           <p:cNvPr id="5" name="TextBox 4">
             <a:extLst>
               <a:ext uri="{FF2B5EF4-FFF2-40B4-BE49-F238E27FC236}">
-                <a16:creationId xmlns:a16="http://schemas.microsoft.com/office/drawing/2014/main" id="{8FC3062A-594B-1812-64C5-F986E20A4607}"/>
+                <a16:creationId xmlns:a16="http://schemas.microsoft.com/office/drawing/2014/main" id="{907D97ED-7E30-FA65-4777-0F02372A90F4}"/>
               </a:ext>
             </a:extLst>
           </p:cNvPr>
@@ -25827,7 +25860,7 @@
           <p:cNvPr id="6" name="TextBox 5">
             <a:extLst>
               <a:ext uri="{FF2B5EF4-FFF2-40B4-BE49-F238E27FC236}">
-                <a16:creationId xmlns:a16="http://schemas.microsoft.com/office/drawing/2014/main" id="{80D602C6-6DB3-768A-E299-87BF94D65CCB}"/>
+                <a16:creationId xmlns:a16="http://schemas.microsoft.com/office/drawing/2014/main" id="{A8F0BA4B-0493-F1F0-3870-CB383A71C1A8}"/>
               </a:ext>
             </a:extLst>
           </p:cNvPr>
@@ -25936,7 +25969,7 @@
           <p:cNvPr id="7" name="Rectangle 6">
             <a:extLst>
               <a:ext uri="{FF2B5EF4-FFF2-40B4-BE49-F238E27FC236}">
-                <a16:creationId xmlns:a16="http://schemas.microsoft.com/office/drawing/2014/main" id="{1A65A477-2920-CF38-9371-7541ACA61E0B}"/>
+                <a16:creationId xmlns:a16="http://schemas.microsoft.com/office/drawing/2014/main" id="{6A6E5A3E-63C5-D10F-52E1-D86D02818E19}"/>
               </a:ext>
             </a:extLst>
           </p:cNvPr>
@@ -25990,7 +26023,7 @@
           <p:cNvPr id="8" name="TextBox 7">
             <a:extLst>
               <a:ext uri="{FF2B5EF4-FFF2-40B4-BE49-F238E27FC236}">
-                <a16:creationId xmlns:a16="http://schemas.microsoft.com/office/drawing/2014/main" id="{1E440C17-C298-41E6-088A-40689F3D15ED}"/>
+                <a16:creationId xmlns:a16="http://schemas.microsoft.com/office/drawing/2014/main" id="{FA0B982B-5BC0-3E1A-1C3B-DC19ECA8320B}"/>
               </a:ext>
             </a:extLst>
           </p:cNvPr>
@@ -26020,7 +26053,7 @@
                 </a:solidFill>
                 <a:latin typeface="Cascadia Mono" panose="020B0609020000020004" pitchFamily="49" charset="0"/>
               </a:rPr>
-              <a:t>let IncidentIdToReview = "PUT-INCIDENT-ID-HERE";</a:t>
+              <a:t>1. Open the incident in Microsoft Defender XDR.</a:t>
             </a:r>
           </a:p>
           <a:p>
@@ -26031,7 +26064,7 @@
                 </a:solidFill>
                 <a:latin typeface="Cascadia Mono" panose="020B0609020000020004" pitchFamily="49" charset="0"/>
               </a:rPr>
-              <a:t>AlertInfo</a:t>
+              <a:t>2. Copy the affected device name, alert titles, entities, and rough time range.</a:t>
             </a:r>
           </a:p>
           <a:p>
@@ -26042,7 +26075,7 @@
                 </a:solidFill>
                 <a:latin typeface="Cascadia Mono" panose="020B0609020000020004" pitchFamily="49" charset="0"/>
               </a:rPr>
-              <a:t>| where Timestamp &gt; ago(7d)</a:t>
+              <a:t>3. Pivot to Advanced Hunting using the affected device name.</a:t>
             </a:r>
           </a:p>
           <a:p>
@@ -26053,29 +26086,7 @@
                 </a:solidFill>
                 <a:latin typeface="Cascadia Mono" panose="020B0609020000020004" pitchFamily="49" charset="0"/>
               </a:rPr>
-              <a:t>| where IncidentId == IncidentIdToReview</a:t>
-            </a:r>
-          </a:p>
-          <a:p>
-            <a:r>
-              <a:rPr lang="en-US" sz="1200">
-                <a:solidFill>
-                  <a:srgbClr val="0B1F3A"/>
-                </a:solidFill>
-                <a:latin typeface="Cascadia Mono" panose="020B0609020000020004" pitchFamily="49" charset="0"/>
-              </a:rPr>
-              <a:t>| project Timestamp, IncidentId, AlertId, Title, Severity, AttackTechniques</a:t>
-            </a:r>
-          </a:p>
-          <a:p>
-            <a:r>
-              <a:rPr lang="en-US" sz="1200">
-                <a:solidFill>
-                  <a:srgbClr val="0B1F3A"/>
-                </a:solidFill>
-                <a:latin typeface="Cascadia Mono" panose="020B0609020000020004" pitchFamily="49" charset="0"/>
-              </a:rPr>
-              <a:t>| order by Timestamp asc</a:t>
+              <a:t>4. Continue with the scenario queries in this guide.</a:t>
             </a:r>
           </a:p>
         </p:txBody>
@@ -26085,7 +26096,7 @@
           <p:cNvPr id="9" name="Rectangle 8">
             <a:extLst>
               <a:ext uri="{FF2B5EF4-FFF2-40B4-BE49-F238E27FC236}">
-                <a16:creationId xmlns:a16="http://schemas.microsoft.com/office/drawing/2014/main" id="{A4F2AB31-3D2B-B968-0C2D-8833052E8469}"/>
+                <a16:creationId xmlns:a16="http://schemas.microsoft.com/office/drawing/2014/main" id="{4CD44BCC-538C-71E2-7C1E-34E043F67736}"/>
               </a:ext>
             </a:extLst>
           </p:cNvPr>
@@ -26139,7 +26150,7 @@
           <p:cNvPr id="10" name="TextBox 9">
             <a:extLst>
               <a:ext uri="{FF2B5EF4-FFF2-40B4-BE49-F238E27FC236}">
-                <a16:creationId xmlns:a16="http://schemas.microsoft.com/office/drawing/2014/main" id="{824A5636-4AF5-76DC-B250-64227EE35B58}"/>
+                <a16:creationId xmlns:a16="http://schemas.microsoft.com/office/drawing/2014/main" id="{2C667C4D-E97F-C068-B65D-A17037042505}"/>
               </a:ext>
             </a:extLst>
           </p:cNvPr>
@@ -26169,7 +26180,7 @@
                 </a:solidFill>
                 <a:latin typeface="Aptos" panose="020B0004020202020204" pitchFamily="34" charset="0"/>
               </a:rPr>
-              <a:t>If this returns nothing, skip it and continue with scenario queries.</a:t>
+              <a:t>Treat this as an instructor workflow, not a required student query.</a:t>
             </a:r>
           </a:p>
         </p:txBody>
@@ -26177,7 +26188,7 @@
     </p:spTree>
     <p:extLst>
       <p:ext uri="{BB962C8B-B14F-4D97-AF65-F5344CB8AC3E}">
-        <p14:creationId xmlns:p14="http://schemas.microsoft.com/office/powerpoint/2010/main" val="614240683"/>
+        <p14:creationId xmlns:p14="http://schemas.microsoft.com/office/powerpoint/2010/main" val="2411018450"/>
       </p:ext>
     </p:extLst>
   </p:cSld>
@@ -26209,7 +26220,7 @@
           <p:cNvPr id="2" name="Rectangle 1">
             <a:extLst>
               <a:ext uri="{FF2B5EF4-FFF2-40B4-BE49-F238E27FC236}">
-                <a16:creationId xmlns:a16="http://schemas.microsoft.com/office/drawing/2014/main" id="{C6D3F73A-F87B-AC00-CE4E-46D600741938}"/>
+                <a16:creationId xmlns:a16="http://schemas.microsoft.com/office/drawing/2014/main" id="{5ECE01A2-5F0A-9AEE-D732-CF3540BD70D6}"/>
               </a:ext>
             </a:extLst>
           </p:cNvPr>
@@ -26277,7 +26288,7 @@
           <p:cNvPr id="3" name="Rectangle 2">
             <a:extLst>
               <a:ext uri="{FF2B5EF4-FFF2-40B4-BE49-F238E27FC236}">
-                <a16:creationId xmlns:a16="http://schemas.microsoft.com/office/drawing/2014/main" id="{291956CC-781E-2A9C-C676-DE0E1499BE4A}"/>
+                <a16:creationId xmlns:a16="http://schemas.microsoft.com/office/drawing/2014/main" id="{0261FAAB-32C0-C420-B8BF-ABF2B8A4AB7A}"/>
               </a:ext>
             </a:extLst>
           </p:cNvPr>
@@ -26345,7 +26356,7 @@
           <p:cNvPr id="4" name="TextBox 3">
             <a:extLst>
               <a:ext uri="{FF2B5EF4-FFF2-40B4-BE49-F238E27FC236}">
-                <a16:creationId xmlns:a16="http://schemas.microsoft.com/office/drawing/2014/main" id="{EB1872F5-EF5D-A2F1-3B51-BFB4E8FD71A9}"/>
+                <a16:creationId xmlns:a16="http://schemas.microsoft.com/office/drawing/2014/main" id="{9D6B1823-E4EA-A160-24CA-F30FEAFBA89B}"/>
               </a:ext>
             </a:extLst>
           </p:cNvPr>
@@ -26385,7 +26396,7 @@
           <p:cNvPr id="5" name="TextBox 4">
             <a:extLst>
               <a:ext uri="{FF2B5EF4-FFF2-40B4-BE49-F238E27FC236}">
-                <a16:creationId xmlns:a16="http://schemas.microsoft.com/office/drawing/2014/main" id="{667E88AF-6605-89EC-153B-2DF2F91F8D80}"/>
+                <a16:creationId xmlns:a16="http://schemas.microsoft.com/office/drawing/2014/main" id="{079A7CED-EDCF-886E-4826-5B6FD00D0BFB}"/>
               </a:ext>
             </a:extLst>
           </p:cNvPr>
@@ -26425,7 +26436,7 @@
           <p:cNvPr id="6" name="Rectangle 5">
             <a:extLst>
               <a:ext uri="{FF2B5EF4-FFF2-40B4-BE49-F238E27FC236}">
-                <a16:creationId xmlns:a16="http://schemas.microsoft.com/office/drawing/2014/main" id="{2ADE712C-1AB6-3C36-058F-0A47E1C1E974}"/>
+                <a16:creationId xmlns:a16="http://schemas.microsoft.com/office/drawing/2014/main" id="{4C4417ED-3A9B-D123-48B2-4E66FDA8F52B}"/>
               </a:ext>
             </a:extLst>
           </p:cNvPr>
@@ -26479,7 +26490,7 @@
           <p:cNvPr id="7" name="TextBox 6">
             <a:extLst>
               <a:ext uri="{FF2B5EF4-FFF2-40B4-BE49-F238E27FC236}">
-                <a16:creationId xmlns:a16="http://schemas.microsoft.com/office/drawing/2014/main" id="{8DDE2D85-3ECB-951B-161E-164B46388256}"/>
+                <a16:creationId xmlns:a16="http://schemas.microsoft.com/office/drawing/2014/main" id="{399DB6F8-B380-D1C4-69C7-A6C2FAAFD224}"/>
               </a:ext>
             </a:extLst>
           </p:cNvPr>
@@ -26520,7 +26531,7 @@
           <p:cNvPr id="8" name="Rectangle 7">
             <a:extLst>
               <a:ext uri="{FF2B5EF4-FFF2-40B4-BE49-F238E27FC236}">
-                <a16:creationId xmlns:a16="http://schemas.microsoft.com/office/drawing/2014/main" id="{5AF4D580-393F-A8C2-CDF9-73E227A5BD2C}"/>
+                <a16:creationId xmlns:a16="http://schemas.microsoft.com/office/drawing/2014/main" id="{9E615C7A-4C3C-970A-E7C1-F6B35434A5A1}"/>
               </a:ext>
             </a:extLst>
           </p:cNvPr>
@@ -26574,7 +26585,7 @@
           <p:cNvPr id="9" name="TextBox 8">
             <a:extLst>
               <a:ext uri="{FF2B5EF4-FFF2-40B4-BE49-F238E27FC236}">
-                <a16:creationId xmlns:a16="http://schemas.microsoft.com/office/drawing/2014/main" id="{B6F657CA-599E-8A5C-516D-662C6B5353B8}"/>
+                <a16:creationId xmlns:a16="http://schemas.microsoft.com/office/drawing/2014/main" id="{3D210781-A750-932E-3FD4-FC4813B80959}"/>
               </a:ext>
             </a:extLst>
           </p:cNvPr>
@@ -26615,7 +26626,7 @@
           <p:cNvPr id="10" name="Rectangle 9">
             <a:extLst>
               <a:ext uri="{FF2B5EF4-FFF2-40B4-BE49-F238E27FC236}">
-                <a16:creationId xmlns:a16="http://schemas.microsoft.com/office/drawing/2014/main" id="{94A2D35C-4312-4C3C-1B1F-02E51DD2E624}"/>
+                <a16:creationId xmlns:a16="http://schemas.microsoft.com/office/drawing/2014/main" id="{F429DAC9-9054-9815-25DE-16D2B3F65EE1}"/>
               </a:ext>
             </a:extLst>
           </p:cNvPr>
@@ -26669,7 +26680,7 @@
           <p:cNvPr id="11" name="TextBox 10">
             <a:extLst>
               <a:ext uri="{FF2B5EF4-FFF2-40B4-BE49-F238E27FC236}">
-                <a16:creationId xmlns:a16="http://schemas.microsoft.com/office/drawing/2014/main" id="{D307652D-629B-ADE3-86AA-5BDE897378D3}"/>
+                <a16:creationId xmlns:a16="http://schemas.microsoft.com/office/drawing/2014/main" id="{38869207-BD2F-623A-3850-52CD2926FA82}"/>
               </a:ext>
             </a:extLst>
           </p:cNvPr>
@@ -26710,7 +26721,7 @@
           <p:cNvPr id="12" name="Rectangle 11">
             <a:extLst>
               <a:ext uri="{FF2B5EF4-FFF2-40B4-BE49-F238E27FC236}">
-                <a16:creationId xmlns:a16="http://schemas.microsoft.com/office/drawing/2014/main" id="{561C8230-62BF-F453-1000-05212B5B30CB}"/>
+                <a16:creationId xmlns:a16="http://schemas.microsoft.com/office/drawing/2014/main" id="{D0527B05-E26B-539E-CD97-E41682CF7209}"/>
               </a:ext>
             </a:extLst>
           </p:cNvPr>
@@ -26764,7 +26775,7 @@
           <p:cNvPr id="13" name="TextBox 12">
             <a:extLst>
               <a:ext uri="{FF2B5EF4-FFF2-40B4-BE49-F238E27FC236}">
-                <a16:creationId xmlns:a16="http://schemas.microsoft.com/office/drawing/2014/main" id="{0EE4A87F-7A43-30CD-EA10-8CE1768D975B}"/>
+                <a16:creationId xmlns:a16="http://schemas.microsoft.com/office/drawing/2014/main" id="{1B9DB5E9-469D-B810-FBE3-9E9A0233E32B}"/>
               </a:ext>
             </a:extLst>
           </p:cNvPr>
@@ -26805,7 +26816,7 @@
           <p:cNvPr id="14" name="Rectangle 13">
             <a:extLst>
               <a:ext uri="{FF2B5EF4-FFF2-40B4-BE49-F238E27FC236}">
-                <a16:creationId xmlns:a16="http://schemas.microsoft.com/office/drawing/2014/main" id="{60FC8D45-D076-6BB8-0220-4F92BF1E3974}"/>
+                <a16:creationId xmlns:a16="http://schemas.microsoft.com/office/drawing/2014/main" id="{94966F60-21F9-FA3D-AA77-FE0321AC46F8}"/>
               </a:ext>
             </a:extLst>
           </p:cNvPr>
@@ -26859,7 +26870,7 @@
           <p:cNvPr id="15" name="TextBox 14">
             <a:extLst>
               <a:ext uri="{FF2B5EF4-FFF2-40B4-BE49-F238E27FC236}">
-                <a16:creationId xmlns:a16="http://schemas.microsoft.com/office/drawing/2014/main" id="{8A103021-D6BB-E4E0-43F9-5052AF0AF492}"/>
+                <a16:creationId xmlns:a16="http://schemas.microsoft.com/office/drawing/2014/main" id="{532B8FFA-D9C7-29AF-3F68-1C81840E9FF7}"/>
               </a:ext>
             </a:extLst>
           </p:cNvPr>
@@ -26869,7 +26880,7 @@
         <p:spPr>
           <a:xfrm>
             <a:off x="1320800" y="3657600"/>
-            <a:ext cx="9474200" cy="1256754"/>
+            <a:ext cx="9474200" cy="1487587"/>
           </a:xfrm>
           <a:prstGeom prst="rect">
             <a:avLst/>
@@ -26889,6 +26900,17 @@
                 </a:solidFill>
                 <a:latin typeface="Cascadia Mono" panose="020B0609020000020004" pitchFamily="49" charset="0"/>
               </a:rPr>
+              <a:t>let TargetDevice = "usm262346";</a:t>
+            </a:r>
+          </a:p>
+          <a:p>
+            <a:r>
+              <a:rPr lang="en-US" sz="1500">
+                <a:solidFill>
+                  <a:srgbClr val="0B1F3A"/>
+                </a:solidFill>
+                <a:latin typeface="Cascadia Mono" panose="020B0609020000020004" pitchFamily="49" charset="0"/>
+              </a:rPr>
               <a:t>DeviceProcessEvents</a:t>
             </a:r>
           </a:p>
@@ -26943,7 +26965,7 @@
           <p:cNvPr id="16" name="TextBox 15">
             <a:extLst>
               <a:ext uri="{FF2B5EF4-FFF2-40B4-BE49-F238E27FC236}">
-                <a16:creationId xmlns:a16="http://schemas.microsoft.com/office/drawing/2014/main" id="{14E55C58-36AF-3F2E-A4FB-1C6D6F86C5B9}"/>
+                <a16:creationId xmlns:a16="http://schemas.microsoft.com/office/drawing/2014/main" id="{04178537-2E32-EC68-9F86-E16C287F5D2D}"/>
               </a:ext>
             </a:extLst>
           </p:cNvPr>
@@ -26981,7 +27003,7 @@
     </p:spTree>
     <p:extLst>
       <p:ext uri="{BB962C8B-B14F-4D97-AF65-F5344CB8AC3E}">
-        <p14:creationId xmlns:p14="http://schemas.microsoft.com/office/powerpoint/2010/main" val="3115873277"/>
+        <p14:creationId xmlns:p14="http://schemas.microsoft.com/office/powerpoint/2010/main" val="2084877019"/>
       </p:ext>
     </p:extLst>
   </p:cSld>
@@ -27013,7 +27035,7 @@
           <p:cNvPr id="2" name="Rectangle 1">
             <a:extLst>
               <a:ext uri="{FF2B5EF4-FFF2-40B4-BE49-F238E27FC236}">
-                <a16:creationId xmlns:a16="http://schemas.microsoft.com/office/drawing/2014/main" id="{5ADEF1D0-0C3F-A2E9-9D72-3677977A7D16}"/>
+                <a16:creationId xmlns:a16="http://schemas.microsoft.com/office/drawing/2014/main" id="{21D0A9CE-D458-EEEF-1232-B84F02AB87AB}"/>
               </a:ext>
             </a:extLst>
           </p:cNvPr>
@@ -27081,7 +27103,7 @@
           <p:cNvPr id="3" name="Rectangle 2">
             <a:extLst>
               <a:ext uri="{FF2B5EF4-FFF2-40B4-BE49-F238E27FC236}">
-                <a16:creationId xmlns:a16="http://schemas.microsoft.com/office/drawing/2014/main" id="{9454C5A1-0799-451E-FA51-71D17912F5EB}"/>
+                <a16:creationId xmlns:a16="http://schemas.microsoft.com/office/drawing/2014/main" id="{4CC33DF0-AB90-3F23-5CCD-D5691484F076}"/>
               </a:ext>
             </a:extLst>
           </p:cNvPr>
@@ -27149,7 +27171,7 @@
           <p:cNvPr id="4" name="TextBox 3">
             <a:extLst>
               <a:ext uri="{FF2B5EF4-FFF2-40B4-BE49-F238E27FC236}">
-                <a16:creationId xmlns:a16="http://schemas.microsoft.com/office/drawing/2014/main" id="{1862DB9D-8F9D-B86B-0953-19B4E160EE54}"/>
+                <a16:creationId xmlns:a16="http://schemas.microsoft.com/office/drawing/2014/main" id="{6ED046DE-7CDC-BA86-68B6-BF343CB704E6}"/>
               </a:ext>
             </a:extLst>
           </p:cNvPr>
@@ -27189,7 +27211,7 @@
           <p:cNvPr id="5" name="TextBox 4">
             <a:extLst>
               <a:ext uri="{FF2B5EF4-FFF2-40B4-BE49-F238E27FC236}">
-                <a16:creationId xmlns:a16="http://schemas.microsoft.com/office/drawing/2014/main" id="{E57BFCD2-3F24-7148-69AA-FC9FF88AEFD8}"/>
+                <a16:creationId xmlns:a16="http://schemas.microsoft.com/office/drawing/2014/main" id="{F33D73C8-9487-025B-CE54-2D072737F1E4}"/>
               </a:ext>
             </a:extLst>
           </p:cNvPr>
@@ -27229,7 +27251,7 @@
           <p:cNvPr id="6" name="TextBox 5">
             <a:extLst>
               <a:ext uri="{FF2B5EF4-FFF2-40B4-BE49-F238E27FC236}">
-                <a16:creationId xmlns:a16="http://schemas.microsoft.com/office/drawing/2014/main" id="{C3C5CB8C-FF13-44AF-84E3-87943B655356}"/>
+                <a16:creationId xmlns:a16="http://schemas.microsoft.com/office/drawing/2014/main" id="{470DD808-9228-55C4-B60D-868E20F7089C}"/>
               </a:ext>
             </a:extLst>
           </p:cNvPr>
@@ -27338,7 +27360,7 @@
           <p:cNvPr id="7" name="Rectangle 6">
             <a:extLst>
               <a:ext uri="{FF2B5EF4-FFF2-40B4-BE49-F238E27FC236}">
-                <a16:creationId xmlns:a16="http://schemas.microsoft.com/office/drawing/2014/main" id="{C72AF552-187B-3E97-74C9-8D9C30837395}"/>
+                <a16:creationId xmlns:a16="http://schemas.microsoft.com/office/drawing/2014/main" id="{681EFA7C-81CA-AC88-70C0-35378ED40A61}"/>
               </a:ext>
             </a:extLst>
           </p:cNvPr>
@@ -27392,7 +27414,7 @@
           <p:cNvPr id="8" name="TextBox 7">
             <a:extLst>
               <a:ext uri="{FF2B5EF4-FFF2-40B4-BE49-F238E27FC236}">
-                <a16:creationId xmlns:a16="http://schemas.microsoft.com/office/drawing/2014/main" id="{2212590C-0751-3638-D435-0502413B3AC0}"/>
+                <a16:creationId xmlns:a16="http://schemas.microsoft.com/office/drawing/2014/main" id="{C4221BC3-E0C9-8429-91F4-858E9F7796CE}"/>
               </a:ext>
             </a:extLst>
           </p:cNvPr>
@@ -27430,7 +27452,7 @@
     </p:spTree>
     <p:extLst>
       <p:ext uri="{BB962C8B-B14F-4D97-AF65-F5344CB8AC3E}">
-        <p14:creationId xmlns:p14="http://schemas.microsoft.com/office/powerpoint/2010/main" val="1620445715"/>
+        <p14:creationId xmlns:p14="http://schemas.microsoft.com/office/powerpoint/2010/main" val="1301295604"/>
       </p:ext>
     </p:extLst>
   </p:cSld>
@@ -27462,7 +27484,7 @@
           <p:cNvPr id="2" name="Rectangle 1">
             <a:extLst>
               <a:ext uri="{FF2B5EF4-FFF2-40B4-BE49-F238E27FC236}">
-                <a16:creationId xmlns:a16="http://schemas.microsoft.com/office/drawing/2014/main" id="{D03A7C30-370E-F7B7-964D-6B218FB986D0}"/>
+                <a16:creationId xmlns:a16="http://schemas.microsoft.com/office/drawing/2014/main" id="{75DA0656-505B-7195-0246-432AD14CE527}"/>
               </a:ext>
             </a:extLst>
           </p:cNvPr>
@@ -27530,7 +27552,7 @@
           <p:cNvPr id="3" name="Rectangle 2">
             <a:extLst>
               <a:ext uri="{FF2B5EF4-FFF2-40B4-BE49-F238E27FC236}">
-                <a16:creationId xmlns:a16="http://schemas.microsoft.com/office/drawing/2014/main" id="{6DDDD55F-2787-0944-A02F-6CFD87C02E1A}"/>
+                <a16:creationId xmlns:a16="http://schemas.microsoft.com/office/drawing/2014/main" id="{4316159E-94C2-16EC-E502-29C906473BF3}"/>
               </a:ext>
             </a:extLst>
           </p:cNvPr>
@@ -27598,7 +27620,7 @@
           <p:cNvPr id="4" name="TextBox 3">
             <a:extLst>
               <a:ext uri="{FF2B5EF4-FFF2-40B4-BE49-F238E27FC236}">
-                <a16:creationId xmlns:a16="http://schemas.microsoft.com/office/drawing/2014/main" id="{4509CD69-C96A-2351-B09C-7CBB4642D2AB}"/>
+                <a16:creationId xmlns:a16="http://schemas.microsoft.com/office/drawing/2014/main" id="{829D94BA-1742-4F88-0B7D-80B6B3EED3CF}"/>
               </a:ext>
             </a:extLst>
           </p:cNvPr>
@@ -27638,7 +27660,7 @@
           <p:cNvPr id="5" name="TextBox 4">
             <a:extLst>
               <a:ext uri="{FF2B5EF4-FFF2-40B4-BE49-F238E27FC236}">
-                <a16:creationId xmlns:a16="http://schemas.microsoft.com/office/drawing/2014/main" id="{3ECD14EB-D0EE-6B0B-94B9-ECA812F4F19A}"/>
+                <a16:creationId xmlns:a16="http://schemas.microsoft.com/office/drawing/2014/main" id="{CBDC9D43-EB9F-973D-D843-8BE0F265BE5B}"/>
               </a:ext>
             </a:extLst>
           </p:cNvPr>
@@ -27678,7 +27700,7 @@
           <p:cNvPr id="6" name="TextBox 5">
             <a:extLst>
               <a:ext uri="{FF2B5EF4-FFF2-40B4-BE49-F238E27FC236}">
-                <a16:creationId xmlns:a16="http://schemas.microsoft.com/office/drawing/2014/main" id="{13A9E9BF-0BBC-45D7-9283-51A2D8DCF102}"/>
+                <a16:creationId xmlns:a16="http://schemas.microsoft.com/office/drawing/2014/main" id="{571C8A73-43E7-DE9F-0133-65E321E61208}"/>
               </a:ext>
             </a:extLst>
           </p:cNvPr>
@@ -27771,7 +27793,7 @@
           <p:cNvPr id="7" name="Rectangle 6">
             <a:extLst>
               <a:ext uri="{FF2B5EF4-FFF2-40B4-BE49-F238E27FC236}">
-                <a16:creationId xmlns:a16="http://schemas.microsoft.com/office/drawing/2014/main" id="{07061A04-FB5B-A6F1-895E-D4D8BC0BDA44}"/>
+                <a16:creationId xmlns:a16="http://schemas.microsoft.com/office/drawing/2014/main" id="{FD805AF1-C6A2-0788-CF60-15721F28BF55}"/>
               </a:ext>
             </a:extLst>
           </p:cNvPr>
@@ -27825,7 +27847,7 @@
           <p:cNvPr id="8" name="TextBox 7">
             <a:extLst>
               <a:ext uri="{FF2B5EF4-FFF2-40B4-BE49-F238E27FC236}">
-                <a16:creationId xmlns:a16="http://schemas.microsoft.com/office/drawing/2014/main" id="{F271D332-99F9-4256-595E-4A88B156C461}"/>
+                <a16:creationId xmlns:a16="http://schemas.microsoft.com/office/drawing/2014/main" id="{5F252B32-B5EF-DC14-2DE2-F6D64A9B086A}"/>
               </a:ext>
             </a:extLst>
           </p:cNvPr>
@@ -27835,7 +27857,7 @@
         <p:spPr>
           <a:xfrm>
             <a:off x="6324600" y="1460500"/>
-            <a:ext cx="4648200" cy="1302921"/>
+            <a:ext cx="4648200" cy="1502976"/>
           </a:xfrm>
           <a:prstGeom prst="rect">
             <a:avLst/>
@@ -27855,6 +27877,17 @@
                 </a:solidFill>
                 <a:latin typeface="Cascadia Mono" panose="020B0609020000020004" pitchFamily="49" charset="0"/>
               </a:rPr>
+              <a:t>let TargetDevice = "usm262346";</a:t>
+            </a:r>
+          </a:p>
+          <a:p>
+            <a:r>
+              <a:rPr lang="en-US" sz="1300">
+                <a:solidFill>
+                  <a:srgbClr val="0B1F3A"/>
+                </a:solidFill>
+                <a:latin typeface="Cascadia Mono" panose="020B0609020000020004" pitchFamily="49" charset="0"/>
+              </a:rPr>
               <a:t>DeviceProcessEvents</a:t>
             </a:r>
           </a:p>
@@ -27909,7 +27942,7 @@
           <p:cNvPr id="9" name="Rectangle 8">
             <a:extLst>
               <a:ext uri="{FF2B5EF4-FFF2-40B4-BE49-F238E27FC236}">
-                <a16:creationId xmlns:a16="http://schemas.microsoft.com/office/drawing/2014/main" id="{D550FE94-A35F-D7D4-4988-7BE51157AA17}"/>
+                <a16:creationId xmlns:a16="http://schemas.microsoft.com/office/drawing/2014/main" id="{3C152877-597A-BA9D-6C75-887783DDB819}"/>
               </a:ext>
             </a:extLst>
           </p:cNvPr>
@@ -27963,7 +27996,7 @@
           <p:cNvPr id="10" name="TextBox 9">
             <a:extLst>
               <a:ext uri="{FF2B5EF4-FFF2-40B4-BE49-F238E27FC236}">
-                <a16:creationId xmlns:a16="http://schemas.microsoft.com/office/drawing/2014/main" id="{F628ACFE-30C8-6D88-23C8-754EF29C2DC7}"/>
+                <a16:creationId xmlns:a16="http://schemas.microsoft.com/office/drawing/2014/main" id="{2CA4B9A9-1292-945D-DB23-ABCE3ED03528}"/>
               </a:ext>
             </a:extLst>
           </p:cNvPr>
@@ -28001,7 +28034,7 @@
     </p:spTree>
     <p:extLst>
       <p:ext uri="{BB962C8B-B14F-4D97-AF65-F5344CB8AC3E}">
-        <p14:creationId xmlns:p14="http://schemas.microsoft.com/office/powerpoint/2010/main" val="2476374733"/>
+        <p14:creationId xmlns:p14="http://schemas.microsoft.com/office/powerpoint/2010/main" val="547692433"/>
       </p:ext>
     </p:extLst>
   </p:cSld>
@@ -28033,7 +28066,7 @@
           <p:cNvPr id="2" name="Rectangle 1">
             <a:extLst>
               <a:ext uri="{FF2B5EF4-FFF2-40B4-BE49-F238E27FC236}">
-                <a16:creationId xmlns:a16="http://schemas.microsoft.com/office/drawing/2014/main" id="{6B2618A3-3ECD-2320-41A9-D8585B7E5DD8}"/>
+                <a16:creationId xmlns:a16="http://schemas.microsoft.com/office/drawing/2014/main" id="{3B1AABB7-B714-7210-5DE0-FB851B297D81}"/>
               </a:ext>
             </a:extLst>
           </p:cNvPr>
@@ -28101,7 +28134,7 @@
           <p:cNvPr id="3" name="Rectangle 2">
             <a:extLst>
               <a:ext uri="{FF2B5EF4-FFF2-40B4-BE49-F238E27FC236}">
-                <a16:creationId xmlns:a16="http://schemas.microsoft.com/office/drawing/2014/main" id="{F6253681-1CCB-9D12-C2A5-4C989307B42A}"/>
+                <a16:creationId xmlns:a16="http://schemas.microsoft.com/office/drawing/2014/main" id="{3F2FA6D2-667E-5907-48C6-35B0463E7074}"/>
               </a:ext>
             </a:extLst>
           </p:cNvPr>
@@ -28169,7 +28202,7 @@
           <p:cNvPr id="4" name="TextBox 3">
             <a:extLst>
               <a:ext uri="{FF2B5EF4-FFF2-40B4-BE49-F238E27FC236}">
-                <a16:creationId xmlns:a16="http://schemas.microsoft.com/office/drawing/2014/main" id="{E69BEBFF-BDAC-E398-9670-F9131F7B2CF9}"/>
+                <a16:creationId xmlns:a16="http://schemas.microsoft.com/office/drawing/2014/main" id="{5751F8F3-8EF7-FA77-4788-71037A50754B}"/>
               </a:ext>
             </a:extLst>
           </p:cNvPr>
@@ -28209,7 +28242,7 @@
           <p:cNvPr id="5" name="TextBox 4">
             <a:extLst>
               <a:ext uri="{FF2B5EF4-FFF2-40B4-BE49-F238E27FC236}">
-                <a16:creationId xmlns:a16="http://schemas.microsoft.com/office/drawing/2014/main" id="{5F105128-A9BB-8397-EAC8-04F57C671D3C}"/>
+                <a16:creationId xmlns:a16="http://schemas.microsoft.com/office/drawing/2014/main" id="{392DD425-89D8-F915-A6CA-B8D5F3049FB3}"/>
               </a:ext>
             </a:extLst>
           </p:cNvPr>
@@ -28249,7 +28282,7 @@
           <p:cNvPr id="6" name="TextBox 5">
             <a:extLst>
               <a:ext uri="{FF2B5EF4-FFF2-40B4-BE49-F238E27FC236}">
-                <a16:creationId xmlns:a16="http://schemas.microsoft.com/office/drawing/2014/main" id="{3355B897-1620-1863-5DD7-2F55308F653B}"/>
+                <a16:creationId xmlns:a16="http://schemas.microsoft.com/office/drawing/2014/main" id="{76450E7A-3CC6-B1B6-D9EC-6B7876D5D9DD}"/>
               </a:ext>
             </a:extLst>
           </p:cNvPr>
@@ -28374,7 +28407,7 @@
           <p:cNvPr id="7" name="Rectangle 6">
             <a:extLst>
               <a:ext uri="{FF2B5EF4-FFF2-40B4-BE49-F238E27FC236}">
-                <a16:creationId xmlns:a16="http://schemas.microsoft.com/office/drawing/2014/main" id="{167CA158-4238-AC6D-1AF9-D4D2E3F685DF}"/>
+                <a16:creationId xmlns:a16="http://schemas.microsoft.com/office/drawing/2014/main" id="{770CB3D7-6AF6-9690-A1B1-1A83D97AB06A}"/>
               </a:ext>
             </a:extLst>
           </p:cNvPr>
@@ -28428,7 +28461,7 @@
           <p:cNvPr id="8" name="TextBox 7">
             <a:extLst>
               <a:ext uri="{FF2B5EF4-FFF2-40B4-BE49-F238E27FC236}">
-                <a16:creationId xmlns:a16="http://schemas.microsoft.com/office/drawing/2014/main" id="{210AB11F-2250-ED9A-988B-4A911B166D08}"/>
+                <a16:creationId xmlns:a16="http://schemas.microsoft.com/office/drawing/2014/main" id="{675EB829-55FB-2191-1C45-F53CD56FDB04}"/>
               </a:ext>
             </a:extLst>
           </p:cNvPr>
@@ -28512,7 +28545,7 @@
           <p:cNvPr id="9" name="Rectangle 8">
             <a:extLst>
               <a:ext uri="{FF2B5EF4-FFF2-40B4-BE49-F238E27FC236}">
-                <a16:creationId xmlns:a16="http://schemas.microsoft.com/office/drawing/2014/main" id="{CFFF1A88-4615-689B-E336-93184870CF6E}"/>
+                <a16:creationId xmlns:a16="http://schemas.microsoft.com/office/drawing/2014/main" id="{6738E2A9-E032-2BDB-8A34-5B7B484F8121}"/>
               </a:ext>
             </a:extLst>
           </p:cNvPr>
@@ -28566,7 +28599,7 @@
           <p:cNvPr id="10" name="TextBox 9">
             <a:extLst>
               <a:ext uri="{FF2B5EF4-FFF2-40B4-BE49-F238E27FC236}">
-                <a16:creationId xmlns:a16="http://schemas.microsoft.com/office/drawing/2014/main" id="{2D55A6BE-BEB4-C3C8-7735-A2D4FEAC06D6}"/>
+                <a16:creationId xmlns:a16="http://schemas.microsoft.com/office/drawing/2014/main" id="{31D4FA4C-F8D4-3126-A814-E4697D685FD2}"/>
               </a:ext>
             </a:extLst>
           </p:cNvPr>
@@ -28604,7 +28637,7 @@
     </p:spTree>
     <p:extLst>
       <p:ext uri="{BB962C8B-B14F-4D97-AF65-F5344CB8AC3E}">
-        <p14:creationId xmlns:p14="http://schemas.microsoft.com/office/powerpoint/2010/main" val="937903666"/>
+        <p14:creationId xmlns:p14="http://schemas.microsoft.com/office/powerpoint/2010/main" val="534420866"/>
       </p:ext>
     </p:extLst>
   </p:cSld>
@@ -28636,7 +28669,7 @@
           <p:cNvPr id="2" name="Rectangle 1">
             <a:extLst>
               <a:ext uri="{FF2B5EF4-FFF2-40B4-BE49-F238E27FC236}">
-                <a16:creationId xmlns:a16="http://schemas.microsoft.com/office/drawing/2014/main" id="{DE22EB75-735E-74C1-B100-D3FA50C89754}"/>
+                <a16:creationId xmlns:a16="http://schemas.microsoft.com/office/drawing/2014/main" id="{033BB6A7-02AC-A075-E8FA-7349B9901D00}"/>
               </a:ext>
             </a:extLst>
           </p:cNvPr>
@@ -28704,7 +28737,7 @@
           <p:cNvPr id="3" name="Rectangle 2">
             <a:extLst>
               <a:ext uri="{FF2B5EF4-FFF2-40B4-BE49-F238E27FC236}">
-                <a16:creationId xmlns:a16="http://schemas.microsoft.com/office/drawing/2014/main" id="{BD3EB8BD-9D17-48FC-9A46-4FD093FD3595}"/>
+                <a16:creationId xmlns:a16="http://schemas.microsoft.com/office/drawing/2014/main" id="{9B7C6523-27A6-5B6C-D35D-199E7EBDBED3}"/>
               </a:ext>
             </a:extLst>
           </p:cNvPr>
@@ -28772,7 +28805,7 @@
           <p:cNvPr id="4" name="TextBox 3">
             <a:extLst>
               <a:ext uri="{FF2B5EF4-FFF2-40B4-BE49-F238E27FC236}">
-                <a16:creationId xmlns:a16="http://schemas.microsoft.com/office/drawing/2014/main" id="{C88E1B2A-5AD2-BD13-64BA-219161B5BFAF}"/>
+                <a16:creationId xmlns:a16="http://schemas.microsoft.com/office/drawing/2014/main" id="{C7AB1B45-05A8-E2FE-4BAC-E8D75E374E04}"/>
               </a:ext>
             </a:extLst>
           </p:cNvPr>
@@ -28812,7 +28845,7 @@
           <p:cNvPr id="5" name="TextBox 4">
             <a:extLst>
               <a:ext uri="{FF2B5EF4-FFF2-40B4-BE49-F238E27FC236}">
-                <a16:creationId xmlns:a16="http://schemas.microsoft.com/office/drawing/2014/main" id="{2C5128D5-E1DC-17D6-1213-7A466E1AFED5}"/>
+                <a16:creationId xmlns:a16="http://schemas.microsoft.com/office/drawing/2014/main" id="{284D34A6-5212-C3F7-1985-9DB73A495BED}"/>
               </a:ext>
             </a:extLst>
           </p:cNvPr>
@@ -28852,7 +28885,7 @@
           <p:cNvPr id="6" name="TextBox 5">
             <a:extLst>
               <a:ext uri="{FF2B5EF4-FFF2-40B4-BE49-F238E27FC236}">
-                <a16:creationId xmlns:a16="http://schemas.microsoft.com/office/drawing/2014/main" id="{18B3496B-A16B-4C41-5DB4-66564D7F9BB3}"/>
+                <a16:creationId xmlns:a16="http://schemas.microsoft.com/office/drawing/2014/main" id="{3337E6AB-2501-7E8A-CC71-351E5EAC8FAD}"/>
               </a:ext>
             </a:extLst>
           </p:cNvPr>
@@ -28945,7 +28978,7 @@
           <p:cNvPr id="7" name="Rectangle 6">
             <a:extLst>
               <a:ext uri="{FF2B5EF4-FFF2-40B4-BE49-F238E27FC236}">
-                <a16:creationId xmlns:a16="http://schemas.microsoft.com/office/drawing/2014/main" id="{C7128BB1-BB18-AB0F-77FA-32FF32127129}"/>
+                <a16:creationId xmlns:a16="http://schemas.microsoft.com/office/drawing/2014/main" id="{7CD3CC0B-0F03-4691-B84C-2383986B338A}"/>
               </a:ext>
             </a:extLst>
           </p:cNvPr>
@@ -28999,7 +29032,7 @@
           <p:cNvPr id="8" name="TextBox 7">
             <a:extLst>
               <a:ext uri="{FF2B5EF4-FFF2-40B4-BE49-F238E27FC236}">
-                <a16:creationId xmlns:a16="http://schemas.microsoft.com/office/drawing/2014/main" id="{C1774341-7881-2A8E-56F0-B310FF0B1467}"/>
+                <a16:creationId xmlns:a16="http://schemas.microsoft.com/office/drawing/2014/main" id="{F78B5392-FA59-0E21-7C4B-FA9B78CE6582}"/>
               </a:ext>
             </a:extLst>
           </p:cNvPr>
@@ -29009,7 +29042,7 @@
         <p:spPr>
           <a:xfrm>
             <a:off x="6375400" y="1549400"/>
-            <a:ext cx="4521200" cy="1302921"/>
+            <a:ext cx="4521200" cy="1502976"/>
           </a:xfrm>
           <a:prstGeom prst="rect">
             <a:avLst/>
@@ -29029,6 +29062,17 @@
                 </a:solidFill>
                 <a:latin typeface="Cascadia Mono" panose="020B0609020000020004" pitchFamily="49" charset="0"/>
               </a:rPr>
+              <a:t>let TargetDevice = "usm262346";</a:t>
+            </a:r>
+          </a:p>
+          <a:p>
+            <a:r>
+              <a:rPr lang="en-US" sz="1300">
+                <a:solidFill>
+                  <a:srgbClr val="0B1F3A"/>
+                </a:solidFill>
+                <a:latin typeface="Cascadia Mono" panose="020B0609020000020004" pitchFamily="49" charset="0"/>
+              </a:rPr>
               <a:t>DeviceFileEvents</a:t>
             </a:r>
           </a:p>
@@ -29083,7 +29127,7 @@
           <p:cNvPr id="9" name="Rectangle 8">
             <a:extLst>
               <a:ext uri="{FF2B5EF4-FFF2-40B4-BE49-F238E27FC236}">
-                <a16:creationId xmlns:a16="http://schemas.microsoft.com/office/drawing/2014/main" id="{B2204112-A32D-3E50-C035-99DB21ABDF67}"/>
+                <a16:creationId xmlns:a16="http://schemas.microsoft.com/office/drawing/2014/main" id="{E240FA53-EA43-BF68-6F39-1E5AE77C3B2D}"/>
               </a:ext>
             </a:extLst>
           </p:cNvPr>
@@ -29137,7 +29181,7 @@
           <p:cNvPr id="10" name="TextBox 9">
             <a:extLst>
               <a:ext uri="{FF2B5EF4-FFF2-40B4-BE49-F238E27FC236}">
-                <a16:creationId xmlns:a16="http://schemas.microsoft.com/office/drawing/2014/main" id="{8FB2ED38-23BF-9F6A-F447-E7F5A1863695}"/>
+                <a16:creationId xmlns:a16="http://schemas.microsoft.com/office/drawing/2014/main" id="{F9101737-608F-CC7A-C5A0-A904FBE09886}"/>
               </a:ext>
             </a:extLst>
           </p:cNvPr>
@@ -29175,7 +29219,7 @@
     </p:spTree>
     <p:extLst>
       <p:ext uri="{BB962C8B-B14F-4D97-AF65-F5344CB8AC3E}">
-        <p14:creationId xmlns:p14="http://schemas.microsoft.com/office/powerpoint/2010/main" val="3768275741"/>
+        <p14:creationId xmlns:p14="http://schemas.microsoft.com/office/powerpoint/2010/main" val="3974123894"/>
       </p:ext>
     </p:extLst>
   </p:cSld>
@@ -29207,7 +29251,7 @@
           <p:cNvPr id="2" name="Rectangle 1">
             <a:extLst>
               <a:ext uri="{FF2B5EF4-FFF2-40B4-BE49-F238E27FC236}">
-                <a16:creationId xmlns:a16="http://schemas.microsoft.com/office/drawing/2014/main" id="{BDDEA6F7-5F9C-699E-4AF0-5118AF33C7D5}"/>
+                <a16:creationId xmlns:a16="http://schemas.microsoft.com/office/drawing/2014/main" id="{51859487-2293-57C9-63AA-75B13E7F543E}"/>
               </a:ext>
             </a:extLst>
           </p:cNvPr>
@@ -29275,7 +29319,7 @@
           <p:cNvPr id="3" name="Rectangle 2">
             <a:extLst>
               <a:ext uri="{FF2B5EF4-FFF2-40B4-BE49-F238E27FC236}">
-                <a16:creationId xmlns:a16="http://schemas.microsoft.com/office/drawing/2014/main" id="{96F14197-935D-84D1-EE04-0FEA41C099FB}"/>
+                <a16:creationId xmlns:a16="http://schemas.microsoft.com/office/drawing/2014/main" id="{6FA5BF29-1FD0-8A0A-979E-0939650F045A}"/>
               </a:ext>
             </a:extLst>
           </p:cNvPr>
@@ -29343,7 +29387,7 @@
           <p:cNvPr id="4" name="TextBox 3">
             <a:extLst>
               <a:ext uri="{FF2B5EF4-FFF2-40B4-BE49-F238E27FC236}">
-                <a16:creationId xmlns:a16="http://schemas.microsoft.com/office/drawing/2014/main" id="{136D3521-3477-41CD-A6F1-A11B6A9840F4}"/>
+                <a16:creationId xmlns:a16="http://schemas.microsoft.com/office/drawing/2014/main" id="{ABB9C24C-F03B-6009-EF7C-1317A991225D}"/>
               </a:ext>
             </a:extLst>
           </p:cNvPr>
@@ -29383,7 +29427,7 @@
           <p:cNvPr id="5" name="TextBox 4">
             <a:extLst>
               <a:ext uri="{FF2B5EF4-FFF2-40B4-BE49-F238E27FC236}">
-                <a16:creationId xmlns:a16="http://schemas.microsoft.com/office/drawing/2014/main" id="{561E2D6C-F795-0DE0-EDA4-3A55238053DD}"/>
+                <a16:creationId xmlns:a16="http://schemas.microsoft.com/office/drawing/2014/main" id="{E72EDFCD-033F-8204-21FC-A588138E6133}"/>
               </a:ext>
             </a:extLst>
           </p:cNvPr>
@@ -29423,7 +29467,7 @@
           <p:cNvPr id="6" name="TextBox 5">
             <a:extLst>
               <a:ext uri="{FF2B5EF4-FFF2-40B4-BE49-F238E27FC236}">
-                <a16:creationId xmlns:a16="http://schemas.microsoft.com/office/drawing/2014/main" id="{B3DA9A9A-B6D0-5F50-3CB5-525AE4C21A12}"/>
+                <a16:creationId xmlns:a16="http://schemas.microsoft.com/office/drawing/2014/main" id="{CD48621B-6D73-8E26-2E92-FE7AB9B0210E}"/>
               </a:ext>
             </a:extLst>
           </p:cNvPr>
@@ -29532,7 +29576,7 @@
           <p:cNvPr id="7" name="Rectangle 6">
             <a:extLst>
               <a:ext uri="{FF2B5EF4-FFF2-40B4-BE49-F238E27FC236}">
-                <a16:creationId xmlns:a16="http://schemas.microsoft.com/office/drawing/2014/main" id="{3D11D6A6-7C66-A510-7A54-3460336E6D34}"/>
+                <a16:creationId xmlns:a16="http://schemas.microsoft.com/office/drawing/2014/main" id="{F5AD9A8B-AA51-91FD-DB9C-E122877B78E9}"/>
               </a:ext>
             </a:extLst>
           </p:cNvPr>
@@ -29586,7 +29630,7 @@
           <p:cNvPr id="8" name="TextBox 7">
             <a:extLst>
               <a:ext uri="{FF2B5EF4-FFF2-40B4-BE49-F238E27FC236}">
-                <a16:creationId xmlns:a16="http://schemas.microsoft.com/office/drawing/2014/main" id="{98492D1D-9C6E-FB48-CF37-46FBEAC1337F}"/>
+                <a16:creationId xmlns:a16="http://schemas.microsoft.com/office/drawing/2014/main" id="{613C8B04-624A-7071-D256-F150621FD9C6}"/>
               </a:ext>
             </a:extLst>
           </p:cNvPr>
@@ -29596,7 +29640,7 @@
         <p:spPr>
           <a:xfrm>
             <a:off x="6375400" y="1447800"/>
-            <a:ext cx="4521200" cy="1502976"/>
+            <a:ext cx="4521200" cy="1703030"/>
           </a:xfrm>
           <a:prstGeom prst="rect">
             <a:avLst/>
@@ -29616,6 +29660,17 @@
                 </a:solidFill>
                 <a:latin typeface="Cascadia Mono" panose="020B0609020000020004" pitchFamily="49" charset="0"/>
               </a:rPr>
+              <a:t>let TargetDevice = "usm262346";</a:t>
+            </a:r>
+          </a:p>
+          <a:p>
+            <a:r>
+              <a:rPr lang="en-US" sz="1300">
+                <a:solidFill>
+                  <a:srgbClr val="0B1F3A"/>
+                </a:solidFill>
+                <a:latin typeface="Cascadia Mono" panose="020B0609020000020004" pitchFamily="49" charset="0"/>
+              </a:rPr>
               <a:t>DeviceFileEvents</a:t>
             </a:r>
           </a:p>
@@ -29670,7 +29725,7 @@
           <p:cNvPr id="9" name="Rectangle 8">
             <a:extLst>
               <a:ext uri="{FF2B5EF4-FFF2-40B4-BE49-F238E27FC236}">
-                <a16:creationId xmlns:a16="http://schemas.microsoft.com/office/drawing/2014/main" id="{432F7313-033C-F4AC-DBBF-AEB95FF92B2A}"/>
+                <a16:creationId xmlns:a16="http://schemas.microsoft.com/office/drawing/2014/main" id="{D9C7CEBE-4B93-1F00-B68C-BB4039D7B662}"/>
               </a:ext>
             </a:extLst>
           </p:cNvPr>
@@ -29724,7 +29779,7 @@
           <p:cNvPr id="10" name="TextBox 9">
             <a:extLst>
               <a:ext uri="{FF2B5EF4-FFF2-40B4-BE49-F238E27FC236}">
-                <a16:creationId xmlns:a16="http://schemas.microsoft.com/office/drawing/2014/main" id="{0EB79771-E25A-E5A4-03E2-6BC1A7569FBA}"/>
+                <a16:creationId xmlns:a16="http://schemas.microsoft.com/office/drawing/2014/main" id="{C3145CBF-C6BF-97F1-D102-C50C92E5E70E}"/>
               </a:ext>
             </a:extLst>
           </p:cNvPr>
@@ -29762,7 +29817,7 @@
     </p:spTree>
     <p:extLst>
       <p:ext uri="{BB962C8B-B14F-4D97-AF65-F5344CB8AC3E}">
-        <p14:creationId xmlns:p14="http://schemas.microsoft.com/office/powerpoint/2010/main" val="1107090610"/>
+        <p14:creationId xmlns:p14="http://schemas.microsoft.com/office/powerpoint/2010/main" val="512196102"/>
       </p:ext>
     </p:extLst>
   </p:cSld>
